--- a/R&D_Automotive/AUTOMOTIVE.pptx
+++ b/R&D_Automotive/AUTOMOTIVE.pptx
@@ -223,7 +223,7 @@
           <a:p>
             <a:fld id="{FFF193A8-9921-413C-B497-C8E23C4C8674}" type="datetimeFigureOut">
               <a:rPr lang="en-US" smtClean="0"/>
-              <a:t>2/8/2026</a:t>
+              <a:t>2/9/2026</a:t>
             </a:fld>
             <a:endParaRPr lang="en-US"/>
           </a:p>
@@ -622,7 +622,7 @@
           <a:p>
             <a:fld id="{B5ACFBCD-0C52-4AB4-A095-855112466BA7}" type="datetimeFigureOut">
               <a:rPr lang="en-US" smtClean="0"/>
-              <a:t>2/8/2026</a:t>
+              <a:t>2/9/2026</a:t>
             </a:fld>
             <a:endParaRPr lang="en-US"/>
           </a:p>
@@ -792,7 +792,7 @@
           <a:p>
             <a:fld id="{B5ACFBCD-0C52-4AB4-A095-855112466BA7}" type="datetimeFigureOut">
               <a:rPr lang="en-US" smtClean="0"/>
-              <a:t>2/8/2026</a:t>
+              <a:t>2/9/2026</a:t>
             </a:fld>
             <a:endParaRPr lang="en-US"/>
           </a:p>
@@ -972,7 +972,7 @@
           <a:p>
             <a:fld id="{B5ACFBCD-0C52-4AB4-A095-855112466BA7}" type="datetimeFigureOut">
               <a:rPr lang="en-US" smtClean="0"/>
-              <a:t>2/8/2026</a:t>
+              <a:t>2/9/2026</a:t>
             </a:fld>
             <a:endParaRPr lang="en-US"/>
           </a:p>
@@ -1142,7 +1142,7 @@
           <a:p>
             <a:fld id="{B5ACFBCD-0C52-4AB4-A095-855112466BA7}" type="datetimeFigureOut">
               <a:rPr lang="en-US" smtClean="0"/>
-              <a:t>2/8/2026</a:t>
+              <a:t>2/9/2026</a:t>
             </a:fld>
             <a:endParaRPr lang="en-US"/>
           </a:p>
@@ -1388,7 +1388,7 @@
           <a:p>
             <a:fld id="{B5ACFBCD-0C52-4AB4-A095-855112466BA7}" type="datetimeFigureOut">
               <a:rPr lang="en-US" smtClean="0"/>
-              <a:t>2/8/2026</a:t>
+              <a:t>2/9/2026</a:t>
             </a:fld>
             <a:endParaRPr lang="en-US"/>
           </a:p>
@@ -1620,7 +1620,7 @@
           <a:p>
             <a:fld id="{B5ACFBCD-0C52-4AB4-A095-855112466BA7}" type="datetimeFigureOut">
               <a:rPr lang="en-US" smtClean="0"/>
-              <a:t>2/8/2026</a:t>
+              <a:t>2/9/2026</a:t>
             </a:fld>
             <a:endParaRPr lang="en-US"/>
           </a:p>
@@ -1987,7 +1987,7 @@
           <a:p>
             <a:fld id="{B5ACFBCD-0C52-4AB4-A095-855112466BA7}" type="datetimeFigureOut">
               <a:rPr lang="en-US" smtClean="0"/>
-              <a:t>2/8/2026</a:t>
+              <a:t>2/9/2026</a:t>
             </a:fld>
             <a:endParaRPr lang="en-US"/>
           </a:p>
@@ -2105,7 +2105,7 @@
           <a:p>
             <a:fld id="{B5ACFBCD-0C52-4AB4-A095-855112466BA7}" type="datetimeFigureOut">
               <a:rPr lang="en-US" smtClean="0"/>
-              <a:t>2/8/2026</a:t>
+              <a:t>2/9/2026</a:t>
             </a:fld>
             <a:endParaRPr lang="en-US"/>
           </a:p>
@@ -2200,7 +2200,7 @@
           <a:p>
             <a:fld id="{B5ACFBCD-0C52-4AB4-A095-855112466BA7}" type="datetimeFigureOut">
               <a:rPr lang="en-US" smtClean="0"/>
-              <a:t>2/8/2026</a:t>
+              <a:t>2/9/2026</a:t>
             </a:fld>
             <a:endParaRPr lang="en-US"/>
           </a:p>
@@ -2477,7 +2477,7 @@
           <a:p>
             <a:fld id="{B5ACFBCD-0C52-4AB4-A095-855112466BA7}" type="datetimeFigureOut">
               <a:rPr lang="en-US" smtClean="0"/>
-              <a:t>2/8/2026</a:t>
+              <a:t>2/9/2026</a:t>
             </a:fld>
             <a:endParaRPr lang="en-US"/>
           </a:p>
@@ -2730,7 +2730,7 @@
           <a:p>
             <a:fld id="{B5ACFBCD-0C52-4AB4-A095-855112466BA7}" type="datetimeFigureOut">
               <a:rPr lang="en-US" smtClean="0"/>
-              <a:t>2/8/2026</a:t>
+              <a:t>2/9/2026</a:t>
             </a:fld>
             <a:endParaRPr lang="en-US"/>
           </a:p>
@@ -2943,7 +2943,7 @@
           <a:p>
             <a:fld id="{B5ACFBCD-0C52-4AB4-A095-855112466BA7}" type="datetimeFigureOut">
               <a:rPr lang="en-US" smtClean="0"/>
-              <a:t>2/8/2026</a:t>
+              <a:t>2/9/2026</a:t>
             </a:fld>
             <a:endParaRPr lang="en-US"/>
           </a:p>
@@ -5438,7 +5438,7 @@
           <a:graphicData uri="http://schemas.openxmlformats.org/presentationml/2006/ole">
             <mc:AlternateContent xmlns:mc="http://schemas.openxmlformats.org/markup-compatibility/2006">
               <mc:Choice xmlns:v="urn:schemas-microsoft-com:vml" Requires="v">
-                <p:oleObj spid="_x0000_s2073" name="Arkusz" r:id="rId3" imgW="10372571" imgH="1485900" progId="Excel.Sheet.12">
+                <p:oleObj spid="_x0000_s2074" name="Arkusz" r:id="rId3" imgW="10372571" imgH="1485900" progId="Excel.Sheet.12">
                   <p:embed/>
                 </p:oleObj>
               </mc:Choice>
@@ -7285,11 +7285,7 @@
                     <a:p>
                       <a:r>
                         <a:rPr lang="en-US" dirty="0" smtClean="0"/>
-                        <a:t>0x22 – Read Data By Identifier (DID</a:t>
-                      </a:r>
-                      <a:r>
-                        <a:rPr lang="en-US" dirty="0" smtClean="0"/>
-                        <a:t>)</a:t>
+                        <a:t>0x22 – Read Data By Identifier (DID)</a:t>
                       </a:r>
                       <a:endParaRPr lang="pl-PL" dirty="0" smtClean="0"/>
                     </a:p>
@@ -7337,11 +7333,7 @@
                     <a:p>
                       <a:r>
                         <a:rPr lang="pl-PL" dirty="0" smtClean="0"/>
-                        <a:t>01 Odczyt ilości błędów </a:t>
-                      </a:r>
-                      <a:r>
-                        <a:rPr lang="pl-PL" dirty="0" smtClean="0"/>
-                        <a:t>DTC</a:t>
+                        <a:t>01 Odczyt ilości błędów DTC</a:t>
                       </a:r>
                     </a:p>
                     <a:p>
@@ -9133,11 +9125,6 @@
                         </a:rPr>
                         <a:t>np. System musi wykrywać poślizg i stabilizować tor jazdy</a:t>
                       </a:r>
-                      <a:endParaRPr lang="pl-PL" b="1" dirty="0" smtClean="0">
-                        <a:solidFill>
-                          <a:srgbClr val="00B050"/>
-                        </a:solidFill>
-                      </a:endParaRPr>
                     </a:p>
                   </a:txBody>
                   <a:tcPr>
@@ -9440,11 +9427,6 @@
                         </a:rPr>
                         <a:t>kalibracja</a:t>
                       </a:r>
-                      <a:endParaRPr lang="pl-PL" b="1" dirty="0" smtClean="0">
-                        <a:solidFill>
-                          <a:srgbClr val="00B050"/>
-                        </a:solidFill>
-                      </a:endParaRPr>
                     </a:p>
                     <a:p>
                       <a:endParaRPr lang="en-US" b="1" dirty="0">
@@ -12765,7 +12747,7 @@
           <p:nvPr>
             <p:extLst>
               <p:ext uri="{D42A27DB-BD31-4B8C-83A1-F6EECF244321}">
-                <p14:modId xmlns:p14="http://schemas.microsoft.com/office/powerpoint/2010/main" val="3722933329"/>
+                <p14:modId xmlns:p14="http://schemas.microsoft.com/office/powerpoint/2010/main" val="3658711474"/>
               </p:ext>
             </p:extLst>
           </p:nvPr>
@@ -12814,14 +12796,14 @@
                     </a:ext>
                   </a:extLst>
                 </a:gridCol>
-                <a:gridCol w="1423270">
+                <a:gridCol w="1509190">
                   <a:extLst>
                     <a:ext uri="{9D8B030D-6E8A-4147-A177-3AD203B41FA5}">
                       <a16:colId xmlns:a16="http://schemas.microsoft.com/office/drawing/2014/main" val="802477723"/>
                     </a:ext>
                   </a:extLst>
                 </a:gridCol>
-                <a:gridCol w="1423270">
+                <a:gridCol w="1337350">
                   <a:extLst>
                     <a:ext uri="{9D8B030D-6E8A-4147-A177-3AD203B41FA5}">
                       <a16:colId xmlns:a16="http://schemas.microsoft.com/office/drawing/2014/main" val="4261543798"/>
@@ -17463,11 +17445,7 @@
                       </a:r>
                       <a:r>
                         <a:rPr lang="pl-PL" dirty="0" smtClean="0"/>
-                        <a:t>]</a:t>
-                      </a:r>
-                      <a:r>
-                        <a:rPr lang="pl-PL" dirty="0" smtClean="0"/>
-                        <a:t>.</a:t>
+                        <a:t>].</a:t>
                       </a:r>
                       <a:endParaRPr lang="en-US" dirty="0" smtClean="0"/>
                     </a:p>
@@ -18565,11 +18543,7 @@
                     <a:p>
                       <a:r>
                         <a:rPr lang="pl-PL" b="1" dirty="0" smtClean="0"/>
-                        <a:t>2. Hazard i analiza ryzyka (</a:t>
-                      </a:r>
-                      <a:r>
-                        <a:rPr lang="pl-PL" b="1" dirty="0" smtClean="0"/>
-                        <a:t>HARA</a:t>
+                        <a:t>2. Hazard i analiza ryzyka (HARA</a:t>
                       </a:r>
                       <a:r>
                         <a:rPr lang="pl-PL" b="1" baseline="0" dirty="0" smtClean="0"/>
@@ -18668,13 +18642,8 @@
                       </a:r>
                       <a:r>
                         <a:rPr lang="pl-PL" dirty="0" smtClean="0"/>
-                        <a:t> (możliwość opanowania przez kierowcę</a:t>
-                      </a:r>
-                      <a:r>
-                        <a:rPr lang="pl-PL" dirty="0" smtClean="0"/>
-                        <a:t>)</a:t>
-                      </a:r>
-                      <a:endParaRPr lang="pl-PL" dirty="0" smtClean="0"/>
+                        <a:t> (możliwość opanowania przez kierowcę)</a:t>
+                      </a:r>
                     </a:p>
                   </a:txBody>
                   <a:tcPr/>

--- a/R&D_Automotive/AUTOMOTIVE.pptx
+++ b/R&D_Automotive/AUTOMOTIVE.pptx
@@ -5,36 +5,37 @@
     <p:sldMasterId id="2147483648" r:id="rId1"/>
   </p:sldMasterIdLst>
   <p:notesMasterIdLst>
-    <p:notesMasterId r:id="rId29"/>
+    <p:notesMasterId r:id="rId30"/>
   </p:notesMasterIdLst>
   <p:sldIdLst>
-    <p:sldId id="270" r:id="rId2"/>
-    <p:sldId id="276" r:id="rId3"/>
-    <p:sldId id="275" r:id="rId4"/>
-    <p:sldId id="277" r:id="rId5"/>
-    <p:sldId id="281" r:id="rId6"/>
-    <p:sldId id="268" r:id="rId7"/>
-    <p:sldId id="282" r:id="rId8"/>
-    <p:sldId id="278" r:id="rId9"/>
-    <p:sldId id="279" r:id="rId10"/>
-    <p:sldId id="271" r:id="rId11"/>
-    <p:sldId id="272" r:id="rId12"/>
-    <p:sldId id="273" r:id="rId13"/>
-    <p:sldId id="280" r:id="rId14"/>
-    <p:sldId id="274" r:id="rId15"/>
-    <p:sldId id="269" r:id="rId16"/>
-    <p:sldId id="266" r:id="rId17"/>
-    <p:sldId id="264" r:id="rId18"/>
-    <p:sldId id="267" r:id="rId19"/>
-    <p:sldId id="263" r:id="rId20"/>
-    <p:sldId id="265" r:id="rId21"/>
-    <p:sldId id="260" r:id="rId22"/>
-    <p:sldId id="261" r:id="rId23"/>
-    <p:sldId id="256" r:id="rId24"/>
-    <p:sldId id="257" r:id="rId25"/>
-    <p:sldId id="258" r:id="rId26"/>
-    <p:sldId id="259" r:id="rId27"/>
-    <p:sldId id="262" r:id="rId28"/>
+    <p:sldId id="283" r:id="rId2"/>
+    <p:sldId id="270" r:id="rId3"/>
+    <p:sldId id="276" r:id="rId4"/>
+    <p:sldId id="275" r:id="rId5"/>
+    <p:sldId id="277" r:id="rId6"/>
+    <p:sldId id="281" r:id="rId7"/>
+    <p:sldId id="268" r:id="rId8"/>
+    <p:sldId id="282" r:id="rId9"/>
+    <p:sldId id="278" r:id="rId10"/>
+    <p:sldId id="279" r:id="rId11"/>
+    <p:sldId id="271" r:id="rId12"/>
+    <p:sldId id="272" r:id="rId13"/>
+    <p:sldId id="273" r:id="rId14"/>
+    <p:sldId id="280" r:id="rId15"/>
+    <p:sldId id="274" r:id="rId16"/>
+    <p:sldId id="269" r:id="rId17"/>
+    <p:sldId id="266" r:id="rId18"/>
+    <p:sldId id="264" r:id="rId19"/>
+    <p:sldId id="267" r:id="rId20"/>
+    <p:sldId id="263" r:id="rId21"/>
+    <p:sldId id="265" r:id="rId22"/>
+    <p:sldId id="260" r:id="rId23"/>
+    <p:sldId id="261" r:id="rId24"/>
+    <p:sldId id="256" r:id="rId25"/>
+    <p:sldId id="257" r:id="rId26"/>
+    <p:sldId id="258" r:id="rId27"/>
+    <p:sldId id="259" r:id="rId28"/>
+    <p:sldId id="262" r:id="rId29"/>
   </p:sldIdLst>
   <p:sldSz cx="12192000" cy="6858000"/>
   <p:notesSz cx="6858000" cy="9144000"/>
@@ -223,7 +224,7 @@
           <a:p>
             <a:fld id="{FFF193A8-9921-413C-B497-C8E23C4C8674}" type="datetimeFigureOut">
               <a:rPr lang="en-US" smtClean="0"/>
-              <a:t>2/9/2026</a:t>
+              <a:t>2/13/2026</a:t>
             </a:fld>
             <a:endParaRPr lang="en-US"/>
           </a:p>
@@ -622,7 +623,7 @@
           <a:p>
             <a:fld id="{B5ACFBCD-0C52-4AB4-A095-855112466BA7}" type="datetimeFigureOut">
               <a:rPr lang="en-US" smtClean="0"/>
-              <a:t>2/9/2026</a:t>
+              <a:t>2/13/2026</a:t>
             </a:fld>
             <a:endParaRPr lang="en-US"/>
           </a:p>
@@ -792,7 +793,7 @@
           <a:p>
             <a:fld id="{B5ACFBCD-0C52-4AB4-A095-855112466BA7}" type="datetimeFigureOut">
               <a:rPr lang="en-US" smtClean="0"/>
-              <a:t>2/9/2026</a:t>
+              <a:t>2/13/2026</a:t>
             </a:fld>
             <a:endParaRPr lang="en-US"/>
           </a:p>
@@ -972,7 +973,7 @@
           <a:p>
             <a:fld id="{B5ACFBCD-0C52-4AB4-A095-855112466BA7}" type="datetimeFigureOut">
               <a:rPr lang="en-US" smtClean="0"/>
-              <a:t>2/9/2026</a:t>
+              <a:t>2/13/2026</a:t>
             </a:fld>
             <a:endParaRPr lang="en-US"/>
           </a:p>
@@ -1142,7 +1143,7 @@
           <a:p>
             <a:fld id="{B5ACFBCD-0C52-4AB4-A095-855112466BA7}" type="datetimeFigureOut">
               <a:rPr lang="en-US" smtClean="0"/>
-              <a:t>2/9/2026</a:t>
+              <a:t>2/13/2026</a:t>
             </a:fld>
             <a:endParaRPr lang="en-US"/>
           </a:p>
@@ -1388,7 +1389,7 @@
           <a:p>
             <a:fld id="{B5ACFBCD-0C52-4AB4-A095-855112466BA7}" type="datetimeFigureOut">
               <a:rPr lang="en-US" smtClean="0"/>
-              <a:t>2/9/2026</a:t>
+              <a:t>2/13/2026</a:t>
             </a:fld>
             <a:endParaRPr lang="en-US"/>
           </a:p>
@@ -1620,7 +1621,7 @@
           <a:p>
             <a:fld id="{B5ACFBCD-0C52-4AB4-A095-855112466BA7}" type="datetimeFigureOut">
               <a:rPr lang="en-US" smtClean="0"/>
-              <a:t>2/9/2026</a:t>
+              <a:t>2/13/2026</a:t>
             </a:fld>
             <a:endParaRPr lang="en-US"/>
           </a:p>
@@ -1987,7 +1988,7 @@
           <a:p>
             <a:fld id="{B5ACFBCD-0C52-4AB4-A095-855112466BA7}" type="datetimeFigureOut">
               <a:rPr lang="en-US" smtClean="0"/>
-              <a:t>2/9/2026</a:t>
+              <a:t>2/13/2026</a:t>
             </a:fld>
             <a:endParaRPr lang="en-US"/>
           </a:p>
@@ -2105,7 +2106,7 @@
           <a:p>
             <a:fld id="{B5ACFBCD-0C52-4AB4-A095-855112466BA7}" type="datetimeFigureOut">
               <a:rPr lang="en-US" smtClean="0"/>
-              <a:t>2/9/2026</a:t>
+              <a:t>2/13/2026</a:t>
             </a:fld>
             <a:endParaRPr lang="en-US"/>
           </a:p>
@@ -2200,7 +2201,7 @@
           <a:p>
             <a:fld id="{B5ACFBCD-0C52-4AB4-A095-855112466BA7}" type="datetimeFigureOut">
               <a:rPr lang="en-US" smtClean="0"/>
-              <a:t>2/9/2026</a:t>
+              <a:t>2/13/2026</a:t>
             </a:fld>
             <a:endParaRPr lang="en-US"/>
           </a:p>
@@ -2477,7 +2478,7 @@
           <a:p>
             <a:fld id="{B5ACFBCD-0C52-4AB4-A095-855112466BA7}" type="datetimeFigureOut">
               <a:rPr lang="en-US" smtClean="0"/>
-              <a:t>2/9/2026</a:t>
+              <a:t>2/13/2026</a:t>
             </a:fld>
             <a:endParaRPr lang="en-US"/>
           </a:p>
@@ -2730,7 +2731,7 @@
           <a:p>
             <a:fld id="{B5ACFBCD-0C52-4AB4-A095-855112466BA7}" type="datetimeFigureOut">
               <a:rPr lang="en-US" smtClean="0"/>
-              <a:t>2/9/2026</a:t>
+              <a:t>2/13/2026</a:t>
             </a:fld>
             <a:endParaRPr lang="en-US"/>
           </a:p>
@@ -2943,7 +2944,7 @@
           <a:p>
             <a:fld id="{B5ACFBCD-0C52-4AB4-A095-855112466BA7}" type="datetimeFigureOut">
               <a:rPr lang="en-US" smtClean="0"/>
-              <a:t>2/9/2026</a:t>
+              <a:t>2/13/2026</a:t>
             </a:fld>
             <a:endParaRPr lang="en-US"/>
           </a:p>
@@ -3348,30 +3349,374 @@
           <a:chExt cx="0" cy="0"/>
         </a:xfrm>
       </p:grpSpPr>
+      <p:sp>
+        <p:nvSpPr>
+          <p:cNvPr id="2" name="Tytuł 1"/>
+          <p:cNvSpPr>
+            <a:spLocks noGrp="1"/>
+          </p:cNvSpPr>
+          <p:nvPr>
+            <p:ph type="title"/>
+          </p:nvPr>
+        </p:nvSpPr>
+        <p:spPr>
+          <a:xfrm>
+            <a:off x="199697" y="6198367"/>
+            <a:ext cx="11792606" cy="381109"/>
+          </a:xfrm>
+        </p:spPr>
+        <p:txBody>
+          <a:bodyPr>
+            <a:normAutofit/>
+          </a:bodyPr>
+          <a:lstStyle/>
+          <a:p>
+            <a:r>
+              <a:rPr lang="pl-PL" sz="1200" b="1" dirty="0" smtClean="0"/>
+              <a:t>		</a:t>
+            </a:r>
+            <a:r>
+              <a:rPr lang="pl-PL" sz="1200" b="1" dirty="0">
+                <a:hlinkClick r:id="rId2"/>
+              </a:rPr>
+              <a:t> Engineer.wka@gmail.com </a:t>
+            </a:r>
+            <a:r>
+              <a:rPr lang="pl-PL" sz="1200" b="1" dirty="0" smtClean="0"/>
+              <a:t>		+48 795 738 507	</a:t>
+            </a:r>
+            <a:r>
+              <a:rPr lang="pl-PL" sz="1200" b="1" dirty="0" err="1" smtClean="0"/>
+              <a:t>Linkedin</a:t>
+            </a:r>
+            <a:r>
+              <a:rPr lang="pl-PL" sz="1200" b="1" dirty="0" smtClean="0"/>
+              <a:t>		</a:t>
+            </a:r>
+            <a:r>
+              <a:rPr lang="pl-PL" sz="1200" b="1" dirty="0" err="1" smtClean="0"/>
+              <a:t>Github</a:t>
+            </a:r>
+            <a:r>
+              <a:rPr lang="pl-PL" sz="1200" b="1" dirty="0" smtClean="0"/>
+              <a:t>		</a:t>
+            </a:r>
+            <a:r>
+              <a:rPr lang="pl-PL" sz="1200" b="1" dirty="0" err="1" smtClean="0"/>
+              <a:t>Python</a:t>
+            </a:r>
+            <a:endParaRPr lang="en-US" sz="1200" b="1" dirty="0"/>
+          </a:p>
+        </p:txBody>
+      </p:sp>
       <p:pic>
         <p:nvPicPr>
-          <p:cNvPr id="6" name="Obraz 5"/>
+          <p:cNvPr id="4" name="Obraz 3"/>
           <p:cNvPicPr>
             <a:picLocks noChangeAspect="1"/>
           </p:cNvPicPr>
           <p:nvPr/>
         </p:nvPicPr>
         <p:blipFill>
-          <a:blip r:embed="rId2"/>
+          <a:blip r:embed="rId3">
+            <a:extLst>
+              <a:ext uri="{28A0092B-C50C-407E-A947-70E740481C1C}">
+                <a14:useLocalDpi xmlns:a14="http://schemas.microsoft.com/office/drawing/2010/main" val="0"/>
+              </a:ext>
+            </a:extLst>
+          </a:blip>
           <a:stretch>
             <a:fillRect/>
           </a:stretch>
         </p:blipFill>
         <p:spPr>
           <a:xfrm>
-            <a:off x="1561419" y="825107"/>
-            <a:ext cx="8763000" cy="5842000"/>
+            <a:off x="0" y="0"/>
+            <a:ext cx="12192000" cy="5980386"/>
           </a:xfrm>
           <a:prstGeom prst="rect">
             <a:avLst/>
           </a:prstGeom>
         </p:spPr>
       </p:pic>
+      <p:pic>
+        <p:nvPicPr>
+          <p:cNvPr id="3076" name="Picture 4" descr="Linkedin amerikanisches Geschäftslogo. Social-Media-Symbol. schwarzes  Piktogramm. Vektor-Illustration isoliert auf weißem Hintergrund 3692704  Vektor Kunst bei Vecteezy">
+            <a:hlinkClick r:id="rId4"/>
+          </p:cNvPr>
+          <p:cNvPicPr>
+            <a:picLocks noChangeAspect="1" noChangeArrowheads="1"/>
+          </p:cNvPicPr>
+          <p:nvPr/>
+        </p:nvPicPr>
+        <p:blipFill>
+          <a:blip r:embed="rId5" cstate="print">
+            <a:extLst>
+              <a:ext uri="{28A0092B-C50C-407E-A947-70E740481C1C}">
+                <a14:useLocalDpi xmlns:a14="http://schemas.microsoft.com/office/drawing/2010/main" val="0"/>
+              </a:ext>
+            </a:extLst>
+          </a:blip>
+          <a:srcRect/>
+          <a:stretch>
+            <a:fillRect/>
+          </a:stretch>
+        </p:blipFill>
+        <p:spPr bwMode="auto">
+          <a:xfrm>
+            <a:off x="6363397" y="6210038"/>
+            <a:ext cx="300868" cy="300868"/>
+          </a:xfrm>
+          <a:prstGeom prst="rect">
+            <a:avLst/>
+          </a:prstGeom>
+          <a:noFill/>
+          <a:extLst>
+            <a:ext uri="{909E8E84-426E-40DD-AFC4-6F175D3DCCD1}">
+              <a14:hiddenFill xmlns:a14="http://schemas.microsoft.com/office/drawing/2010/main">
+                <a:solidFill>
+                  <a:srgbClr val="FFFFFF"/>
+                </a:solidFill>
+              </a14:hiddenFill>
+            </a:ext>
+          </a:extLst>
+        </p:spPr>
+      </p:pic>
+      <p:pic>
+        <p:nvPicPr>
+          <p:cNvPr id="3078" name="Picture 6" descr="Piktogramy telefon – wektory. Pobierz wysokiej jakości darmowe wektory z  Freepik | Freepik"/>
+          <p:cNvPicPr>
+            <a:picLocks noChangeAspect="1" noChangeArrowheads="1"/>
+          </p:cNvPicPr>
+          <p:nvPr/>
+        </p:nvPicPr>
+        <p:blipFill>
+          <a:blip r:embed="rId6" cstate="print">
+            <a:extLst>
+              <a:ext uri="{28A0092B-C50C-407E-A947-70E740481C1C}">
+                <a14:useLocalDpi xmlns:a14="http://schemas.microsoft.com/office/drawing/2010/main" val="0"/>
+              </a:ext>
+            </a:extLst>
+          </a:blip>
+          <a:srcRect/>
+          <a:stretch>
+            <a:fillRect/>
+          </a:stretch>
+        </p:blipFill>
+        <p:spPr bwMode="auto">
+          <a:xfrm>
+            <a:off x="4539677" y="6256272"/>
+            <a:ext cx="269874" cy="269874"/>
+          </a:xfrm>
+          <a:prstGeom prst="rect">
+            <a:avLst/>
+          </a:prstGeom>
+          <a:noFill/>
+          <a:extLst>
+            <a:ext uri="{909E8E84-426E-40DD-AFC4-6F175D3DCCD1}">
+              <a14:hiddenFill xmlns:a14="http://schemas.microsoft.com/office/drawing/2010/main">
+                <a:solidFill>
+                  <a:srgbClr val="FFFFFF"/>
+                </a:solidFill>
+              </a14:hiddenFill>
+            </a:ext>
+          </a:extLst>
+        </p:spPr>
+      </p:pic>
+      <p:pic>
+        <p:nvPicPr>
+          <p:cNvPr id="3082" name="Picture 10" descr="GitHub Logo: valor, história, PNG">
+            <a:hlinkClick r:id="rId7"/>
+          </p:cNvPr>
+          <p:cNvPicPr>
+            <a:picLocks noChangeAspect="1" noChangeArrowheads="1"/>
+          </p:cNvPicPr>
+          <p:nvPr/>
+        </p:nvPicPr>
+        <p:blipFill>
+          <a:blip r:embed="rId8" cstate="print">
+            <a:extLst>
+              <a:ext uri="{28A0092B-C50C-407E-A947-70E740481C1C}">
+                <a14:useLocalDpi xmlns:a14="http://schemas.microsoft.com/office/drawing/2010/main" val="0"/>
+              </a:ext>
+            </a:extLst>
+          </a:blip>
+          <a:srcRect/>
+          <a:stretch>
+            <a:fillRect/>
+          </a:stretch>
+        </p:blipFill>
+        <p:spPr bwMode="auto">
+          <a:xfrm>
+            <a:off x="8062784" y="6221627"/>
+            <a:ext cx="535329" cy="301122"/>
+          </a:xfrm>
+          <a:prstGeom prst="rect">
+            <a:avLst/>
+          </a:prstGeom>
+          <a:noFill/>
+          <a:extLst>
+            <a:ext uri="{909E8E84-426E-40DD-AFC4-6F175D3DCCD1}">
+              <a14:hiddenFill xmlns:a14="http://schemas.microsoft.com/office/drawing/2010/main">
+                <a:solidFill>
+                  <a:srgbClr val="FFFFFF"/>
+                </a:solidFill>
+              </a14:hiddenFill>
+            </a:ext>
+          </a:extLst>
+        </p:spPr>
+      </p:pic>
+      <p:pic>
+        <p:nvPicPr>
+          <p:cNvPr id="3086" name="Picture 14" descr="Python data analysis library Icons, Logos, Symbols – Free Download PNG, SVG">
+            <a:hlinkClick r:id="rId9"/>
+          </p:cNvPr>
+          <p:cNvPicPr>
+            <a:picLocks noChangeAspect="1" noChangeArrowheads="1"/>
+          </p:cNvPicPr>
+          <p:nvPr/>
+        </p:nvPicPr>
+        <p:blipFill>
+          <a:blip r:embed="rId10" cstate="print">
+            <a:extLst>
+              <a:ext uri="{28A0092B-C50C-407E-A947-70E740481C1C}">
+                <a14:useLocalDpi xmlns:a14="http://schemas.microsoft.com/office/drawing/2010/main" val="0"/>
+              </a:ext>
+            </a:extLst>
+          </a:blip>
+          <a:srcRect/>
+          <a:stretch>
+            <a:fillRect/>
+          </a:stretch>
+        </p:blipFill>
+        <p:spPr bwMode="auto">
+          <a:xfrm>
+            <a:off x="9966719" y="6235252"/>
+            <a:ext cx="325812" cy="325812"/>
+          </a:xfrm>
+          <a:prstGeom prst="rect">
+            <a:avLst/>
+          </a:prstGeom>
+          <a:noFill/>
+          <a:extLst>
+            <a:ext uri="{909E8E84-426E-40DD-AFC4-6F175D3DCCD1}">
+              <a14:hiddenFill xmlns:a14="http://schemas.microsoft.com/office/drawing/2010/main">
+                <a:solidFill>
+                  <a:srgbClr val="FFFFFF"/>
+                </a:solidFill>
+              </a14:hiddenFill>
+            </a:ext>
+          </a:extLst>
+        </p:spPr>
+      </p:pic>
+      <p:pic>
+        <p:nvPicPr>
+          <p:cNvPr id="3088" name="Picture 16" descr="Email symbol Zdjęcia - darmowe pobieranie na Freepik"/>
+          <p:cNvPicPr>
+            <a:picLocks noChangeAspect="1" noChangeArrowheads="1"/>
+          </p:cNvPicPr>
+          <p:nvPr/>
+        </p:nvPicPr>
+        <p:blipFill>
+          <a:blip r:embed="rId11" cstate="print">
+            <a:extLst>
+              <a:ext uri="{28A0092B-C50C-407E-A947-70E740481C1C}">
+                <a14:useLocalDpi xmlns:a14="http://schemas.microsoft.com/office/drawing/2010/main" val="0"/>
+              </a:ext>
+            </a:extLst>
+          </a:blip>
+          <a:srcRect/>
+          <a:stretch>
+            <a:fillRect/>
+          </a:stretch>
+        </p:blipFill>
+        <p:spPr bwMode="auto">
+          <a:xfrm>
+            <a:off x="1702675" y="6274805"/>
+            <a:ext cx="355855" cy="199567"/>
+          </a:xfrm>
+          <a:prstGeom prst="rect">
+            <a:avLst/>
+          </a:prstGeom>
+          <a:noFill/>
+          <a:extLst>
+            <a:ext uri="{909E8E84-426E-40DD-AFC4-6F175D3DCCD1}">
+              <a14:hiddenFill xmlns:a14="http://schemas.microsoft.com/office/drawing/2010/main">
+                <a:solidFill>
+                  <a:srgbClr val="FFFFFF"/>
+                </a:solidFill>
+              </a14:hiddenFill>
+            </a:ext>
+          </a:extLst>
+        </p:spPr>
+      </p:pic>
+    </p:spTree>
+    <p:extLst>
+      <p:ext uri="{BB962C8B-B14F-4D97-AF65-F5344CB8AC3E}">
+        <p14:creationId xmlns:p14="http://schemas.microsoft.com/office/powerpoint/2010/main" val="3638633201"/>
+      </p:ext>
+    </p:extLst>
+  </p:cSld>
+  <p:clrMapOvr>
+    <a:masterClrMapping/>
+  </p:clrMapOvr>
+</p:sld>
+</file>
+
+<file path=ppt/slides/slide10.xml><?xml version="1.0" encoding="utf-8"?>
+<p:sld xmlns:a="http://schemas.openxmlformats.org/drawingml/2006/main" xmlns:r="http://schemas.openxmlformats.org/officeDocument/2006/relationships" xmlns:p="http://schemas.openxmlformats.org/presentationml/2006/main">
+  <p:cSld>
+    <p:bg>
+      <p:bgPr>
+        <a:gradFill>
+          <a:gsLst>
+            <a:gs pos="100000">
+              <a:srgbClr val="D6E6F5"/>
+            </a:gs>
+            <a:gs pos="0">
+              <a:schemeClr val="accent1">
+                <a:lumMod val="5000"/>
+                <a:lumOff val="95000"/>
+              </a:schemeClr>
+            </a:gs>
+            <a:gs pos="27000">
+              <a:schemeClr val="accent1">
+                <a:lumMod val="45000"/>
+                <a:lumOff val="55000"/>
+              </a:schemeClr>
+            </a:gs>
+            <a:gs pos="83000">
+              <a:schemeClr val="accent1">
+                <a:lumMod val="45000"/>
+                <a:lumOff val="55000"/>
+              </a:schemeClr>
+            </a:gs>
+            <a:gs pos="100000">
+              <a:schemeClr val="accent1">
+                <a:lumMod val="30000"/>
+                <a:lumOff val="70000"/>
+              </a:schemeClr>
+            </a:gs>
+          </a:gsLst>
+          <a:lin ang="5400000" scaled="1"/>
+        </a:gradFill>
+        <a:effectLst/>
+      </p:bgPr>
+    </p:bg>
+    <p:spTree>
+      <p:nvGrpSpPr>
+        <p:cNvPr id="1" name=""/>
+        <p:cNvGrpSpPr/>
+        <p:nvPr/>
+      </p:nvGrpSpPr>
+      <p:grpSpPr>
+        <a:xfrm>
+          <a:off x="0" y="0"/>
+          <a:ext cx="0" cy="0"/>
+          <a:chOff x="0" y="0"/>
+          <a:chExt cx="0" cy="0"/>
+        </a:xfrm>
+      </p:grpSpPr>
       <p:sp>
         <p:nvSpPr>
           <p:cNvPr id="7" name="Prostokąt 6"/>
@@ -3380,8 +3725,8 @@
         </p:nvSpPr>
         <p:spPr>
           <a:xfrm>
-            <a:off x="548640" y="168325"/>
-            <a:ext cx="8218170" cy="369332"/>
+            <a:off x="401443" y="384673"/>
+            <a:ext cx="11273883" cy="6186309"/>
           </a:xfrm>
           <a:prstGeom prst="rect">
             <a:avLst/>
@@ -3393,115 +3738,1279 @@
           </a:bodyPr>
           <a:lstStyle/>
           <a:p>
-            <a:pPr lvl="0">
-              <a:defRPr/>
-            </a:pPr>
-            <a:r>
-              <a:rPr lang="pl-PL" b="1" dirty="0"/>
-              <a:t>V-model</a:t>
-            </a:r>
-            <a:r>
-              <a:rPr lang="pl-PL" dirty="0"/>
-              <a:t> pokazuje </a:t>
-            </a:r>
-            <a:r>
-              <a:rPr lang="pl-PL" b="1" dirty="0"/>
-              <a:t>zależność między tworzeniem systemu a jego testowaniem</a:t>
-            </a:r>
-            <a:r>
-              <a:rPr lang="pl-PL" dirty="0"/>
+            <a:r>
+              <a:rPr lang="en-US" b="1" dirty="0"/>
+              <a:t>W </a:t>
+            </a:r>
+            <a:r>
+              <a:rPr lang="en-US" b="1" dirty="0" err="1"/>
+              <a:t>kontekście</a:t>
+            </a:r>
+            <a:r>
+              <a:rPr lang="en-US" b="1" dirty="0"/>
+              <a:t> Automotive, Safety Lifecycle (</a:t>
+            </a:r>
+            <a:r>
+              <a:rPr lang="en-US" b="1" dirty="0" err="1"/>
+              <a:t>Cykl</a:t>
+            </a:r>
+            <a:r>
+              <a:rPr lang="en-US" b="1" dirty="0"/>
+              <a:t> </a:t>
+            </a:r>
+            <a:r>
+              <a:rPr lang="en-US" b="1" dirty="0" err="1"/>
+              <a:t>życia</a:t>
+            </a:r>
+            <a:r>
+              <a:rPr lang="en-US" b="1" dirty="0"/>
+              <a:t> </a:t>
+            </a:r>
+            <a:r>
+              <a:rPr lang="en-US" b="1" dirty="0" err="1"/>
+              <a:t>bezpieczeństwa</a:t>
+            </a:r>
+            <a:r>
+              <a:rPr lang="en-US" b="1" dirty="0"/>
+              <a:t>) to </a:t>
+            </a:r>
+            <a:r>
+              <a:rPr lang="en-US" b="1" dirty="0" err="1"/>
+              <a:t>ustrukturyzowany</a:t>
+            </a:r>
+            <a:r>
+              <a:rPr lang="en-US" b="1" dirty="0"/>
+              <a:t> </a:t>
+            </a:r>
+            <a:r>
+              <a:rPr lang="en-US" b="1" dirty="0" err="1"/>
+              <a:t>proces</a:t>
+            </a:r>
+            <a:r>
+              <a:rPr lang="en-US" b="1" dirty="0"/>
+              <a:t> </a:t>
+            </a:r>
+            <a:r>
+              <a:rPr lang="en-US" b="1" dirty="0" err="1"/>
+              <a:t>zdefiniowany</a:t>
+            </a:r>
+            <a:r>
+              <a:rPr lang="en-US" b="1" dirty="0"/>
+              <a:t> w </a:t>
+            </a:r>
+            <a:r>
+              <a:rPr lang="en-US" b="1" dirty="0" err="1"/>
+              <a:t>normie</a:t>
+            </a:r>
+            <a:r>
+              <a:rPr lang="en-US" b="1" dirty="0"/>
+              <a:t> ISO 26262, </a:t>
+            </a:r>
+            <a:r>
+              <a:rPr lang="en-US" b="1" dirty="0" err="1"/>
+              <a:t>który</a:t>
+            </a:r>
+            <a:r>
+              <a:rPr lang="en-US" b="1" dirty="0"/>
+              <a:t> ma </a:t>
+            </a:r>
+            <a:r>
+              <a:rPr lang="en-US" b="1" dirty="0" err="1"/>
+              <a:t>na</a:t>
+            </a:r>
+            <a:r>
+              <a:rPr lang="en-US" b="1" dirty="0"/>
+              <a:t> </a:t>
+            </a:r>
+            <a:r>
+              <a:rPr lang="en-US" b="1" dirty="0" err="1"/>
+              <a:t>celu</a:t>
+            </a:r>
+            <a:r>
+              <a:rPr lang="en-US" b="1" dirty="0"/>
+              <a:t> </a:t>
+            </a:r>
+            <a:r>
+              <a:rPr lang="en-US" b="1" dirty="0" err="1"/>
+              <a:t>wyeliminowanie</a:t>
+            </a:r>
+            <a:r>
+              <a:rPr lang="en-US" b="1" dirty="0"/>
+              <a:t> </a:t>
+            </a:r>
+            <a:r>
+              <a:rPr lang="en-US" b="1" dirty="0" err="1"/>
+              <a:t>lub</a:t>
+            </a:r>
+            <a:r>
+              <a:rPr lang="en-US" b="1" dirty="0"/>
+              <a:t> </a:t>
+            </a:r>
+            <a:r>
+              <a:rPr lang="en-US" b="1" dirty="0" err="1"/>
+              <a:t>zminimalizowanie</a:t>
+            </a:r>
+            <a:r>
+              <a:rPr lang="en-US" b="1" dirty="0"/>
+              <a:t> </a:t>
+            </a:r>
+            <a:r>
+              <a:rPr lang="en-US" b="1" dirty="0" err="1"/>
+              <a:t>ryzyka</a:t>
+            </a:r>
+            <a:r>
+              <a:rPr lang="en-US" b="1" dirty="0"/>
+              <a:t> </a:t>
+            </a:r>
+            <a:r>
+              <a:rPr lang="en-US" b="1" dirty="0" err="1"/>
+              <a:t>związanego</a:t>
+            </a:r>
+            <a:r>
+              <a:rPr lang="en-US" b="1" dirty="0"/>
+              <a:t> z </a:t>
+            </a:r>
+            <a:r>
+              <a:rPr lang="en-US" b="1" dirty="0" err="1"/>
+              <a:t>awariami</a:t>
+            </a:r>
+            <a:r>
+              <a:rPr lang="en-US" b="1" dirty="0"/>
+              <a:t> </a:t>
+            </a:r>
+            <a:r>
+              <a:rPr lang="en-US" b="1" dirty="0" err="1"/>
+              <a:t>systemów</a:t>
+            </a:r>
+            <a:r>
+              <a:rPr lang="en-US" b="1" dirty="0"/>
+              <a:t> </a:t>
+            </a:r>
+            <a:r>
+              <a:rPr lang="en-US" b="1" dirty="0" err="1"/>
+              <a:t>elektrycznych</a:t>
+            </a:r>
+            <a:r>
+              <a:rPr lang="en-US" b="1" dirty="0"/>
+              <a:t> </a:t>
+            </a:r>
+            <a:r>
+              <a:rPr lang="en-US" b="1" dirty="0" err="1"/>
+              <a:t>i</a:t>
+            </a:r>
+            <a:r>
+              <a:rPr lang="en-US" b="1" dirty="0"/>
+              <a:t> </a:t>
+            </a:r>
+            <a:r>
+              <a:rPr lang="en-US" b="1" dirty="0" err="1"/>
+              <a:t>elektronicznych</a:t>
+            </a:r>
+            <a:r>
+              <a:rPr lang="en-US" b="1" dirty="0"/>
+              <a:t> (E/E) w </a:t>
+            </a:r>
+            <a:r>
+              <a:rPr lang="en-US" b="1" dirty="0" err="1"/>
+              <a:t>pojazdach</a:t>
+            </a:r>
+            <a:r>
+              <a:rPr lang="en-US" b="1" dirty="0"/>
+              <a:t>. </a:t>
+            </a:r>
+            <a:endParaRPr lang="pl-PL" b="1" dirty="0" smtClean="0"/>
+          </a:p>
+          <a:p>
+            <a:pPr algn="ctr"/>
+            <a:r>
+              <a:rPr lang="en-US" b="1" dirty="0" err="1" smtClean="0"/>
+              <a:t>Proces</a:t>
+            </a:r>
+            <a:r>
+              <a:rPr lang="en-US" b="1" dirty="0" smtClean="0"/>
+              <a:t> </a:t>
+            </a:r>
+            <a:r>
+              <a:rPr lang="en-US" b="1" dirty="0"/>
+              <a:t>ten </a:t>
+            </a:r>
+            <a:r>
+              <a:rPr lang="en-US" b="1" dirty="0" err="1"/>
+              <a:t>obejmuje</a:t>
+            </a:r>
+            <a:r>
+              <a:rPr lang="en-US" b="1" dirty="0"/>
+              <a:t> </a:t>
+            </a:r>
+            <a:r>
+              <a:rPr lang="en-US" b="1" dirty="0" err="1"/>
+              <a:t>cały</a:t>
+            </a:r>
+            <a:r>
+              <a:rPr lang="en-US" b="1" dirty="0"/>
+              <a:t> „</a:t>
+            </a:r>
+            <a:r>
+              <a:rPr lang="en-US" b="1" dirty="0" err="1"/>
+              <a:t>żywot</a:t>
+            </a:r>
+            <a:r>
+              <a:rPr lang="en-US" b="1" dirty="0"/>
+              <a:t>” </a:t>
+            </a:r>
+            <a:r>
+              <a:rPr lang="en-US" b="1" dirty="0" err="1"/>
+              <a:t>produktu</a:t>
+            </a:r>
+            <a:r>
+              <a:rPr lang="en-US" b="1" dirty="0"/>
+              <a:t> – od </a:t>
+            </a:r>
+            <a:r>
+              <a:rPr lang="en-US" b="1" dirty="0" err="1"/>
+              <a:t>pierwszej</a:t>
+            </a:r>
+            <a:r>
+              <a:rPr lang="en-US" b="1" dirty="0"/>
+              <a:t> </a:t>
+            </a:r>
+            <a:r>
+              <a:rPr lang="en-US" b="1" dirty="0" err="1"/>
+              <a:t>idei</a:t>
+            </a:r>
+            <a:r>
+              <a:rPr lang="en-US" b="1" dirty="0"/>
+              <a:t> </a:t>
+            </a:r>
+            <a:r>
+              <a:rPr lang="en-US" b="1" dirty="0" err="1"/>
+              <a:t>aż</a:t>
+            </a:r>
+            <a:r>
+              <a:rPr lang="en-US" b="1" dirty="0"/>
+              <a:t> </a:t>
+            </a:r>
+            <a:r>
+              <a:rPr lang="en-US" b="1" dirty="0" err="1"/>
+              <a:t>po</a:t>
+            </a:r>
+            <a:r>
+              <a:rPr lang="en-US" b="1" dirty="0"/>
+              <a:t> </a:t>
+            </a:r>
+            <a:r>
+              <a:rPr lang="en-US" b="1" dirty="0" err="1"/>
+              <a:t>jego</a:t>
+            </a:r>
+            <a:r>
+              <a:rPr lang="en-US" b="1" dirty="0"/>
+              <a:t> </a:t>
+            </a:r>
+            <a:r>
+              <a:rPr lang="en-US" b="1" dirty="0" err="1"/>
+              <a:t>wycofanie</a:t>
+            </a:r>
+            <a:r>
+              <a:rPr lang="en-US" b="1" dirty="0"/>
+              <a:t> z </a:t>
+            </a:r>
+            <a:r>
+              <a:rPr lang="en-US" b="1" dirty="0" err="1"/>
+              <a:t>użytku</a:t>
+            </a:r>
+            <a:r>
+              <a:rPr lang="en-US" b="1" dirty="0" smtClean="0"/>
               <a:t>.</a:t>
             </a:r>
-            <a:endParaRPr lang="en-US" dirty="0"/>
+            <a:endParaRPr lang="pl-PL" b="1" dirty="0" smtClean="0"/>
           </a:p>
-        </p:txBody>
-      </p:sp>
-      <p:sp>
-        <p:nvSpPr>
-          <p:cNvPr id="8" name="Prostokąt 7"/>
-          <p:cNvSpPr/>
-          <p:nvPr/>
-        </p:nvSpPr>
-        <p:spPr>
-          <a:xfrm rot="16200000">
-            <a:off x="-898904" y="3210044"/>
-            <a:ext cx="3748527" cy="369332"/>
-          </a:xfrm>
-          <a:prstGeom prst="rect">
-            <a:avLst/>
-          </a:prstGeom>
-        </p:spPr>
-        <p:txBody>
-          <a:bodyPr wrap="none">
-            <a:spAutoFit/>
-          </a:bodyPr>
-          <a:lstStyle/>
           <a:p>
-            <a:r>
-              <a:rPr lang="pl-PL" dirty="0"/>
-              <a:t>Lewa strona </a:t>
-            </a:r>
-            <a:r>
-              <a:rPr lang="pl-PL" b="1" dirty="0"/>
-              <a:t>V</a:t>
-            </a:r>
-            <a:r>
-              <a:rPr lang="pl-PL" dirty="0"/>
-              <a:t> → </a:t>
-            </a:r>
-            <a:r>
-              <a:rPr lang="pl-PL" i="1" dirty="0"/>
-              <a:t>co i jak projektujemy</a:t>
-            </a:r>
-            <a:endParaRPr lang="en-US" dirty="0"/>
+            <a:endParaRPr lang="pl-PL" dirty="0"/>
           </a:p>
-        </p:txBody>
-      </p:sp>
-      <p:sp>
-        <p:nvSpPr>
-          <p:cNvPr id="9" name="Prostokąt 8"/>
-          <p:cNvSpPr/>
-          <p:nvPr/>
-        </p:nvSpPr>
-        <p:spPr>
-          <a:xfrm rot="5400000">
-            <a:off x="8816971" y="3210044"/>
-            <a:ext cx="4570738" cy="369332"/>
-          </a:xfrm>
-          <a:prstGeom prst="rect">
-            <a:avLst/>
-          </a:prstGeom>
-        </p:spPr>
-        <p:txBody>
-          <a:bodyPr wrap="none">
-            <a:spAutoFit/>
-          </a:bodyPr>
-          <a:lstStyle/>
           <a:p>
             <a:r>
-              <a:rPr lang="pl-PL" dirty="0"/>
-              <a:t>Prawa strona </a:t>
-            </a:r>
-            <a:r>
-              <a:rPr lang="pl-PL" b="1" dirty="0"/>
-              <a:t>V</a:t>
-            </a:r>
-            <a:r>
-              <a:rPr lang="pl-PL" dirty="0"/>
-              <a:t> → </a:t>
-            </a:r>
-            <a:r>
-              <a:rPr lang="pl-PL" i="1" dirty="0"/>
-              <a:t>jak sprawdzamy, że to działa</a:t>
-            </a:r>
-            <a:endParaRPr lang="en-US" dirty="0"/>
+              <a:rPr lang="pl-PL" dirty="0" smtClean="0"/>
+              <a:t>1. </a:t>
+            </a:r>
+            <a:r>
+              <a:rPr lang="en-US" dirty="0" err="1" smtClean="0"/>
+              <a:t>Faza</a:t>
+            </a:r>
+            <a:r>
+              <a:rPr lang="en-US" dirty="0" smtClean="0"/>
+              <a:t> </a:t>
+            </a:r>
+            <a:r>
+              <a:rPr lang="en-US" dirty="0" err="1"/>
+              <a:t>koncepcyjna</a:t>
+            </a:r>
+            <a:r>
+              <a:rPr lang="en-US" dirty="0"/>
+              <a:t> (Concept Phase)To </a:t>
+            </a:r>
+            <a:r>
+              <a:rPr lang="en-US" dirty="0" err="1"/>
+              <a:t>tutaj</a:t>
+            </a:r>
+            <a:r>
+              <a:rPr lang="en-US" dirty="0"/>
+              <a:t> </a:t>
+            </a:r>
+            <a:r>
+              <a:rPr lang="en-US" dirty="0" err="1"/>
+              <a:t>zapadają</a:t>
+            </a:r>
+            <a:r>
+              <a:rPr lang="en-US" dirty="0"/>
+              <a:t> </a:t>
+            </a:r>
+            <a:r>
+              <a:rPr lang="en-US" dirty="0" err="1"/>
+              <a:t>kluczowe</a:t>
+            </a:r>
+            <a:r>
+              <a:rPr lang="en-US" dirty="0"/>
+              <a:t> </a:t>
+            </a:r>
+            <a:r>
+              <a:rPr lang="en-US" dirty="0" err="1"/>
+              <a:t>decyzje</a:t>
+            </a:r>
+            <a:r>
+              <a:rPr lang="en-US" dirty="0"/>
+              <a:t> </a:t>
+            </a:r>
+            <a:r>
+              <a:rPr lang="en-US" dirty="0" err="1"/>
+              <a:t>dotyczące</a:t>
+            </a:r>
+            <a:r>
+              <a:rPr lang="en-US" dirty="0"/>
+              <a:t> </a:t>
+            </a:r>
+            <a:r>
+              <a:rPr lang="en-US" dirty="0" err="1"/>
+              <a:t>bezpieczeństwa:Definicja</a:t>
+            </a:r>
+            <a:r>
+              <a:rPr lang="en-US" dirty="0"/>
+              <a:t> </a:t>
+            </a:r>
+            <a:r>
+              <a:rPr lang="en-US" dirty="0" err="1"/>
+              <a:t>elementu</a:t>
+            </a:r>
+            <a:r>
+              <a:rPr lang="en-US" dirty="0"/>
+              <a:t> (Item Definition): </a:t>
+            </a:r>
+            <a:r>
+              <a:rPr lang="en-US" dirty="0" err="1"/>
+              <a:t>Opisanie</a:t>
+            </a:r>
+            <a:r>
+              <a:rPr lang="en-US" dirty="0"/>
+              <a:t>, co system ma </a:t>
+            </a:r>
+            <a:r>
+              <a:rPr lang="en-US" dirty="0" err="1"/>
+              <a:t>robić</a:t>
+            </a:r>
+            <a:r>
+              <a:rPr lang="en-US" dirty="0"/>
+              <a:t> </a:t>
+            </a:r>
+            <a:r>
+              <a:rPr lang="en-US" dirty="0" err="1"/>
+              <a:t>i</a:t>
+            </a:r>
+            <a:r>
+              <a:rPr lang="en-US" dirty="0"/>
+              <a:t> </a:t>
+            </a:r>
+            <a:r>
+              <a:rPr lang="en-US" dirty="0" err="1"/>
+              <a:t>jak</a:t>
+            </a:r>
+            <a:r>
+              <a:rPr lang="en-US" dirty="0"/>
+              <a:t> </a:t>
+            </a:r>
+            <a:r>
+              <a:rPr lang="en-US" dirty="0" err="1"/>
+              <a:t>wchodzi</a:t>
+            </a:r>
+            <a:r>
+              <a:rPr lang="en-US" dirty="0"/>
+              <a:t> w </a:t>
+            </a:r>
+            <a:r>
+              <a:rPr lang="en-US" dirty="0" err="1"/>
+              <a:t>interakcję</a:t>
+            </a:r>
+            <a:r>
+              <a:rPr lang="en-US" dirty="0"/>
+              <a:t> z </a:t>
+            </a:r>
+            <a:r>
+              <a:rPr lang="en-US" dirty="0" err="1"/>
+              <a:t>innymi.HARA</a:t>
+            </a:r>
+            <a:r>
+              <a:rPr lang="en-US" dirty="0"/>
+              <a:t> (Hazard Analysis and Risk Assessment): </a:t>
+            </a:r>
+            <a:r>
+              <a:rPr lang="en-US" dirty="0" err="1"/>
+              <a:t>Identyfikacja</a:t>
+            </a:r>
+            <a:r>
+              <a:rPr lang="en-US" dirty="0"/>
+              <a:t> </a:t>
+            </a:r>
+            <a:r>
+              <a:rPr lang="en-US" dirty="0" err="1"/>
+              <a:t>potencjalnych</a:t>
+            </a:r>
+            <a:r>
+              <a:rPr lang="en-US" dirty="0"/>
+              <a:t> </a:t>
+            </a:r>
+            <a:r>
+              <a:rPr lang="en-US" dirty="0" err="1"/>
+              <a:t>zagrożeń</a:t>
+            </a:r>
+            <a:r>
+              <a:rPr lang="en-US" dirty="0"/>
+              <a:t> (np. </a:t>
+            </a:r>
+            <a:r>
+              <a:rPr lang="en-US" dirty="0" err="1"/>
+              <a:t>nagłe</a:t>
+            </a:r>
+            <a:r>
+              <a:rPr lang="en-US" dirty="0"/>
+              <a:t> </a:t>
+            </a:r>
+            <a:r>
+              <a:rPr lang="en-US" dirty="0" err="1"/>
+              <a:t>zablokowanie</a:t>
+            </a:r>
+            <a:r>
+              <a:rPr lang="en-US" dirty="0"/>
+              <a:t> </a:t>
+            </a:r>
+            <a:r>
+              <a:rPr lang="en-US" dirty="0" err="1"/>
+              <a:t>kół</a:t>
+            </a:r>
+            <a:r>
+              <a:rPr lang="en-US" dirty="0"/>
+              <a:t>) </a:t>
+            </a:r>
+            <a:r>
+              <a:rPr lang="en-US" dirty="0" err="1"/>
+              <a:t>i</a:t>
+            </a:r>
+            <a:r>
+              <a:rPr lang="en-US" dirty="0"/>
+              <a:t> </a:t>
+            </a:r>
+            <a:r>
+              <a:rPr lang="en-US" dirty="0" err="1"/>
+              <a:t>przypisanie</a:t>
+            </a:r>
+            <a:r>
+              <a:rPr lang="en-US" dirty="0"/>
+              <a:t> </a:t>
+            </a:r>
+            <a:r>
+              <a:rPr lang="en-US" dirty="0" err="1"/>
+              <a:t>im</a:t>
+            </a:r>
+            <a:r>
+              <a:rPr lang="en-US" dirty="0"/>
+              <a:t> </a:t>
+            </a:r>
+            <a:r>
+              <a:rPr lang="en-US" dirty="0" err="1"/>
+              <a:t>poziomów</a:t>
+            </a:r>
+            <a:r>
+              <a:rPr lang="en-US" dirty="0"/>
+              <a:t> ASIL (A-D).</a:t>
+            </a:r>
+            <a:r>
+              <a:rPr lang="en-US" dirty="0" err="1"/>
+              <a:t>Cele</a:t>
+            </a:r>
+            <a:r>
+              <a:rPr lang="en-US" dirty="0"/>
+              <a:t> </a:t>
+            </a:r>
+            <a:r>
+              <a:rPr lang="en-US" dirty="0" err="1"/>
+              <a:t>bezpieczeństwa</a:t>
+            </a:r>
+            <a:r>
+              <a:rPr lang="en-US" dirty="0"/>
+              <a:t> (Safety Goals): </a:t>
+            </a:r>
+            <a:r>
+              <a:rPr lang="en-US" dirty="0" err="1"/>
+              <a:t>Sformułowanie</a:t>
+            </a:r>
+            <a:r>
+              <a:rPr lang="en-US" dirty="0"/>
+              <a:t> </a:t>
+            </a:r>
+            <a:r>
+              <a:rPr lang="en-US" dirty="0" err="1"/>
+              <a:t>ogólnych</a:t>
+            </a:r>
+            <a:r>
+              <a:rPr lang="en-US" dirty="0"/>
+              <a:t> </a:t>
+            </a:r>
+            <a:r>
+              <a:rPr lang="en-US" dirty="0" err="1"/>
+              <a:t>wymagań</a:t>
+            </a:r>
+            <a:r>
+              <a:rPr lang="en-US" dirty="0"/>
+              <a:t>, </a:t>
+            </a:r>
+            <a:r>
+              <a:rPr lang="en-US" dirty="0" err="1"/>
+              <a:t>które</a:t>
+            </a:r>
+            <a:r>
+              <a:rPr lang="en-US" dirty="0"/>
+              <a:t> </a:t>
+            </a:r>
+            <a:r>
+              <a:rPr lang="en-US" dirty="0" err="1"/>
+              <a:t>zapobiegną</a:t>
+            </a:r>
+            <a:r>
+              <a:rPr lang="en-US" dirty="0"/>
+              <a:t> </a:t>
+            </a:r>
+            <a:r>
+              <a:rPr lang="en-US" dirty="0" err="1"/>
+              <a:t>zidentyfikowanym</a:t>
+            </a:r>
+            <a:r>
+              <a:rPr lang="en-US" dirty="0"/>
+              <a:t> </a:t>
+            </a:r>
+            <a:r>
+              <a:rPr lang="en-US" dirty="0" err="1"/>
+              <a:t>zagrożeniom</a:t>
+            </a:r>
+            <a:r>
+              <a:rPr lang="en-US" dirty="0" smtClean="0"/>
+              <a:t>.</a:t>
+            </a:r>
+            <a:endParaRPr lang="pl-PL" dirty="0" smtClean="0"/>
+          </a:p>
+          <a:p>
+            <a:endParaRPr lang="pl-PL" dirty="0" smtClean="0"/>
+          </a:p>
+          <a:p>
+            <a:r>
+              <a:rPr lang="pl-PL" dirty="0" smtClean="0"/>
+              <a:t>2. </a:t>
+            </a:r>
+            <a:r>
+              <a:rPr lang="en-US" dirty="0" err="1" smtClean="0"/>
+              <a:t>Rozwój</a:t>
+            </a:r>
+            <a:r>
+              <a:rPr lang="en-US" dirty="0" smtClean="0"/>
+              <a:t> </a:t>
+            </a:r>
+            <a:r>
+              <a:rPr lang="en-US" dirty="0" err="1"/>
+              <a:t>produktu</a:t>
+            </a:r>
+            <a:r>
+              <a:rPr lang="en-US" dirty="0"/>
+              <a:t> (Product Development)</a:t>
+            </a:r>
+            <a:r>
+              <a:rPr lang="en-US" dirty="0" err="1"/>
+              <a:t>Najbardziej</a:t>
+            </a:r>
+            <a:r>
+              <a:rPr lang="en-US" dirty="0"/>
+              <a:t> </a:t>
+            </a:r>
+            <a:r>
+              <a:rPr lang="en-US" dirty="0" err="1"/>
+              <a:t>rozbudowana</a:t>
+            </a:r>
+            <a:r>
+              <a:rPr lang="en-US" dirty="0"/>
+              <a:t> </a:t>
+            </a:r>
+            <a:r>
+              <a:rPr lang="en-US" dirty="0" err="1"/>
+              <a:t>faza</a:t>
+            </a:r>
+            <a:r>
+              <a:rPr lang="en-US" dirty="0"/>
+              <a:t>, </a:t>
+            </a:r>
+            <a:r>
+              <a:rPr lang="en-US" dirty="0" err="1"/>
+              <a:t>realizowana</a:t>
+            </a:r>
+            <a:r>
+              <a:rPr lang="en-US" dirty="0"/>
+              <a:t> </a:t>
+            </a:r>
+            <a:r>
+              <a:rPr lang="en-US" dirty="0" err="1"/>
+              <a:t>zgodnie</a:t>
+            </a:r>
+            <a:r>
+              <a:rPr lang="en-US" dirty="0"/>
+              <a:t> z </a:t>
+            </a:r>
+            <a:r>
+              <a:rPr lang="en-US" dirty="0" err="1"/>
+              <a:t>modelem</a:t>
+            </a:r>
+            <a:r>
+              <a:rPr lang="en-US" dirty="0"/>
+              <a:t> V: </a:t>
+            </a:r>
+            <a:r>
+              <a:rPr lang="en-US" dirty="0" err="1"/>
+              <a:t>Poziom</a:t>
+            </a:r>
+            <a:r>
+              <a:rPr lang="en-US" dirty="0"/>
+              <a:t> </a:t>
+            </a:r>
+            <a:r>
+              <a:rPr lang="en-US" dirty="0" err="1"/>
+              <a:t>systemowy</a:t>
+            </a:r>
+            <a:r>
+              <a:rPr lang="en-US" dirty="0"/>
+              <a:t>: </a:t>
+            </a:r>
+            <a:r>
+              <a:rPr lang="en-US" dirty="0" err="1"/>
+              <a:t>Tworzenie</a:t>
+            </a:r>
+            <a:r>
+              <a:rPr lang="en-US" dirty="0"/>
+              <a:t> </a:t>
+            </a:r>
+            <a:r>
+              <a:rPr lang="en-US" dirty="0" err="1"/>
+              <a:t>architektury</a:t>
+            </a:r>
+            <a:r>
+              <a:rPr lang="en-US" dirty="0"/>
+              <a:t> </a:t>
+            </a:r>
+            <a:r>
+              <a:rPr lang="en-US" dirty="0" err="1"/>
+              <a:t>systemu</a:t>
+            </a:r>
+            <a:r>
+              <a:rPr lang="en-US" dirty="0"/>
+              <a:t> </a:t>
+            </a:r>
+            <a:r>
+              <a:rPr lang="en-US" dirty="0" err="1"/>
+              <a:t>i</a:t>
+            </a:r>
+            <a:r>
+              <a:rPr lang="en-US" dirty="0"/>
+              <a:t> </a:t>
+            </a:r>
+            <a:r>
+              <a:rPr lang="en-US" dirty="0" err="1"/>
+              <a:t>określanie</a:t>
+            </a:r>
+            <a:r>
+              <a:rPr lang="en-US" dirty="0"/>
+              <a:t> </a:t>
+            </a:r>
+            <a:r>
+              <a:rPr lang="en-US" dirty="0" err="1"/>
+              <a:t>technicznych</a:t>
+            </a:r>
+            <a:r>
+              <a:rPr lang="en-US" dirty="0"/>
+              <a:t> </a:t>
+            </a:r>
+            <a:r>
+              <a:rPr lang="en-US" dirty="0" err="1"/>
+              <a:t>wymagań</a:t>
+            </a:r>
+            <a:r>
+              <a:rPr lang="en-US" dirty="0"/>
+              <a:t> </a:t>
+            </a:r>
+            <a:r>
+              <a:rPr lang="en-US" dirty="0" err="1"/>
+              <a:t>bezpieczeństwa.Poziom</a:t>
+            </a:r>
+            <a:r>
+              <a:rPr lang="en-US" dirty="0"/>
+              <a:t> </a:t>
+            </a:r>
+            <a:r>
+              <a:rPr lang="en-US" dirty="0" err="1"/>
+              <a:t>sprzętowy</a:t>
+            </a:r>
+            <a:r>
+              <a:rPr lang="en-US" dirty="0"/>
+              <a:t> (Hardware): </a:t>
+            </a:r>
+            <a:r>
+              <a:rPr lang="en-US" dirty="0" err="1"/>
+              <a:t>Projektowanie</a:t>
+            </a:r>
+            <a:r>
+              <a:rPr lang="en-US" dirty="0"/>
+              <a:t> </a:t>
+            </a:r>
+            <a:r>
+              <a:rPr lang="en-US" dirty="0" err="1"/>
+              <a:t>i</a:t>
+            </a:r>
+            <a:r>
+              <a:rPr lang="en-US" dirty="0"/>
+              <a:t> </a:t>
+            </a:r>
+            <a:r>
+              <a:rPr lang="en-US" dirty="0" err="1"/>
+              <a:t>testowanie</a:t>
+            </a:r>
+            <a:r>
+              <a:rPr lang="en-US" dirty="0"/>
+              <a:t> </a:t>
+            </a:r>
+            <a:r>
+              <a:rPr lang="en-US" dirty="0" err="1"/>
+              <a:t>podzespołów</a:t>
+            </a:r>
+            <a:r>
+              <a:rPr lang="en-US" dirty="0"/>
+              <a:t> (np. </a:t>
+            </a:r>
+            <a:r>
+              <a:rPr lang="en-US" dirty="0" err="1"/>
+              <a:t>procesorów</a:t>
+            </a:r>
+            <a:r>
+              <a:rPr lang="en-US" dirty="0"/>
+              <a:t>, </a:t>
+            </a:r>
+            <a:r>
+              <a:rPr lang="en-US" dirty="0" err="1"/>
+              <a:t>czujników</a:t>
+            </a:r>
+            <a:r>
+              <a:rPr lang="en-US" dirty="0"/>
+              <a:t>) pod </a:t>
+            </a:r>
+            <a:r>
+              <a:rPr lang="en-US" dirty="0" err="1"/>
+              <a:t>kątem</a:t>
+            </a:r>
+            <a:r>
+              <a:rPr lang="en-US" dirty="0"/>
+              <a:t> </a:t>
+            </a:r>
+            <a:r>
+              <a:rPr lang="en-US" dirty="0" err="1"/>
+              <a:t>awarii</a:t>
+            </a:r>
+            <a:r>
+              <a:rPr lang="en-US" dirty="0"/>
+              <a:t> </a:t>
+            </a:r>
+            <a:r>
+              <a:rPr lang="en-US" dirty="0" err="1"/>
+              <a:t>losowych.Poziom</a:t>
+            </a:r>
+            <a:r>
+              <a:rPr lang="en-US" dirty="0"/>
+              <a:t> </a:t>
+            </a:r>
+            <a:r>
+              <a:rPr lang="en-US" dirty="0" err="1"/>
+              <a:t>programowy</a:t>
+            </a:r>
+            <a:r>
+              <a:rPr lang="en-US" dirty="0"/>
+              <a:t> (Software): </a:t>
+            </a:r>
+            <a:r>
+              <a:rPr lang="en-US" dirty="0" err="1"/>
+              <a:t>Pisanie</a:t>
+            </a:r>
+            <a:r>
+              <a:rPr lang="en-US" dirty="0"/>
+              <a:t> </a:t>
+            </a:r>
+            <a:r>
+              <a:rPr lang="en-US" dirty="0" err="1"/>
+              <a:t>kodu</a:t>
+            </a:r>
+            <a:r>
+              <a:rPr lang="en-US" dirty="0"/>
+              <a:t> </a:t>
+            </a:r>
+            <a:r>
+              <a:rPr lang="en-US" dirty="0" err="1"/>
+              <a:t>zgodnie</a:t>
+            </a:r>
+            <a:r>
+              <a:rPr lang="en-US" dirty="0"/>
+              <a:t> z </a:t>
+            </a:r>
+            <a:r>
+              <a:rPr lang="en-US" dirty="0" err="1"/>
+              <a:t>rygorystycznymi</a:t>
+            </a:r>
+            <a:r>
+              <a:rPr lang="en-US" dirty="0"/>
+              <a:t> </a:t>
+            </a:r>
+            <a:r>
+              <a:rPr lang="en-US" dirty="0" err="1"/>
+              <a:t>standardami</a:t>
+            </a:r>
+            <a:r>
+              <a:rPr lang="en-US" dirty="0"/>
+              <a:t>, aby </a:t>
+            </a:r>
+            <a:r>
+              <a:rPr lang="en-US" dirty="0" err="1"/>
+              <a:t>uniknąć</a:t>
+            </a:r>
+            <a:r>
+              <a:rPr lang="en-US" dirty="0"/>
+              <a:t> </a:t>
+            </a:r>
+            <a:r>
+              <a:rPr lang="en-US" dirty="0" err="1"/>
+              <a:t>błędów</a:t>
+            </a:r>
+            <a:r>
+              <a:rPr lang="en-US" dirty="0"/>
+              <a:t> </a:t>
+            </a:r>
+            <a:r>
+              <a:rPr lang="en-US" dirty="0" err="1"/>
+              <a:t>projektowych.Integracja</a:t>
+            </a:r>
+            <a:r>
+              <a:rPr lang="en-US" dirty="0"/>
+              <a:t> </a:t>
+            </a:r>
+            <a:r>
+              <a:rPr lang="en-US" dirty="0" err="1"/>
+              <a:t>i</a:t>
+            </a:r>
+            <a:r>
+              <a:rPr lang="en-US" dirty="0"/>
+              <a:t> </a:t>
+            </a:r>
+            <a:r>
+              <a:rPr lang="en-US" dirty="0" err="1"/>
+              <a:t>walidacja</a:t>
+            </a:r>
+            <a:r>
+              <a:rPr lang="en-US" dirty="0"/>
+              <a:t>: </a:t>
+            </a:r>
+            <a:r>
+              <a:rPr lang="en-US" dirty="0" err="1"/>
+              <a:t>Sprawdzenie</a:t>
+            </a:r>
+            <a:r>
+              <a:rPr lang="en-US" dirty="0"/>
+              <a:t>, </a:t>
+            </a:r>
+            <a:r>
+              <a:rPr lang="en-US" dirty="0" err="1"/>
+              <a:t>czy</a:t>
+            </a:r>
+            <a:r>
+              <a:rPr lang="en-US" dirty="0"/>
+              <a:t> </a:t>
+            </a:r>
+            <a:r>
+              <a:rPr lang="en-US" dirty="0" err="1"/>
+              <a:t>gotowy</a:t>
+            </a:r>
+            <a:r>
+              <a:rPr lang="en-US" dirty="0"/>
+              <a:t> </a:t>
+            </a:r>
+            <a:r>
+              <a:rPr lang="en-US" dirty="0" err="1"/>
+              <a:t>produkt</a:t>
+            </a:r>
+            <a:r>
+              <a:rPr lang="en-US" dirty="0"/>
+              <a:t> </a:t>
+            </a:r>
+            <a:r>
+              <a:rPr lang="en-US" dirty="0" err="1"/>
+              <a:t>rzeczywiście</a:t>
+            </a:r>
+            <a:r>
+              <a:rPr lang="en-US" dirty="0"/>
+              <a:t> </a:t>
+            </a:r>
+            <a:r>
+              <a:rPr lang="en-US" dirty="0" err="1"/>
+              <a:t>spełnia</a:t>
+            </a:r>
+            <a:r>
+              <a:rPr lang="en-US" dirty="0"/>
+              <a:t> </a:t>
+            </a:r>
+            <a:r>
+              <a:rPr lang="en-US" dirty="0" err="1"/>
+              <a:t>założone</a:t>
+            </a:r>
+            <a:r>
+              <a:rPr lang="en-US" dirty="0"/>
+              <a:t> </a:t>
+            </a:r>
+            <a:r>
+              <a:rPr lang="en-US" dirty="0" err="1"/>
+              <a:t>cele</a:t>
+            </a:r>
+            <a:r>
+              <a:rPr lang="en-US" dirty="0"/>
+              <a:t> </a:t>
+            </a:r>
+            <a:r>
+              <a:rPr lang="en-US" dirty="0" err="1"/>
+              <a:t>bezpieczeństwa</a:t>
+            </a:r>
+            <a:r>
+              <a:rPr lang="en-US" dirty="0"/>
+              <a:t> w </a:t>
+            </a:r>
+            <a:r>
+              <a:rPr lang="en-US" dirty="0" err="1"/>
+              <a:t>rzeczywistych</a:t>
+            </a:r>
+            <a:r>
+              <a:rPr lang="en-US" dirty="0"/>
+              <a:t> </a:t>
+            </a:r>
+            <a:r>
+              <a:rPr lang="en-US" dirty="0" err="1"/>
+              <a:t>warunkach</a:t>
+            </a:r>
+            <a:r>
+              <a:rPr lang="en-US" dirty="0" smtClean="0"/>
+              <a:t>.</a:t>
+            </a:r>
+            <a:endParaRPr lang="pl-PL" dirty="0" smtClean="0"/>
+          </a:p>
+          <a:p>
+            <a:endParaRPr lang="pl-PL" dirty="0" smtClean="0"/>
+          </a:p>
+          <a:p>
+            <a:r>
+              <a:rPr lang="pl-PL" dirty="0" smtClean="0"/>
+              <a:t>3. </a:t>
+            </a:r>
+            <a:r>
+              <a:rPr lang="en-US" dirty="0" err="1" smtClean="0"/>
+              <a:t>Produkcja</a:t>
+            </a:r>
+            <a:r>
+              <a:rPr lang="en-US" dirty="0" smtClean="0"/>
+              <a:t> </a:t>
+            </a:r>
+            <a:r>
+              <a:rPr lang="en-US" dirty="0" err="1"/>
+              <a:t>i</a:t>
+            </a:r>
+            <a:r>
+              <a:rPr lang="en-US" dirty="0"/>
+              <a:t> </a:t>
+            </a:r>
+            <a:r>
+              <a:rPr lang="en-US" dirty="0" err="1"/>
+              <a:t>eksploatacja</a:t>
+            </a:r>
+            <a:r>
+              <a:rPr lang="en-US" dirty="0"/>
+              <a:t> (Production &amp; Operation)</a:t>
+            </a:r>
+            <a:r>
+              <a:rPr lang="en-US" dirty="0" err="1"/>
+              <a:t>Bezpieczeństwo</a:t>
+            </a:r>
+            <a:r>
+              <a:rPr lang="en-US" dirty="0"/>
+              <a:t> </a:t>
+            </a:r>
+            <a:r>
+              <a:rPr lang="en-US" dirty="0" err="1"/>
+              <a:t>musi</a:t>
+            </a:r>
+            <a:r>
+              <a:rPr lang="en-US" dirty="0"/>
+              <a:t> </a:t>
+            </a:r>
+            <a:r>
+              <a:rPr lang="en-US" dirty="0" err="1"/>
+              <a:t>być</a:t>
+            </a:r>
+            <a:r>
+              <a:rPr lang="en-US" dirty="0"/>
+              <a:t> </a:t>
+            </a:r>
+            <a:r>
+              <a:rPr lang="en-US" dirty="0" err="1"/>
+              <a:t>zachowane</a:t>
+            </a:r>
+            <a:r>
+              <a:rPr lang="en-US" dirty="0"/>
+              <a:t> </a:t>
+            </a:r>
+            <a:r>
+              <a:rPr lang="en-US" dirty="0" err="1"/>
+              <a:t>również</a:t>
+            </a:r>
+            <a:r>
+              <a:rPr lang="en-US" dirty="0"/>
+              <a:t> </a:t>
+            </a:r>
+            <a:r>
+              <a:rPr lang="en-US" dirty="0" err="1"/>
+              <a:t>po</a:t>
+            </a:r>
+            <a:r>
+              <a:rPr lang="en-US" dirty="0"/>
+              <a:t> </a:t>
+            </a:r>
+            <a:r>
+              <a:rPr lang="en-US" dirty="0" err="1"/>
+              <a:t>opuszczeniu</a:t>
+            </a:r>
+            <a:r>
+              <a:rPr lang="en-US" dirty="0"/>
+              <a:t> </a:t>
+            </a:r>
+            <a:r>
+              <a:rPr lang="en-US" dirty="0" err="1"/>
+              <a:t>fabryki:Produkcja</a:t>
+            </a:r>
+            <a:r>
+              <a:rPr lang="en-US" dirty="0"/>
+              <a:t>: </a:t>
+            </a:r>
+            <a:r>
+              <a:rPr lang="en-US" dirty="0" err="1"/>
+              <a:t>Zapewnienie</a:t>
+            </a:r>
+            <a:r>
+              <a:rPr lang="en-US" dirty="0"/>
+              <a:t>, </a:t>
+            </a:r>
+            <a:r>
+              <a:rPr lang="en-US" dirty="0" err="1"/>
+              <a:t>że</a:t>
+            </a:r>
+            <a:r>
+              <a:rPr lang="en-US" dirty="0"/>
+              <a:t> </a:t>
+            </a:r>
+            <a:r>
+              <a:rPr lang="en-US" dirty="0" err="1"/>
+              <a:t>każdy</a:t>
+            </a:r>
+            <a:r>
+              <a:rPr lang="en-US" dirty="0"/>
+              <a:t> </a:t>
+            </a:r>
+            <a:r>
+              <a:rPr lang="en-US" dirty="0" err="1"/>
+              <a:t>egzemplarz</a:t>
+            </a:r>
+            <a:r>
+              <a:rPr lang="en-US" dirty="0"/>
+              <a:t> jest </a:t>
+            </a:r>
+            <a:r>
+              <a:rPr lang="en-US" dirty="0" err="1"/>
+              <a:t>wykonany</a:t>
+            </a:r>
+            <a:r>
+              <a:rPr lang="en-US" dirty="0"/>
+              <a:t> </a:t>
+            </a:r>
+            <a:r>
+              <a:rPr lang="en-US" dirty="0" err="1"/>
+              <a:t>poprawnie</a:t>
+            </a:r>
+            <a:r>
+              <a:rPr lang="en-US" dirty="0"/>
+              <a:t> </a:t>
+            </a:r>
+            <a:r>
+              <a:rPr lang="en-US" dirty="0" err="1"/>
+              <a:t>i</a:t>
+            </a:r>
+            <a:r>
+              <a:rPr lang="en-US" dirty="0"/>
+              <a:t> bez wad </a:t>
+            </a:r>
+            <a:r>
+              <a:rPr lang="en-US" dirty="0" err="1"/>
+              <a:t>zagrażających</a:t>
+            </a:r>
+            <a:r>
+              <a:rPr lang="en-US" dirty="0"/>
+              <a:t> </a:t>
+            </a:r>
+            <a:r>
+              <a:rPr lang="en-US" dirty="0" err="1"/>
+              <a:t>bezpieczeństwu.Obsługa</a:t>
+            </a:r>
+            <a:r>
+              <a:rPr lang="en-US" dirty="0"/>
+              <a:t> </a:t>
+            </a:r>
+            <a:r>
+              <a:rPr lang="en-US" dirty="0" err="1"/>
+              <a:t>i</a:t>
+            </a:r>
+            <a:r>
+              <a:rPr lang="en-US" dirty="0"/>
+              <a:t> </a:t>
+            </a:r>
+            <a:r>
+              <a:rPr lang="en-US" dirty="0" err="1"/>
+              <a:t>serwis</a:t>
+            </a:r>
+            <a:r>
+              <a:rPr lang="en-US" dirty="0"/>
+              <a:t>: </a:t>
+            </a:r>
+            <a:r>
+              <a:rPr lang="en-US" dirty="0" err="1"/>
+              <a:t>Procedury</a:t>
+            </a:r>
+            <a:r>
+              <a:rPr lang="en-US" dirty="0"/>
+              <a:t> </a:t>
+            </a:r>
+            <a:r>
+              <a:rPr lang="en-US" dirty="0" err="1"/>
+              <a:t>napraw</a:t>
+            </a:r>
+            <a:r>
+              <a:rPr lang="en-US" dirty="0"/>
+              <a:t>, aby </a:t>
+            </a:r>
+            <a:r>
+              <a:rPr lang="en-US" dirty="0" err="1"/>
+              <a:t>nie</a:t>
+            </a:r>
+            <a:r>
+              <a:rPr lang="en-US" dirty="0"/>
+              <a:t> </a:t>
+            </a:r>
+            <a:r>
+              <a:rPr lang="en-US" dirty="0" err="1"/>
+              <a:t>naruszyć</a:t>
+            </a:r>
+            <a:r>
+              <a:rPr lang="en-US" dirty="0"/>
+              <a:t> </a:t>
+            </a:r>
+            <a:r>
+              <a:rPr lang="en-US" dirty="0" err="1"/>
+              <a:t>integralności</a:t>
+            </a:r>
+            <a:r>
+              <a:rPr lang="en-US" dirty="0"/>
+              <a:t> </a:t>
+            </a:r>
+            <a:r>
+              <a:rPr lang="en-US" dirty="0" err="1"/>
+              <a:t>systemów</a:t>
+            </a:r>
+            <a:r>
+              <a:rPr lang="en-US" dirty="0"/>
+              <a:t> </a:t>
+            </a:r>
+            <a:r>
+              <a:rPr lang="en-US" dirty="0" err="1"/>
+              <a:t>bezpieczeństwa.Wycofanie</a:t>
+            </a:r>
+            <a:r>
+              <a:rPr lang="en-US" dirty="0"/>
+              <a:t> z </a:t>
+            </a:r>
+            <a:r>
+              <a:rPr lang="en-US" dirty="0" err="1"/>
+              <a:t>eksploatacji</a:t>
+            </a:r>
+            <a:r>
+              <a:rPr lang="en-US" dirty="0"/>
+              <a:t> (Decommissioning): </a:t>
+            </a:r>
+            <a:r>
+              <a:rPr lang="en-US" dirty="0" err="1"/>
+              <a:t>Bezpieczne</a:t>
+            </a:r>
+            <a:r>
+              <a:rPr lang="en-US" dirty="0"/>
+              <a:t> </a:t>
+            </a:r>
+            <a:r>
+              <a:rPr lang="en-US" dirty="0" err="1"/>
+              <a:t>usunięcie</a:t>
+            </a:r>
+            <a:r>
+              <a:rPr lang="en-US" dirty="0"/>
+              <a:t> </a:t>
+            </a:r>
+            <a:r>
+              <a:rPr lang="en-US" dirty="0" err="1"/>
+              <a:t>produktu</a:t>
+            </a:r>
+            <a:r>
+              <a:rPr lang="en-US" dirty="0"/>
+              <a:t> z </a:t>
+            </a:r>
+            <a:r>
+              <a:rPr lang="en-US" dirty="0" err="1"/>
+              <a:t>rynku</a:t>
+            </a:r>
+            <a:r>
+              <a:rPr lang="en-US" dirty="0"/>
+              <a:t>. </a:t>
+            </a:r>
           </a:p>
         </p:txBody>
       </p:sp>
     </p:spTree>
     <p:extLst>
       <p:ext uri="{BB962C8B-B14F-4D97-AF65-F5344CB8AC3E}">
-        <p14:creationId xmlns:p14="http://schemas.microsoft.com/office/powerpoint/2010/main" val="4280957602"/>
+        <p14:creationId xmlns:p14="http://schemas.microsoft.com/office/powerpoint/2010/main" val="1792836569"/>
       </p:ext>
     </p:extLst>
   </p:cSld>
@@ -3518,7 +5027,7 @@
 </p:sld>
 </file>
 
-<file path=ppt/slides/slide10.xml><?xml version="1.0" encoding="utf-8"?>
+<file path=ppt/slides/slide11.xml><?xml version="1.0" encoding="utf-8"?>
 <p:sld xmlns:a="http://schemas.openxmlformats.org/drawingml/2006/main" xmlns:r="http://schemas.openxmlformats.org/officeDocument/2006/relationships" xmlns:p="http://schemas.openxmlformats.org/presentationml/2006/main">
   <p:cSld>
     <p:spTree>
@@ -3628,7 +5137,7 @@
 </p:sld>
 </file>
 
-<file path=ppt/slides/slide11.xml><?xml version="1.0" encoding="utf-8"?>
+<file path=ppt/slides/slide12.xml><?xml version="1.0" encoding="utf-8"?>
 <p:sld xmlns:a="http://schemas.openxmlformats.org/drawingml/2006/main" xmlns:r="http://schemas.openxmlformats.org/officeDocument/2006/relationships" xmlns:p="http://schemas.openxmlformats.org/presentationml/2006/main">
   <p:cSld>
     <p:spTree>
@@ -3897,7 +5406,7 @@
 </p:sld>
 </file>
 
-<file path=ppt/slides/slide12.xml><?xml version="1.0" encoding="utf-8"?>
+<file path=ppt/slides/slide13.xml><?xml version="1.0" encoding="utf-8"?>
 <p:sld xmlns:a="http://schemas.openxmlformats.org/drawingml/2006/main" xmlns:r="http://schemas.openxmlformats.org/officeDocument/2006/relationships" xmlns:p="http://schemas.openxmlformats.org/presentationml/2006/main">
   <p:cSld>
     <p:spTree>
@@ -3975,7 +5484,7 @@
 </p:sld>
 </file>
 
-<file path=ppt/slides/slide13.xml><?xml version="1.0" encoding="utf-8"?>
+<file path=ppt/slides/slide14.xml><?xml version="1.0" encoding="utf-8"?>
 <p:sld xmlns:a="http://schemas.openxmlformats.org/drawingml/2006/main" xmlns:r="http://schemas.openxmlformats.org/officeDocument/2006/relationships" xmlns:p="http://schemas.openxmlformats.org/presentationml/2006/main">
   <p:cSld>
     <p:spTree>
@@ -5438,7 +6947,7 @@
           <a:graphicData uri="http://schemas.openxmlformats.org/presentationml/2006/ole">
             <mc:AlternateContent xmlns:mc="http://schemas.openxmlformats.org/markup-compatibility/2006">
               <mc:Choice xmlns:v="urn:schemas-microsoft-com:vml" Requires="v">
-                <p:oleObj spid="_x0000_s2074" name="Arkusz" r:id="rId3" imgW="10372571" imgH="1485900" progId="Excel.Sheet.12">
+                <p:oleObj spid="_x0000_s2079" name="Arkusz" r:id="rId3" imgW="10372571" imgH="1485900" progId="Excel.Sheet.12">
                   <p:embed/>
                 </p:oleObj>
               </mc:Choice>
@@ -5493,7 +7002,7 @@
 </p:sld>
 </file>
 
-<file path=ppt/slides/slide14.xml><?xml version="1.0" encoding="utf-8"?>
+<file path=ppt/slides/slide15.xml><?xml version="1.0" encoding="utf-8"?>
 <p:sld xmlns:a="http://schemas.openxmlformats.org/drawingml/2006/main" xmlns:r="http://schemas.openxmlformats.org/officeDocument/2006/relationships" xmlns:p="http://schemas.openxmlformats.org/presentationml/2006/main">
   <p:cSld>
     <p:spTree>
@@ -6031,7 +7540,7 @@
 </p:sld>
 </file>
 
-<file path=ppt/slides/slide15.xml><?xml version="1.0" encoding="utf-8"?>
+<file path=ppt/slides/slide16.xml><?xml version="1.0" encoding="utf-8"?>
 <p:sld xmlns:a="http://schemas.openxmlformats.org/drawingml/2006/main" xmlns:r="http://schemas.openxmlformats.org/officeDocument/2006/relationships" xmlns:p="http://schemas.openxmlformats.org/presentationml/2006/main">
   <p:cSld>
     <p:spTree>
@@ -6092,7 +7601,7 @@
 </p:sld>
 </file>
 
-<file path=ppt/slides/slide16.xml><?xml version="1.0" encoding="utf-8"?>
+<file path=ppt/slides/slide17.xml><?xml version="1.0" encoding="utf-8"?>
 <p:sld xmlns:a="http://schemas.openxmlformats.org/drawingml/2006/main" xmlns:r="http://schemas.openxmlformats.org/officeDocument/2006/relationships" xmlns:p="http://schemas.openxmlformats.org/presentationml/2006/main">
   <p:cSld>
     <p:spTree>
@@ -6759,7 +8268,7 @@
 </p:sld>
 </file>
 
-<file path=ppt/slides/slide17.xml><?xml version="1.0" encoding="utf-8"?>
+<file path=ppt/slides/slide18.xml><?xml version="1.0" encoding="utf-8"?>
 <p:sld xmlns:a="http://schemas.openxmlformats.org/drawingml/2006/main" xmlns:r="http://schemas.openxmlformats.org/officeDocument/2006/relationships" xmlns:p="http://schemas.openxmlformats.org/presentationml/2006/main">
   <p:cSld>
     <p:spTree>
@@ -7585,7 +9094,7 @@
 </p:sld>
 </file>
 
-<file path=ppt/slides/slide18.xml><?xml version="1.0" encoding="utf-8"?>
+<file path=ppt/slides/slide19.xml><?xml version="1.0" encoding="utf-8"?>
 <p:sld xmlns:a="http://schemas.openxmlformats.org/drawingml/2006/main" xmlns:r="http://schemas.openxmlformats.org/officeDocument/2006/relationships" xmlns:p="http://schemas.openxmlformats.org/presentationml/2006/main">
   <p:cSld>
     <p:bg>
@@ -8232,7 +9741,194 @@
 </p:sld>
 </file>
 
-<file path=ppt/slides/slide19.xml><?xml version="1.0" encoding="utf-8"?>
+<file path=ppt/slides/slide2.xml><?xml version="1.0" encoding="utf-8"?>
+<p:sld xmlns:a="http://schemas.openxmlformats.org/drawingml/2006/main" xmlns:r="http://schemas.openxmlformats.org/officeDocument/2006/relationships" xmlns:p="http://schemas.openxmlformats.org/presentationml/2006/main">
+  <p:cSld>
+    <p:spTree>
+      <p:nvGrpSpPr>
+        <p:cNvPr id="1" name=""/>
+        <p:cNvGrpSpPr/>
+        <p:nvPr/>
+      </p:nvGrpSpPr>
+      <p:grpSpPr>
+        <a:xfrm>
+          <a:off x="0" y="0"/>
+          <a:ext cx="0" cy="0"/>
+          <a:chOff x="0" y="0"/>
+          <a:chExt cx="0" cy="0"/>
+        </a:xfrm>
+      </p:grpSpPr>
+      <p:pic>
+        <p:nvPicPr>
+          <p:cNvPr id="6" name="Obraz 5"/>
+          <p:cNvPicPr>
+            <a:picLocks noChangeAspect="1"/>
+          </p:cNvPicPr>
+          <p:nvPr/>
+        </p:nvPicPr>
+        <p:blipFill>
+          <a:blip r:embed="rId2"/>
+          <a:stretch>
+            <a:fillRect/>
+          </a:stretch>
+        </p:blipFill>
+        <p:spPr>
+          <a:xfrm>
+            <a:off x="1561419" y="825107"/>
+            <a:ext cx="8763000" cy="5842000"/>
+          </a:xfrm>
+          <a:prstGeom prst="rect">
+            <a:avLst/>
+          </a:prstGeom>
+        </p:spPr>
+      </p:pic>
+      <p:sp>
+        <p:nvSpPr>
+          <p:cNvPr id="7" name="Prostokąt 6"/>
+          <p:cNvSpPr/>
+          <p:nvPr/>
+        </p:nvSpPr>
+        <p:spPr>
+          <a:xfrm>
+            <a:off x="548640" y="168325"/>
+            <a:ext cx="8218170" cy="369332"/>
+          </a:xfrm>
+          <a:prstGeom prst="rect">
+            <a:avLst/>
+          </a:prstGeom>
+        </p:spPr>
+        <p:txBody>
+          <a:bodyPr wrap="square">
+            <a:spAutoFit/>
+          </a:bodyPr>
+          <a:lstStyle/>
+          <a:p>
+            <a:pPr lvl="0">
+              <a:defRPr/>
+            </a:pPr>
+            <a:r>
+              <a:rPr lang="pl-PL" b="1" dirty="0"/>
+              <a:t>V-model</a:t>
+            </a:r>
+            <a:r>
+              <a:rPr lang="pl-PL" dirty="0"/>
+              <a:t> pokazuje </a:t>
+            </a:r>
+            <a:r>
+              <a:rPr lang="pl-PL" b="1" dirty="0"/>
+              <a:t>zależność między tworzeniem systemu a jego testowaniem</a:t>
+            </a:r>
+            <a:r>
+              <a:rPr lang="pl-PL" dirty="0"/>
+              <a:t>.</a:t>
+            </a:r>
+            <a:endParaRPr lang="en-US" dirty="0"/>
+          </a:p>
+        </p:txBody>
+      </p:sp>
+      <p:sp>
+        <p:nvSpPr>
+          <p:cNvPr id="8" name="Prostokąt 7"/>
+          <p:cNvSpPr/>
+          <p:nvPr/>
+        </p:nvSpPr>
+        <p:spPr>
+          <a:xfrm rot="16200000">
+            <a:off x="-898904" y="3210044"/>
+            <a:ext cx="3748527" cy="369332"/>
+          </a:xfrm>
+          <a:prstGeom prst="rect">
+            <a:avLst/>
+          </a:prstGeom>
+        </p:spPr>
+        <p:txBody>
+          <a:bodyPr wrap="none">
+            <a:spAutoFit/>
+          </a:bodyPr>
+          <a:lstStyle/>
+          <a:p>
+            <a:r>
+              <a:rPr lang="pl-PL" dirty="0"/>
+              <a:t>Lewa strona </a:t>
+            </a:r>
+            <a:r>
+              <a:rPr lang="pl-PL" b="1" dirty="0"/>
+              <a:t>V</a:t>
+            </a:r>
+            <a:r>
+              <a:rPr lang="pl-PL" dirty="0"/>
+              <a:t> → </a:t>
+            </a:r>
+            <a:r>
+              <a:rPr lang="pl-PL" i="1" dirty="0"/>
+              <a:t>co i jak projektujemy</a:t>
+            </a:r>
+            <a:endParaRPr lang="en-US" dirty="0"/>
+          </a:p>
+        </p:txBody>
+      </p:sp>
+      <p:sp>
+        <p:nvSpPr>
+          <p:cNvPr id="9" name="Prostokąt 8"/>
+          <p:cNvSpPr/>
+          <p:nvPr/>
+        </p:nvSpPr>
+        <p:spPr>
+          <a:xfrm rot="5400000">
+            <a:off x="8816971" y="3210044"/>
+            <a:ext cx="4570738" cy="369332"/>
+          </a:xfrm>
+          <a:prstGeom prst="rect">
+            <a:avLst/>
+          </a:prstGeom>
+        </p:spPr>
+        <p:txBody>
+          <a:bodyPr wrap="none">
+            <a:spAutoFit/>
+          </a:bodyPr>
+          <a:lstStyle/>
+          <a:p>
+            <a:r>
+              <a:rPr lang="pl-PL" dirty="0"/>
+              <a:t>Prawa strona </a:t>
+            </a:r>
+            <a:r>
+              <a:rPr lang="pl-PL" b="1" dirty="0"/>
+              <a:t>V</a:t>
+            </a:r>
+            <a:r>
+              <a:rPr lang="pl-PL" dirty="0"/>
+              <a:t> → </a:t>
+            </a:r>
+            <a:r>
+              <a:rPr lang="pl-PL" i="1" dirty="0"/>
+              <a:t>jak sprawdzamy, że to działa</a:t>
+            </a:r>
+            <a:endParaRPr lang="en-US" dirty="0"/>
+          </a:p>
+        </p:txBody>
+      </p:sp>
+    </p:spTree>
+    <p:extLst>
+      <p:ext uri="{BB962C8B-B14F-4D97-AF65-F5344CB8AC3E}">
+        <p14:creationId xmlns:p14="http://schemas.microsoft.com/office/powerpoint/2010/main" val="4280957602"/>
+      </p:ext>
+    </p:extLst>
+  </p:cSld>
+  <p:clrMapOvr>
+    <a:masterClrMapping/>
+  </p:clrMapOvr>
+  <p:timing>
+    <p:tnLst>
+      <p:par>
+        <p:cTn id="1" dur="indefinite" restart="never" nodeType="tmRoot"/>
+      </p:par>
+    </p:tnLst>
+  </p:timing>
+</p:sld>
+</file>
+
+<file path=ppt/slides/slide20.xml><?xml version="1.0" encoding="utf-8"?>
 <p:sld xmlns:a="http://schemas.openxmlformats.org/drawingml/2006/main" xmlns:r="http://schemas.openxmlformats.org/officeDocument/2006/relationships" xmlns:p="http://schemas.openxmlformats.org/presentationml/2006/main">
   <p:cSld>
     <p:spTree>
@@ -9009,915 +10705,7 @@
 </p:sld>
 </file>
 
-<file path=ppt/slides/slide2.xml><?xml version="1.0" encoding="utf-8"?>
-<p:sld xmlns:a="http://schemas.openxmlformats.org/drawingml/2006/main" xmlns:r="http://schemas.openxmlformats.org/officeDocument/2006/relationships" xmlns:p="http://schemas.openxmlformats.org/presentationml/2006/main">
-  <p:cSld>
-    <p:spTree>
-      <p:nvGrpSpPr>
-        <p:cNvPr id="1" name=""/>
-        <p:cNvGrpSpPr/>
-        <p:nvPr/>
-      </p:nvGrpSpPr>
-      <p:grpSpPr>
-        <a:xfrm>
-          <a:off x="0" y="0"/>
-          <a:ext cx="0" cy="0"/>
-          <a:chOff x="0" y="0"/>
-          <a:chExt cx="0" cy="0"/>
-        </a:xfrm>
-      </p:grpSpPr>
-      <p:graphicFrame>
-        <p:nvGraphicFramePr>
-          <p:cNvPr id="5" name="Tabela 4"/>
-          <p:cNvGraphicFramePr>
-            <a:graphicFrameLocks noGrp="1"/>
-          </p:cNvGraphicFramePr>
-          <p:nvPr>
-            <p:extLst>
-              <p:ext uri="{D42A27DB-BD31-4B8C-83A1-F6EECF244321}">
-                <p14:modId xmlns:p14="http://schemas.microsoft.com/office/powerpoint/2010/main" val="1056004053"/>
-              </p:ext>
-            </p:extLst>
-          </p:nvPr>
-        </p:nvGraphicFramePr>
-        <p:xfrm>
-          <a:off x="433781" y="588789"/>
-          <a:ext cx="11327130" cy="3523786"/>
-        </p:xfrm>
-        <a:graphic>
-          <a:graphicData uri="http://schemas.openxmlformats.org/drawingml/2006/table">
-            <a:tbl>
-              <a:tblPr firstRow="1" bandRow="1">
-                <a:tableStyleId>{5C22544A-7EE6-4342-B048-85BDC9FD1C3A}</a:tableStyleId>
-              </a:tblPr>
-              <a:tblGrid>
-                <a:gridCol w="5663565">
-                  <a:extLst>
-                    <a:ext uri="{9D8B030D-6E8A-4147-A177-3AD203B41FA5}">
-                      <a16:colId xmlns:a16="http://schemas.microsoft.com/office/drawing/2014/main" val="4260624017"/>
-                    </a:ext>
-                  </a:extLst>
-                </a:gridCol>
-                <a:gridCol w="5663565">
-                  <a:extLst>
-                    <a:ext uri="{9D8B030D-6E8A-4147-A177-3AD203B41FA5}">
-                      <a16:colId xmlns:a16="http://schemas.microsoft.com/office/drawing/2014/main" val="3303431953"/>
-                    </a:ext>
-                  </a:extLst>
-                </a:gridCol>
-              </a:tblGrid>
-              <a:tr h="1632974">
-                <a:tc>
-                  <a:txBody>
-                    <a:bodyPr/>
-                    <a:lstStyle/>
-                    <a:p>
-                      <a:r>
-                        <a:rPr lang="pl-PL" b="1" dirty="0" smtClean="0">
-                          <a:solidFill>
-                            <a:schemeClr val="tx1"/>
-                          </a:solidFill>
-                        </a:rPr>
-                        <a:t>1. </a:t>
-                      </a:r>
-                      <a:r>
-                        <a:rPr lang="pl-PL" b="1" dirty="0" smtClean="0">
-                          <a:solidFill>
-                            <a:srgbClr val="00B050"/>
-                          </a:solidFill>
-                        </a:rPr>
-                        <a:t>Wymagania systemowe</a:t>
-                      </a:r>
-                    </a:p>
-                    <a:p>
-                      <a:r>
-                        <a:rPr lang="pl-PL" b="1" dirty="0" smtClean="0">
-                          <a:solidFill>
-                            <a:srgbClr val="00B050"/>
-                          </a:solidFill>
-                        </a:rPr>
-                        <a:t>Co ma robić cały system</a:t>
-                      </a:r>
-                    </a:p>
-                    <a:p>
-                      <a:r>
-                        <a:rPr lang="pl-PL" b="1" dirty="0" smtClean="0">
-                          <a:solidFill>
-                            <a:srgbClr val="00B050"/>
-                          </a:solidFill>
-                        </a:rPr>
-                        <a:t>Język „biznesowo-funkcjonalny”</a:t>
-                      </a:r>
-                    </a:p>
-                    <a:p>
-                      <a:endParaRPr lang="pl-PL" b="1" dirty="0" smtClean="0">
-                        <a:solidFill>
-                          <a:srgbClr val="00B050"/>
-                        </a:solidFill>
-                      </a:endParaRPr>
-                    </a:p>
-                    <a:p>
-                      <a:r>
-                        <a:rPr lang="pl-PL" b="1" dirty="0" smtClean="0">
-                          <a:solidFill>
-                            <a:srgbClr val="00B050"/>
-                          </a:solidFill>
-                        </a:rPr>
-                        <a:t>np. System musi wykrywać poślizg i stabilizować tor jazdy</a:t>
-                      </a:r>
-                    </a:p>
-                  </a:txBody>
-                  <a:tcPr>
-                    <a:gradFill>
-                      <a:gsLst>
-                        <a:gs pos="0">
-                          <a:schemeClr val="accent1">
-                            <a:lumMod val="5000"/>
-                            <a:lumOff val="95000"/>
-                          </a:schemeClr>
-                        </a:gs>
-                        <a:gs pos="74000">
-                          <a:schemeClr val="accent1">
-                            <a:lumMod val="45000"/>
-                            <a:lumOff val="55000"/>
-                          </a:schemeClr>
-                        </a:gs>
-                        <a:gs pos="83000">
-                          <a:schemeClr val="accent1">
-                            <a:lumMod val="45000"/>
-                            <a:lumOff val="55000"/>
-                          </a:schemeClr>
-                        </a:gs>
-                        <a:gs pos="100000">
-                          <a:schemeClr val="accent1">
-                            <a:lumMod val="30000"/>
-                            <a:lumOff val="70000"/>
-                          </a:schemeClr>
-                        </a:gs>
-                      </a:gsLst>
-                      <a:lin ang="5400000" scaled="1"/>
-                    </a:gradFill>
-                  </a:tcPr>
-                </a:tc>
-                <a:tc>
-                  <a:txBody>
-                    <a:bodyPr/>
-                    <a:lstStyle/>
-                    <a:p>
-                      <a:r>
-                        <a:rPr lang="pl-PL" b="1" dirty="0" smtClean="0">
-                          <a:solidFill>
-                            <a:schemeClr val="tx1"/>
-                          </a:solidFill>
-                        </a:rPr>
-                        <a:t>2. </a:t>
-                      </a:r>
-                      <a:r>
-                        <a:rPr lang="pl-PL" b="1" dirty="0" smtClean="0">
-                          <a:solidFill>
-                            <a:srgbClr val="00B050"/>
-                          </a:solidFill>
-                        </a:rPr>
-                        <a:t>Wymagania architektury</a:t>
-                      </a:r>
-                    </a:p>
-                    <a:p>
-                      <a:r>
-                        <a:rPr lang="pl-PL" b="1" dirty="0" smtClean="0">
-                          <a:solidFill>
-                            <a:srgbClr val="00B050"/>
-                          </a:solidFill>
-                        </a:rPr>
-                        <a:t>Podział na ECU</a:t>
-                      </a:r>
-                    </a:p>
-                    <a:p>
-                      <a:r>
-                        <a:rPr lang="pl-PL" b="1" dirty="0" smtClean="0">
-                          <a:solidFill>
-                            <a:srgbClr val="00B050"/>
-                          </a:solidFill>
-                        </a:rPr>
-                        <a:t>Magistrale (CAN / LIN / Ethernet)</a:t>
-                      </a:r>
-                    </a:p>
-                    <a:p>
-                      <a:endParaRPr lang="pl-PL" b="1" dirty="0" smtClean="0">
-                        <a:solidFill>
-                          <a:srgbClr val="00B050"/>
-                        </a:solidFill>
-                      </a:endParaRPr>
-                    </a:p>
-                    <a:p>
-                      <a:r>
-                        <a:rPr lang="pl-PL" b="1" dirty="0" smtClean="0">
-                          <a:solidFill>
-                            <a:srgbClr val="00B050"/>
-                          </a:solidFill>
-                        </a:rPr>
-                        <a:t>np.</a:t>
-                      </a:r>
-                      <a:r>
-                        <a:rPr lang="pl-PL" b="1" baseline="0" dirty="0" smtClean="0">
-                          <a:solidFill>
-                            <a:srgbClr val="00B050"/>
-                          </a:solidFill>
-                        </a:rPr>
-                        <a:t> </a:t>
-                      </a:r>
-                      <a:r>
-                        <a:rPr lang="pl-PL" b="1" dirty="0" smtClean="0">
-                          <a:solidFill>
-                            <a:srgbClr val="00B050"/>
-                          </a:solidFill>
-                        </a:rPr>
-                        <a:t>ESP ECU komunikuje się z Engine ECU po CAN.</a:t>
-                      </a:r>
-                      <a:endParaRPr lang="en-US" b="1" dirty="0" smtClean="0">
-                        <a:solidFill>
-                          <a:srgbClr val="00B050"/>
-                        </a:solidFill>
-                      </a:endParaRPr>
-                    </a:p>
-                  </a:txBody>
-                  <a:tcPr>
-                    <a:gradFill>
-                      <a:gsLst>
-                        <a:gs pos="0">
-                          <a:schemeClr val="accent1">
-                            <a:lumMod val="5000"/>
-                            <a:lumOff val="95000"/>
-                          </a:schemeClr>
-                        </a:gs>
-                        <a:gs pos="74000">
-                          <a:schemeClr val="accent1">
-                            <a:lumMod val="45000"/>
-                            <a:lumOff val="55000"/>
-                          </a:schemeClr>
-                        </a:gs>
-                        <a:gs pos="83000">
-                          <a:schemeClr val="accent1">
-                            <a:lumMod val="45000"/>
-                            <a:lumOff val="55000"/>
-                          </a:schemeClr>
-                        </a:gs>
-                        <a:gs pos="100000">
-                          <a:schemeClr val="accent1">
-                            <a:lumMod val="30000"/>
-                            <a:lumOff val="70000"/>
-                          </a:schemeClr>
-                        </a:gs>
-                      </a:gsLst>
-                      <a:lin ang="5400000" scaled="1"/>
-                    </a:gradFill>
-                  </a:tcPr>
-                </a:tc>
-                <a:extLst>
-                  <a:ext uri="{0D108BD9-81ED-4DB2-BD59-A6C34878D82A}">
-                    <a16:rowId xmlns:a16="http://schemas.microsoft.com/office/drawing/2014/main" val="790049715"/>
-                  </a:ext>
-                </a:extLst>
-              </a:tr>
-              <a:tr h="1890812">
-                <a:tc>
-                  <a:txBody>
-                    <a:bodyPr/>
-                    <a:lstStyle/>
-                    <a:p>
-                      <a:r>
-                        <a:rPr lang="pl-PL" b="1" dirty="0" smtClean="0">
-                          <a:solidFill>
-                            <a:schemeClr val="tx1"/>
-                          </a:solidFill>
-                        </a:rPr>
-                        <a:t>3. </a:t>
-                      </a:r>
-                      <a:r>
-                        <a:rPr lang="pl-PL" b="1" dirty="0" smtClean="0">
-                          <a:solidFill>
-                            <a:srgbClr val="00B050"/>
-                          </a:solidFill>
-                        </a:rPr>
-                        <a:t>Wymagania software</a:t>
-                      </a:r>
-                    </a:p>
-                    <a:p>
-                      <a:r>
-                        <a:rPr lang="pl-PL" b="1" dirty="0" smtClean="0">
-                          <a:solidFill>
-                            <a:srgbClr val="00B050"/>
-                          </a:solidFill>
-                        </a:rPr>
-                        <a:t>Logika, algorytmy</a:t>
-                      </a:r>
-                    </a:p>
-                    <a:p>
-                      <a:r>
-                        <a:rPr lang="pl-PL" b="1" dirty="0" smtClean="0">
-                          <a:solidFill>
-                            <a:srgbClr val="00B050"/>
-                          </a:solidFill>
-                        </a:rPr>
-                        <a:t>Stany, reakcje, timingi</a:t>
-                      </a:r>
-                    </a:p>
-                    <a:p>
-                      <a:endParaRPr lang="pl-PL" b="1" dirty="0" smtClean="0">
-                        <a:solidFill>
-                          <a:srgbClr val="00B050"/>
-                        </a:solidFill>
-                      </a:endParaRPr>
-                    </a:p>
-                    <a:p>
-                      <a:r>
-                        <a:rPr lang="pl-PL" b="1" dirty="0" smtClean="0">
-                          <a:solidFill>
-                            <a:srgbClr val="00B050"/>
-                          </a:solidFill>
-                        </a:rPr>
-                        <a:t>np. Gdy poślizg &gt; X, moment silnika ma zostać ograniczony w czasie &lt; 10 ms.</a:t>
-                      </a:r>
-                      <a:endParaRPr lang="en-US" b="1" dirty="0" smtClean="0">
-                        <a:solidFill>
-                          <a:srgbClr val="00B050"/>
-                        </a:solidFill>
-                      </a:endParaRPr>
-                    </a:p>
-                  </a:txBody>
-                  <a:tcPr>
-                    <a:gradFill>
-                      <a:gsLst>
-                        <a:gs pos="0">
-                          <a:schemeClr val="accent1">
-                            <a:lumMod val="5000"/>
-                            <a:lumOff val="95000"/>
-                          </a:schemeClr>
-                        </a:gs>
-                        <a:gs pos="74000">
-                          <a:schemeClr val="accent1">
-                            <a:lumMod val="45000"/>
-                            <a:lumOff val="55000"/>
-                          </a:schemeClr>
-                        </a:gs>
-                        <a:gs pos="83000">
-                          <a:schemeClr val="accent1">
-                            <a:lumMod val="45000"/>
-                            <a:lumOff val="55000"/>
-                          </a:schemeClr>
-                        </a:gs>
-                        <a:gs pos="100000">
-                          <a:schemeClr val="accent1">
-                            <a:lumMod val="30000"/>
-                            <a:lumOff val="70000"/>
-                          </a:schemeClr>
-                        </a:gs>
-                      </a:gsLst>
-                      <a:lin ang="5400000" scaled="1"/>
-                    </a:gradFill>
-                  </a:tcPr>
-                </a:tc>
-                <a:tc>
-                  <a:txBody>
-                    <a:bodyPr/>
-                    <a:lstStyle/>
-                    <a:p>
-                      <a:r>
-                        <a:rPr lang="pl-PL" b="1" dirty="0" smtClean="0">
-                          <a:solidFill>
-                            <a:schemeClr val="tx1"/>
-                          </a:solidFill>
-                        </a:rPr>
-                        <a:t>4. </a:t>
-                      </a:r>
-                      <a:r>
-                        <a:rPr lang="pl-PL" b="1" dirty="0" smtClean="0">
-                          <a:solidFill>
-                            <a:srgbClr val="00B050"/>
-                          </a:solidFill>
-                        </a:rPr>
-                        <a:t>Implementacja</a:t>
-                      </a:r>
-                    </a:p>
-                    <a:p>
-                      <a:r>
-                        <a:rPr lang="pl-PL" b="1" dirty="0" smtClean="0">
-                          <a:solidFill>
-                            <a:srgbClr val="00B050"/>
-                          </a:solidFill>
-                        </a:rPr>
-                        <a:t>Kod</a:t>
-                      </a:r>
-                    </a:p>
-                    <a:p>
-                      <a:r>
-                        <a:rPr lang="pl-PL" b="1" dirty="0" smtClean="0">
-                          <a:solidFill>
-                            <a:srgbClr val="00B050"/>
-                          </a:solidFill>
-                        </a:rPr>
-                        <a:t>konfiguracja</a:t>
-                      </a:r>
-                    </a:p>
-                    <a:p>
-                      <a:r>
-                        <a:rPr lang="pl-PL" b="1" dirty="0" smtClean="0">
-                          <a:solidFill>
-                            <a:srgbClr val="00B050"/>
-                          </a:solidFill>
-                        </a:rPr>
-                        <a:t>kalibracja</a:t>
-                      </a:r>
-                    </a:p>
-                    <a:p>
-                      <a:endParaRPr lang="en-US" b="1" dirty="0">
-                        <a:solidFill>
-                          <a:schemeClr val="tx1"/>
-                        </a:solidFill>
-                      </a:endParaRPr>
-                    </a:p>
-                  </a:txBody>
-                  <a:tcPr>
-                    <a:gradFill>
-                      <a:gsLst>
-                        <a:gs pos="0">
-                          <a:schemeClr val="accent1">
-                            <a:lumMod val="5000"/>
-                            <a:lumOff val="95000"/>
-                          </a:schemeClr>
-                        </a:gs>
-                        <a:gs pos="74000">
-                          <a:schemeClr val="accent1">
-                            <a:lumMod val="45000"/>
-                            <a:lumOff val="55000"/>
-                          </a:schemeClr>
-                        </a:gs>
-                        <a:gs pos="83000">
-                          <a:schemeClr val="accent1">
-                            <a:lumMod val="45000"/>
-                            <a:lumOff val="55000"/>
-                          </a:schemeClr>
-                        </a:gs>
-                        <a:gs pos="100000">
-                          <a:schemeClr val="accent1">
-                            <a:lumMod val="30000"/>
-                            <a:lumOff val="70000"/>
-                          </a:schemeClr>
-                        </a:gs>
-                      </a:gsLst>
-                      <a:lin ang="5400000" scaled="1"/>
-                    </a:gradFill>
-                  </a:tcPr>
-                </a:tc>
-                <a:extLst>
-                  <a:ext uri="{0D108BD9-81ED-4DB2-BD59-A6C34878D82A}">
-                    <a16:rowId xmlns:a16="http://schemas.microsoft.com/office/drawing/2014/main" val="3332752919"/>
-                  </a:ext>
-                </a:extLst>
-              </a:tr>
-            </a:tbl>
-          </a:graphicData>
-        </a:graphic>
-      </p:graphicFrame>
-      <p:sp>
-        <p:nvSpPr>
-          <p:cNvPr id="6" name="Prostokąt 5"/>
-          <p:cNvSpPr/>
-          <p:nvPr/>
-        </p:nvSpPr>
-        <p:spPr>
-          <a:xfrm>
-            <a:off x="460130" y="161024"/>
-            <a:ext cx="3699154" cy="369332"/>
-          </a:xfrm>
-          <a:prstGeom prst="rect">
-            <a:avLst/>
-          </a:prstGeom>
-          <a:gradFill>
-            <a:gsLst>
-              <a:gs pos="0">
-                <a:schemeClr val="accent1">
-                  <a:lumMod val="5000"/>
-                  <a:lumOff val="95000"/>
-                </a:schemeClr>
-              </a:gs>
-              <a:gs pos="74000">
-                <a:schemeClr val="accent1">
-                  <a:lumMod val="45000"/>
-                  <a:lumOff val="55000"/>
-                </a:schemeClr>
-              </a:gs>
-              <a:gs pos="83000">
-                <a:schemeClr val="accent1">
-                  <a:lumMod val="45000"/>
-                  <a:lumOff val="55000"/>
-                </a:schemeClr>
-              </a:gs>
-              <a:gs pos="100000">
-                <a:schemeClr val="accent1">
-                  <a:lumMod val="30000"/>
-                  <a:lumOff val="70000"/>
-                </a:schemeClr>
-              </a:gs>
-            </a:gsLst>
-            <a:lin ang="5400000" scaled="1"/>
-          </a:gradFill>
-        </p:spPr>
-        <p:txBody>
-          <a:bodyPr wrap="none">
-            <a:spAutoFit/>
-          </a:bodyPr>
-          <a:lstStyle/>
-          <a:p>
-            <a:r>
-              <a:rPr lang="pl-PL" b="1" dirty="0"/>
-              <a:t>Lewa strona V – wymagania i projekt</a:t>
-            </a:r>
-            <a:endParaRPr lang="en-US" b="1" dirty="0"/>
-          </a:p>
-        </p:txBody>
-      </p:sp>
-      <p:sp>
-        <p:nvSpPr>
-          <p:cNvPr id="7" name="Prostokąt 6"/>
-          <p:cNvSpPr/>
-          <p:nvPr/>
-        </p:nvSpPr>
-        <p:spPr>
-          <a:xfrm>
-            <a:off x="9403394" y="4197756"/>
-            <a:ext cx="2322174" cy="369332"/>
-          </a:xfrm>
-          <a:prstGeom prst="rect">
-            <a:avLst/>
-          </a:prstGeom>
-          <a:solidFill>
-            <a:schemeClr val="accent6"/>
-          </a:solidFill>
-        </p:spPr>
-        <p:txBody>
-          <a:bodyPr wrap="none">
-            <a:spAutoFit/>
-          </a:bodyPr>
-          <a:lstStyle/>
-          <a:p>
-            <a:r>
-              <a:rPr lang="en-US" b="1" dirty="0" err="1"/>
-              <a:t>Prawa</a:t>
-            </a:r>
-            <a:r>
-              <a:rPr lang="en-US" b="1" dirty="0"/>
-              <a:t> </a:t>
-            </a:r>
-            <a:r>
-              <a:rPr lang="en-US" b="1" dirty="0" err="1"/>
-              <a:t>strona</a:t>
-            </a:r>
-            <a:r>
-              <a:rPr lang="en-US" b="1" dirty="0"/>
-              <a:t> V – testy</a:t>
-            </a:r>
-          </a:p>
-        </p:txBody>
-      </p:sp>
-      <p:graphicFrame>
-        <p:nvGraphicFramePr>
-          <p:cNvPr id="8" name="Tabela 7"/>
-          <p:cNvGraphicFramePr>
-            <a:graphicFrameLocks noGrp="1"/>
-          </p:cNvGraphicFramePr>
-          <p:nvPr>
-            <p:extLst>
-              <p:ext uri="{D42A27DB-BD31-4B8C-83A1-F6EECF244321}">
-                <p14:modId xmlns:p14="http://schemas.microsoft.com/office/powerpoint/2010/main" val="2171211024"/>
-              </p:ext>
-            </p:extLst>
-          </p:nvPr>
-        </p:nvGraphicFramePr>
-        <p:xfrm>
-          <a:off x="422631" y="4644888"/>
-          <a:ext cx="11327128" cy="2011680"/>
-        </p:xfrm>
-        <a:graphic>
-          <a:graphicData uri="http://schemas.openxmlformats.org/drawingml/2006/table">
-            <a:tbl>
-              <a:tblPr firstRow="1" bandRow="1">
-                <a:tableStyleId>{93296810-A885-4BE3-A3E7-6D5BEEA58F35}</a:tableStyleId>
-              </a:tblPr>
-              <a:tblGrid>
-                <a:gridCol w="2831782">
-                  <a:extLst>
-                    <a:ext uri="{9D8B030D-6E8A-4147-A177-3AD203B41FA5}">
-                      <a16:colId xmlns:a16="http://schemas.microsoft.com/office/drawing/2014/main" val="3902080005"/>
-                    </a:ext>
-                  </a:extLst>
-                </a:gridCol>
-                <a:gridCol w="2831782">
-                  <a:extLst>
-                    <a:ext uri="{9D8B030D-6E8A-4147-A177-3AD203B41FA5}">
-                      <a16:colId xmlns:a16="http://schemas.microsoft.com/office/drawing/2014/main" val="305720427"/>
-                    </a:ext>
-                  </a:extLst>
-                </a:gridCol>
-                <a:gridCol w="2831782">
-                  <a:extLst>
-                    <a:ext uri="{9D8B030D-6E8A-4147-A177-3AD203B41FA5}">
-                      <a16:colId xmlns:a16="http://schemas.microsoft.com/office/drawing/2014/main" val="1009427091"/>
-                    </a:ext>
-                  </a:extLst>
-                </a:gridCol>
-                <a:gridCol w="2831782">
-                  <a:extLst>
-                    <a:ext uri="{9D8B030D-6E8A-4147-A177-3AD203B41FA5}">
-                      <a16:colId xmlns:a16="http://schemas.microsoft.com/office/drawing/2014/main" val="1440921494"/>
-                    </a:ext>
-                  </a:extLst>
-                </a:gridCol>
-              </a:tblGrid>
-              <a:tr h="1878568">
-                <a:tc>
-                  <a:txBody>
-                    <a:bodyPr/>
-                    <a:lstStyle/>
-                    <a:p>
-                      <a:r>
-                        <a:rPr lang="pl-PL" b="1" dirty="0" smtClean="0">
-                          <a:solidFill>
-                            <a:schemeClr val="tx1"/>
-                          </a:solidFill>
-                        </a:rPr>
-                        <a:t>1.</a:t>
-                      </a:r>
-                      <a:r>
-                        <a:rPr lang="pl-PL" b="1" dirty="0" smtClean="0">
-                          <a:solidFill>
-                            <a:schemeClr val="bg1"/>
-                          </a:solidFill>
-                        </a:rPr>
-                        <a:t> Testy jednostkowe</a:t>
-                      </a:r>
-                    </a:p>
-                    <a:p>
-                      <a:r>
-                        <a:rPr lang="pl-PL" dirty="0" smtClean="0">
-                          <a:solidFill>
-                            <a:schemeClr val="bg1"/>
-                          </a:solidFill>
-                        </a:rPr>
-                        <a:t>↔ </a:t>
-                      </a:r>
-                      <a:r>
-                        <a:rPr lang="pl-PL" b="1" dirty="0" smtClean="0">
-                          <a:solidFill>
-                            <a:schemeClr val="bg1"/>
-                          </a:solidFill>
-                        </a:rPr>
-                        <a:t>Implementacja</a:t>
-                      </a:r>
-                      <a:endParaRPr lang="pl-PL" dirty="0" smtClean="0">
-                        <a:solidFill>
-                          <a:schemeClr val="bg1"/>
-                        </a:solidFill>
-                      </a:endParaRPr>
-                    </a:p>
-                    <a:p>
-                      <a:r>
-                        <a:rPr lang="pl-PL" dirty="0" smtClean="0">
-                          <a:solidFill>
-                            <a:schemeClr val="bg1"/>
-                          </a:solidFill>
-                        </a:rPr>
-                        <a:t>funkcje</a:t>
-                      </a:r>
-                    </a:p>
-                    <a:p>
-                      <a:r>
-                        <a:rPr lang="pl-PL" dirty="0" smtClean="0">
-                          <a:solidFill>
-                            <a:schemeClr val="bg1"/>
-                          </a:solidFill>
-                        </a:rPr>
-                        <a:t>moduły</a:t>
-                      </a:r>
-                    </a:p>
-                    <a:p>
-                      <a:r>
-                        <a:rPr lang="pl-PL" dirty="0" smtClean="0">
-                          <a:solidFill>
-                            <a:schemeClr val="bg1"/>
-                          </a:solidFill>
-                        </a:rPr>
-                        <a:t>algorytmy</a:t>
-                      </a:r>
-                    </a:p>
-                    <a:p>
-                      <a:endParaRPr lang="en-US" dirty="0">
-                        <a:solidFill>
-                          <a:schemeClr val="bg1"/>
-                        </a:solidFill>
-                      </a:endParaRPr>
-                    </a:p>
-                  </a:txBody>
-                  <a:tcPr/>
-                </a:tc>
-                <a:tc>
-                  <a:txBody>
-                    <a:bodyPr/>
-                    <a:lstStyle/>
-                    <a:p>
-                      <a:r>
-                        <a:rPr lang="pl-PL" b="1" dirty="0" smtClean="0">
-                          <a:solidFill>
-                            <a:schemeClr val="tx1"/>
-                          </a:solidFill>
-                        </a:rPr>
-                        <a:t>2.</a:t>
-                      </a:r>
-                      <a:r>
-                        <a:rPr lang="pl-PL" b="1" dirty="0" smtClean="0">
-                          <a:solidFill>
-                            <a:schemeClr val="bg1"/>
-                          </a:solidFill>
-                        </a:rPr>
-                        <a:t> Testy integracyjne</a:t>
-                      </a:r>
-                    </a:p>
-                    <a:p>
-                      <a:r>
-                        <a:rPr lang="pl-PL" dirty="0" smtClean="0">
-                          <a:solidFill>
-                            <a:schemeClr val="bg1"/>
-                          </a:solidFill>
-                        </a:rPr>
-                        <a:t>↔ </a:t>
-                      </a:r>
-                      <a:r>
-                        <a:rPr lang="pl-PL" b="1" dirty="0" smtClean="0">
-                          <a:solidFill>
-                            <a:schemeClr val="bg1"/>
-                          </a:solidFill>
-                        </a:rPr>
-                        <a:t>Wymagania software</a:t>
-                      </a:r>
-                      <a:endParaRPr lang="pl-PL" dirty="0" smtClean="0">
-                        <a:solidFill>
-                          <a:schemeClr val="bg1"/>
-                        </a:solidFill>
-                      </a:endParaRPr>
-                    </a:p>
-                    <a:p>
-                      <a:r>
-                        <a:rPr lang="pl-PL" dirty="0" smtClean="0">
-                          <a:solidFill>
-                            <a:schemeClr val="bg1"/>
-                          </a:solidFill>
-                        </a:rPr>
-                        <a:t>współpraca modułów</a:t>
-                      </a:r>
-                    </a:p>
-                    <a:p>
-                      <a:r>
-                        <a:rPr lang="pl-PL" dirty="0" smtClean="0">
-                          <a:solidFill>
-                            <a:schemeClr val="bg1"/>
-                          </a:solidFill>
-                        </a:rPr>
-                        <a:t>komunikacja CAN/LIN</a:t>
-                      </a:r>
-                    </a:p>
-                    <a:p>
-                      <a:endParaRPr lang="en-US" dirty="0">
-                        <a:solidFill>
-                          <a:schemeClr val="bg1"/>
-                        </a:solidFill>
-                      </a:endParaRPr>
-                    </a:p>
-                  </a:txBody>
-                  <a:tcPr/>
-                </a:tc>
-                <a:tc>
-                  <a:txBody>
-                    <a:bodyPr/>
-                    <a:lstStyle/>
-                    <a:p>
-                      <a:r>
-                        <a:rPr lang="pl-PL" b="1" dirty="0" smtClean="0">
-                          <a:solidFill>
-                            <a:schemeClr val="tx1"/>
-                          </a:solidFill>
-                        </a:rPr>
-                        <a:t>3. </a:t>
-                      </a:r>
-                      <a:r>
-                        <a:rPr lang="pl-PL" b="1" dirty="0" smtClean="0"/>
-                        <a:t>Testy systemowe</a:t>
-                      </a:r>
-                    </a:p>
-                    <a:p>
-                      <a:r>
-                        <a:rPr lang="pl-PL" b="1" dirty="0" smtClean="0"/>
-                        <a:t>↔ Wymagania systemowe</a:t>
-                      </a:r>
-                    </a:p>
-                    <a:p>
-                      <a:r>
-                        <a:rPr lang="pl-PL" b="1" dirty="0" smtClean="0"/>
-                        <a:t>zachowanie całego ECU / auta</a:t>
-                      </a:r>
-                    </a:p>
-                    <a:p>
-                      <a:r>
-                        <a:rPr lang="pl-PL" b="1" dirty="0" smtClean="0"/>
-                        <a:t>scenariusze użytkownika</a:t>
-                      </a:r>
-                    </a:p>
-                    <a:p>
-                      <a:endParaRPr lang="en-US" dirty="0"/>
-                    </a:p>
-                  </a:txBody>
-                  <a:tcPr/>
-                </a:tc>
-                <a:tc>
-                  <a:txBody>
-                    <a:bodyPr/>
-                    <a:lstStyle/>
-                    <a:p>
-                      <a:r>
-                        <a:rPr lang="pl-PL" b="1" dirty="0" smtClean="0">
-                          <a:solidFill>
-                            <a:schemeClr val="tx1"/>
-                          </a:solidFill>
-                        </a:rPr>
-                        <a:t>4. </a:t>
-                      </a:r>
-                      <a:r>
-                        <a:rPr lang="pl-PL" b="1" dirty="0" smtClean="0"/>
-                        <a:t>Testy akceptacyjne</a:t>
-                      </a:r>
-                    </a:p>
-                    <a:p>
-                      <a:r>
-                        <a:rPr lang="pl-PL" dirty="0" smtClean="0"/>
-                        <a:t>↔ </a:t>
-                      </a:r>
-                      <a:r>
-                        <a:rPr lang="pl-PL" b="1" dirty="0" smtClean="0"/>
-                        <a:t>wymagania klienta / OEM</a:t>
-                      </a:r>
-                    </a:p>
-                    <a:p>
-                      <a:endParaRPr lang="pl-PL" dirty="0" smtClean="0"/>
-                    </a:p>
-                    <a:p>
-                      <a:r>
-                        <a:rPr lang="pl-PL" dirty="0" smtClean="0"/>
-                        <a:t>„czy to jest to, co zamówił</a:t>
-                      </a:r>
-                      <a:r>
-                        <a:rPr lang="pl-PL" baseline="0" dirty="0" smtClean="0"/>
-                        <a:t> klient</a:t>
-                      </a:r>
-                      <a:r>
-                        <a:rPr lang="pl-PL" dirty="0" smtClean="0"/>
-                        <a:t>?”</a:t>
-                      </a:r>
-                    </a:p>
-                    <a:p>
-                      <a:endParaRPr lang="en-US" dirty="0"/>
-                    </a:p>
-                  </a:txBody>
-                  <a:tcPr/>
-                </a:tc>
-                <a:extLst>
-                  <a:ext uri="{0D108BD9-81ED-4DB2-BD59-A6C34878D82A}">
-                    <a16:rowId xmlns:a16="http://schemas.microsoft.com/office/drawing/2014/main" val="2869360164"/>
-                  </a:ext>
-                </a:extLst>
-              </a:tr>
-            </a:tbl>
-          </a:graphicData>
-        </a:graphic>
-      </p:graphicFrame>
-    </p:spTree>
-    <p:extLst>
-      <p:ext uri="{BB962C8B-B14F-4D97-AF65-F5344CB8AC3E}">
-        <p14:creationId xmlns:p14="http://schemas.microsoft.com/office/powerpoint/2010/main" val="1034871160"/>
-      </p:ext>
-    </p:extLst>
-  </p:cSld>
-  <p:clrMapOvr>
-    <a:masterClrMapping/>
-  </p:clrMapOvr>
-  <p:timing>
-    <p:tnLst>
-      <p:par>
-        <p:cTn id="1" dur="indefinite" restart="never" nodeType="tmRoot"/>
-      </p:par>
-    </p:tnLst>
-  </p:timing>
-</p:sld>
-</file>
-
-<file path=ppt/slides/slide20.xml><?xml version="1.0" encoding="utf-8"?>
+<file path=ppt/slides/slide21.xml><?xml version="1.0" encoding="utf-8"?>
 <p:sld xmlns:a="http://schemas.openxmlformats.org/drawingml/2006/main" xmlns:r="http://schemas.openxmlformats.org/officeDocument/2006/relationships" xmlns:p="http://schemas.openxmlformats.org/presentationml/2006/main">
   <p:cSld>
     <p:spTree>
@@ -10812,7 +11600,7 @@
 </p:sld>
 </file>
 
-<file path=ppt/slides/slide21.xml><?xml version="1.0" encoding="utf-8"?>
+<file path=ppt/slides/slide22.xml><?xml version="1.0" encoding="utf-8"?>
 <p:sld xmlns:a="http://schemas.openxmlformats.org/drawingml/2006/main" xmlns:r="http://schemas.openxmlformats.org/officeDocument/2006/relationships" xmlns:p="http://schemas.openxmlformats.org/presentationml/2006/main">
   <p:cSld>
     <p:spTree>
@@ -11630,7 +12418,7 @@
 </p:sld>
 </file>
 
-<file path=ppt/slides/slide22.xml><?xml version="1.0" encoding="utf-8"?>
+<file path=ppt/slides/slide23.xml><?xml version="1.0" encoding="utf-8"?>
 <p:sld xmlns:a="http://schemas.openxmlformats.org/drawingml/2006/main" xmlns:r="http://schemas.openxmlformats.org/officeDocument/2006/relationships" xmlns:p="http://schemas.openxmlformats.org/presentationml/2006/main">
   <p:cSld>
     <p:bg>
@@ -11972,7 +12760,7 @@
 </p:sld>
 </file>
 
-<file path=ppt/slides/slide23.xml><?xml version="1.0" encoding="utf-8"?>
+<file path=ppt/slides/slide24.xml><?xml version="1.0" encoding="utf-8"?>
 <p:sld xmlns:a="http://schemas.openxmlformats.org/drawingml/2006/main" xmlns:r="http://schemas.openxmlformats.org/officeDocument/2006/relationships" xmlns:p="http://schemas.openxmlformats.org/presentationml/2006/main">
   <p:cSld>
     <p:bg>
@@ -12216,7 +13004,7 @@
 </p:sld>
 </file>
 
-<file path=ppt/slides/slide24.xml><?xml version="1.0" encoding="utf-8"?>
+<file path=ppt/slides/slide25.xml><?xml version="1.0" encoding="utf-8"?>
 <p:sld xmlns:a="http://schemas.openxmlformats.org/drawingml/2006/main" xmlns:r="http://schemas.openxmlformats.org/officeDocument/2006/relationships" xmlns:p="http://schemas.openxmlformats.org/presentationml/2006/main">
   <p:cSld>
     <p:bg>
@@ -12302,7 +13090,7 @@
 </p:sld>
 </file>
 
-<file path=ppt/slides/slide25.xml><?xml version="1.0" encoding="utf-8"?>
+<file path=ppt/slides/slide26.xml><?xml version="1.0" encoding="utf-8"?>
 <p:sld xmlns:a="http://schemas.openxmlformats.org/drawingml/2006/main" xmlns:r="http://schemas.openxmlformats.org/officeDocument/2006/relationships" xmlns:p="http://schemas.openxmlformats.org/presentationml/2006/main">
   <p:cSld>
     <p:spTree>
@@ -12492,7 +13280,7 @@
 </p:sld>
 </file>
 
-<file path=ppt/slides/slide26.xml><?xml version="1.0" encoding="utf-8"?>
+<file path=ppt/slides/slide27.xml><?xml version="1.0" encoding="utf-8"?>
 <p:sld xmlns:a="http://schemas.openxmlformats.org/drawingml/2006/main" xmlns:r="http://schemas.openxmlformats.org/officeDocument/2006/relationships" xmlns:p="http://schemas.openxmlformats.org/presentationml/2006/main">
   <p:cSld>
     <p:bg>
@@ -12691,7 +13479,7 @@
 </p:sld>
 </file>
 
-<file path=ppt/slides/slide27.xml><?xml version="1.0" encoding="utf-8"?>
+<file path=ppt/slides/slide28.xml><?xml version="1.0" encoding="utf-8"?>
 <p:sld xmlns:a="http://schemas.openxmlformats.org/drawingml/2006/main" xmlns:r="http://schemas.openxmlformats.org/officeDocument/2006/relationships" xmlns:p="http://schemas.openxmlformats.org/presentationml/2006/main">
   <p:cSld>
     <p:bg>
@@ -15335,6 +16123,914 @@
 <file path=ppt/slides/slide3.xml><?xml version="1.0" encoding="utf-8"?>
 <p:sld xmlns:a="http://schemas.openxmlformats.org/drawingml/2006/main" xmlns:r="http://schemas.openxmlformats.org/officeDocument/2006/relationships" xmlns:p="http://schemas.openxmlformats.org/presentationml/2006/main">
   <p:cSld>
+    <p:spTree>
+      <p:nvGrpSpPr>
+        <p:cNvPr id="1" name=""/>
+        <p:cNvGrpSpPr/>
+        <p:nvPr/>
+      </p:nvGrpSpPr>
+      <p:grpSpPr>
+        <a:xfrm>
+          <a:off x="0" y="0"/>
+          <a:ext cx="0" cy="0"/>
+          <a:chOff x="0" y="0"/>
+          <a:chExt cx="0" cy="0"/>
+        </a:xfrm>
+      </p:grpSpPr>
+      <p:graphicFrame>
+        <p:nvGraphicFramePr>
+          <p:cNvPr id="5" name="Tabela 4"/>
+          <p:cNvGraphicFramePr>
+            <a:graphicFrameLocks noGrp="1"/>
+          </p:cNvGraphicFramePr>
+          <p:nvPr>
+            <p:extLst>
+              <p:ext uri="{D42A27DB-BD31-4B8C-83A1-F6EECF244321}">
+                <p14:modId xmlns:p14="http://schemas.microsoft.com/office/powerpoint/2010/main" val="1056004053"/>
+              </p:ext>
+            </p:extLst>
+          </p:nvPr>
+        </p:nvGraphicFramePr>
+        <p:xfrm>
+          <a:off x="433781" y="588789"/>
+          <a:ext cx="11327130" cy="3523786"/>
+        </p:xfrm>
+        <a:graphic>
+          <a:graphicData uri="http://schemas.openxmlformats.org/drawingml/2006/table">
+            <a:tbl>
+              <a:tblPr firstRow="1" bandRow="1">
+                <a:tableStyleId>{5C22544A-7EE6-4342-B048-85BDC9FD1C3A}</a:tableStyleId>
+              </a:tblPr>
+              <a:tblGrid>
+                <a:gridCol w="5663565">
+                  <a:extLst>
+                    <a:ext uri="{9D8B030D-6E8A-4147-A177-3AD203B41FA5}">
+                      <a16:colId xmlns:a16="http://schemas.microsoft.com/office/drawing/2014/main" val="4260624017"/>
+                    </a:ext>
+                  </a:extLst>
+                </a:gridCol>
+                <a:gridCol w="5663565">
+                  <a:extLst>
+                    <a:ext uri="{9D8B030D-6E8A-4147-A177-3AD203B41FA5}">
+                      <a16:colId xmlns:a16="http://schemas.microsoft.com/office/drawing/2014/main" val="3303431953"/>
+                    </a:ext>
+                  </a:extLst>
+                </a:gridCol>
+              </a:tblGrid>
+              <a:tr h="1632974">
+                <a:tc>
+                  <a:txBody>
+                    <a:bodyPr/>
+                    <a:lstStyle/>
+                    <a:p>
+                      <a:r>
+                        <a:rPr lang="pl-PL" b="1" dirty="0" smtClean="0">
+                          <a:solidFill>
+                            <a:schemeClr val="tx1"/>
+                          </a:solidFill>
+                        </a:rPr>
+                        <a:t>1. </a:t>
+                      </a:r>
+                      <a:r>
+                        <a:rPr lang="pl-PL" b="1" dirty="0" smtClean="0">
+                          <a:solidFill>
+                            <a:srgbClr val="00B050"/>
+                          </a:solidFill>
+                        </a:rPr>
+                        <a:t>Wymagania systemowe</a:t>
+                      </a:r>
+                    </a:p>
+                    <a:p>
+                      <a:r>
+                        <a:rPr lang="pl-PL" b="1" dirty="0" smtClean="0">
+                          <a:solidFill>
+                            <a:srgbClr val="00B050"/>
+                          </a:solidFill>
+                        </a:rPr>
+                        <a:t>Co ma robić cały system</a:t>
+                      </a:r>
+                    </a:p>
+                    <a:p>
+                      <a:r>
+                        <a:rPr lang="pl-PL" b="1" dirty="0" smtClean="0">
+                          <a:solidFill>
+                            <a:srgbClr val="00B050"/>
+                          </a:solidFill>
+                        </a:rPr>
+                        <a:t>Język „biznesowo-funkcjonalny”</a:t>
+                      </a:r>
+                    </a:p>
+                    <a:p>
+                      <a:endParaRPr lang="pl-PL" b="1" dirty="0" smtClean="0">
+                        <a:solidFill>
+                          <a:srgbClr val="00B050"/>
+                        </a:solidFill>
+                      </a:endParaRPr>
+                    </a:p>
+                    <a:p>
+                      <a:r>
+                        <a:rPr lang="pl-PL" b="1" dirty="0" smtClean="0">
+                          <a:solidFill>
+                            <a:srgbClr val="00B050"/>
+                          </a:solidFill>
+                        </a:rPr>
+                        <a:t>np. System musi wykrywać poślizg i stabilizować tor jazdy</a:t>
+                      </a:r>
+                    </a:p>
+                  </a:txBody>
+                  <a:tcPr>
+                    <a:gradFill>
+                      <a:gsLst>
+                        <a:gs pos="0">
+                          <a:schemeClr val="accent1">
+                            <a:lumMod val="5000"/>
+                            <a:lumOff val="95000"/>
+                          </a:schemeClr>
+                        </a:gs>
+                        <a:gs pos="74000">
+                          <a:schemeClr val="accent1">
+                            <a:lumMod val="45000"/>
+                            <a:lumOff val="55000"/>
+                          </a:schemeClr>
+                        </a:gs>
+                        <a:gs pos="83000">
+                          <a:schemeClr val="accent1">
+                            <a:lumMod val="45000"/>
+                            <a:lumOff val="55000"/>
+                          </a:schemeClr>
+                        </a:gs>
+                        <a:gs pos="100000">
+                          <a:schemeClr val="accent1">
+                            <a:lumMod val="30000"/>
+                            <a:lumOff val="70000"/>
+                          </a:schemeClr>
+                        </a:gs>
+                      </a:gsLst>
+                      <a:lin ang="5400000" scaled="1"/>
+                    </a:gradFill>
+                  </a:tcPr>
+                </a:tc>
+                <a:tc>
+                  <a:txBody>
+                    <a:bodyPr/>
+                    <a:lstStyle/>
+                    <a:p>
+                      <a:r>
+                        <a:rPr lang="pl-PL" b="1" dirty="0" smtClean="0">
+                          <a:solidFill>
+                            <a:schemeClr val="tx1"/>
+                          </a:solidFill>
+                        </a:rPr>
+                        <a:t>2. </a:t>
+                      </a:r>
+                      <a:r>
+                        <a:rPr lang="pl-PL" b="1" dirty="0" smtClean="0">
+                          <a:solidFill>
+                            <a:srgbClr val="00B050"/>
+                          </a:solidFill>
+                        </a:rPr>
+                        <a:t>Wymagania architektury</a:t>
+                      </a:r>
+                    </a:p>
+                    <a:p>
+                      <a:r>
+                        <a:rPr lang="pl-PL" b="1" dirty="0" smtClean="0">
+                          <a:solidFill>
+                            <a:srgbClr val="00B050"/>
+                          </a:solidFill>
+                        </a:rPr>
+                        <a:t>Podział na ECU</a:t>
+                      </a:r>
+                    </a:p>
+                    <a:p>
+                      <a:r>
+                        <a:rPr lang="pl-PL" b="1" dirty="0" smtClean="0">
+                          <a:solidFill>
+                            <a:srgbClr val="00B050"/>
+                          </a:solidFill>
+                        </a:rPr>
+                        <a:t>Magistrale (CAN / LIN / Ethernet)</a:t>
+                      </a:r>
+                    </a:p>
+                    <a:p>
+                      <a:endParaRPr lang="pl-PL" b="1" dirty="0" smtClean="0">
+                        <a:solidFill>
+                          <a:srgbClr val="00B050"/>
+                        </a:solidFill>
+                      </a:endParaRPr>
+                    </a:p>
+                    <a:p>
+                      <a:r>
+                        <a:rPr lang="pl-PL" b="1" dirty="0" smtClean="0">
+                          <a:solidFill>
+                            <a:srgbClr val="00B050"/>
+                          </a:solidFill>
+                        </a:rPr>
+                        <a:t>np.</a:t>
+                      </a:r>
+                      <a:r>
+                        <a:rPr lang="pl-PL" b="1" baseline="0" dirty="0" smtClean="0">
+                          <a:solidFill>
+                            <a:srgbClr val="00B050"/>
+                          </a:solidFill>
+                        </a:rPr>
+                        <a:t> </a:t>
+                      </a:r>
+                      <a:r>
+                        <a:rPr lang="pl-PL" b="1" dirty="0" smtClean="0">
+                          <a:solidFill>
+                            <a:srgbClr val="00B050"/>
+                          </a:solidFill>
+                        </a:rPr>
+                        <a:t>ESP ECU komunikuje się z Engine ECU po CAN.</a:t>
+                      </a:r>
+                      <a:endParaRPr lang="en-US" b="1" dirty="0" smtClean="0">
+                        <a:solidFill>
+                          <a:srgbClr val="00B050"/>
+                        </a:solidFill>
+                      </a:endParaRPr>
+                    </a:p>
+                  </a:txBody>
+                  <a:tcPr>
+                    <a:gradFill>
+                      <a:gsLst>
+                        <a:gs pos="0">
+                          <a:schemeClr val="accent1">
+                            <a:lumMod val="5000"/>
+                            <a:lumOff val="95000"/>
+                          </a:schemeClr>
+                        </a:gs>
+                        <a:gs pos="74000">
+                          <a:schemeClr val="accent1">
+                            <a:lumMod val="45000"/>
+                            <a:lumOff val="55000"/>
+                          </a:schemeClr>
+                        </a:gs>
+                        <a:gs pos="83000">
+                          <a:schemeClr val="accent1">
+                            <a:lumMod val="45000"/>
+                            <a:lumOff val="55000"/>
+                          </a:schemeClr>
+                        </a:gs>
+                        <a:gs pos="100000">
+                          <a:schemeClr val="accent1">
+                            <a:lumMod val="30000"/>
+                            <a:lumOff val="70000"/>
+                          </a:schemeClr>
+                        </a:gs>
+                      </a:gsLst>
+                      <a:lin ang="5400000" scaled="1"/>
+                    </a:gradFill>
+                  </a:tcPr>
+                </a:tc>
+                <a:extLst>
+                  <a:ext uri="{0D108BD9-81ED-4DB2-BD59-A6C34878D82A}">
+                    <a16:rowId xmlns:a16="http://schemas.microsoft.com/office/drawing/2014/main" val="790049715"/>
+                  </a:ext>
+                </a:extLst>
+              </a:tr>
+              <a:tr h="1890812">
+                <a:tc>
+                  <a:txBody>
+                    <a:bodyPr/>
+                    <a:lstStyle/>
+                    <a:p>
+                      <a:r>
+                        <a:rPr lang="pl-PL" b="1" dirty="0" smtClean="0">
+                          <a:solidFill>
+                            <a:schemeClr val="tx1"/>
+                          </a:solidFill>
+                        </a:rPr>
+                        <a:t>3. </a:t>
+                      </a:r>
+                      <a:r>
+                        <a:rPr lang="pl-PL" b="1" dirty="0" smtClean="0">
+                          <a:solidFill>
+                            <a:srgbClr val="00B050"/>
+                          </a:solidFill>
+                        </a:rPr>
+                        <a:t>Wymagania software</a:t>
+                      </a:r>
+                    </a:p>
+                    <a:p>
+                      <a:r>
+                        <a:rPr lang="pl-PL" b="1" dirty="0" smtClean="0">
+                          <a:solidFill>
+                            <a:srgbClr val="00B050"/>
+                          </a:solidFill>
+                        </a:rPr>
+                        <a:t>Logika, algorytmy</a:t>
+                      </a:r>
+                    </a:p>
+                    <a:p>
+                      <a:r>
+                        <a:rPr lang="pl-PL" b="1" dirty="0" smtClean="0">
+                          <a:solidFill>
+                            <a:srgbClr val="00B050"/>
+                          </a:solidFill>
+                        </a:rPr>
+                        <a:t>Stany, reakcje, timingi</a:t>
+                      </a:r>
+                    </a:p>
+                    <a:p>
+                      <a:endParaRPr lang="pl-PL" b="1" dirty="0" smtClean="0">
+                        <a:solidFill>
+                          <a:srgbClr val="00B050"/>
+                        </a:solidFill>
+                      </a:endParaRPr>
+                    </a:p>
+                    <a:p>
+                      <a:r>
+                        <a:rPr lang="pl-PL" b="1" dirty="0" smtClean="0">
+                          <a:solidFill>
+                            <a:srgbClr val="00B050"/>
+                          </a:solidFill>
+                        </a:rPr>
+                        <a:t>np. Gdy poślizg &gt; X, moment silnika ma zostać ograniczony w czasie &lt; 10 ms.</a:t>
+                      </a:r>
+                      <a:endParaRPr lang="en-US" b="1" dirty="0" smtClean="0">
+                        <a:solidFill>
+                          <a:srgbClr val="00B050"/>
+                        </a:solidFill>
+                      </a:endParaRPr>
+                    </a:p>
+                  </a:txBody>
+                  <a:tcPr>
+                    <a:gradFill>
+                      <a:gsLst>
+                        <a:gs pos="0">
+                          <a:schemeClr val="accent1">
+                            <a:lumMod val="5000"/>
+                            <a:lumOff val="95000"/>
+                          </a:schemeClr>
+                        </a:gs>
+                        <a:gs pos="74000">
+                          <a:schemeClr val="accent1">
+                            <a:lumMod val="45000"/>
+                            <a:lumOff val="55000"/>
+                          </a:schemeClr>
+                        </a:gs>
+                        <a:gs pos="83000">
+                          <a:schemeClr val="accent1">
+                            <a:lumMod val="45000"/>
+                            <a:lumOff val="55000"/>
+                          </a:schemeClr>
+                        </a:gs>
+                        <a:gs pos="100000">
+                          <a:schemeClr val="accent1">
+                            <a:lumMod val="30000"/>
+                            <a:lumOff val="70000"/>
+                          </a:schemeClr>
+                        </a:gs>
+                      </a:gsLst>
+                      <a:lin ang="5400000" scaled="1"/>
+                    </a:gradFill>
+                  </a:tcPr>
+                </a:tc>
+                <a:tc>
+                  <a:txBody>
+                    <a:bodyPr/>
+                    <a:lstStyle/>
+                    <a:p>
+                      <a:r>
+                        <a:rPr lang="pl-PL" b="1" dirty="0" smtClean="0">
+                          <a:solidFill>
+                            <a:schemeClr val="tx1"/>
+                          </a:solidFill>
+                        </a:rPr>
+                        <a:t>4. </a:t>
+                      </a:r>
+                      <a:r>
+                        <a:rPr lang="pl-PL" b="1" dirty="0" smtClean="0">
+                          <a:solidFill>
+                            <a:srgbClr val="00B050"/>
+                          </a:solidFill>
+                        </a:rPr>
+                        <a:t>Implementacja</a:t>
+                      </a:r>
+                    </a:p>
+                    <a:p>
+                      <a:r>
+                        <a:rPr lang="pl-PL" b="1" dirty="0" smtClean="0">
+                          <a:solidFill>
+                            <a:srgbClr val="00B050"/>
+                          </a:solidFill>
+                        </a:rPr>
+                        <a:t>Kod</a:t>
+                      </a:r>
+                    </a:p>
+                    <a:p>
+                      <a:r>
+                        <a:rPr lang="pl-PL" b="1" dirty="0" smtClean="0">
+                          <a:solidFill>
+                            <a:srgbClr val="00B050"/>
+                          </a:solidFill>
+                        </a:rPr>
+                        <a:t>konfiguracja</a:t>
+                      </a:r>
+                    </a:p>
+                    <a:p>
+                      <a:r>
+                        <a:rPr lang="pl-PL" b="1" dirty="0" smtClean="0">
+                          <a:solidFill>
+                            <a:srgbClr val="00B050"/>
+                          </a:solidFill>
+                        </a:rPr>
+                        <a:t>kalibracja</a:t>
+                      </a:r>
+                    </a:p>
+                    <a:p>
+                      <a:endParaRPr lang="en-US" b="1" dirty="0">
+                        <a:solidFill>
+                          <a:schemeClr val="tx1"/>
+                        </a:solidFill>
+                      </a:endParaRPr>
+                    </a:p>
+                  </a:txBody>
+                  <a:tcPr>
+                    <a:gradFill>
+                      <a:gsLst>
+                        <a:gs pos="0">
+                          <a:schemeClr val="accent1">
+                            <a:lumMod val="5000"/>
+                            <a:lumOff val="95000"/>
+                          </a:schemeClr>
+                        </a:gs>
+                        <a:gs pos="74000">
+                          <a:schemeClr val="accent1">
+                            <a:lumMod val="45000"/>
+                            <a:lumOff val="55000"/>
+                          </a:schemeClr>
+                        </a:gs>
+                        <a:gs pos="83000">
+                          <a:schemeClr val="accent1">
+                            <a:lumMod val="45000"/>
+                            <a:lumOff val="55000"/>
+                          </a:schemeClr>
+                        </a:gs>
+                        <a:gs pos="100000">
+                          <a:schemeClr val="accent1">
+                            <a:lumMod val="30000"/>
+                            <a:lumOff val="70000"/>
+                          </a:schemeClr>
+                        </a:gs>
+                      </a:gsLst>
+                      <a:lin ang="5400000" scaled="1"/>
+                    </a:gradFill>
+                  </a:tcPr>
+                </a:tc>
+                <a:extLst>
+                  <a:ext uri="{0D108BD9-81ED-4DB2-BD59-A6C34878D82A}">
+                    <a16:rowId xmlns:a16="http://schemas.microsoft.com/office/drawing/2014/main" val="3332752919"/>
+                  </a:ext>
+                </a:extLst>
+              </a:tr>
+            </a:tbl>
+          </a:graphicData>
+        </a:graphic>
+      </p:graphicFrame>
+      <p:sp>
+        <p:nvSpPr>
+          <p:cNvPr id="6" name="Prostokąt 5"/>
+          <p:cNvSpPr/>
+          <p:nvPr/>
+        </p:nvSpPr>
+        <p:spPr>
+          <a:xfrm>
+            <a:off x="460130" y="161024"/>
+            <a:ext cx="3699154" cy="369332"/>
+          </a:xfrm>
+          <a:prstGeom prst="rect">
+            <a:avLst/>
+          </a:prstGeom>
+          <a:gradFill>
+            <a:gsLst>
+              <a:gs pos="0">
+                <a:schemeClr val="accent1">
+                  <a:lumMod val="5000"/>
+                  <a:lumOff val="95000"/>
+                </a:schemeClr>
+              </a:gs>
+              <a:gs pos="74000">
+                <a:schemeClr val="accent1">
+                  <a:lumMod val="45000"/>
+                  <a:lumOff val="55000"/>
+                </a:schemeClr>
+              </a:gs>
+              <a:gs pos="83000">
+                <a:schemeClr val="accent1">
+                  <a:lumMod val="45000"/>
+                  <a:lumOff val="55000"/>
+                </a:schemeClr>
+              </a:gs>
+              <a:gs pos="100000">
+                <a:schemeClr val="accent1">
+                  <a:lumMod val="30000"/>
+                  <a:lumOff val="70000"/>
+                </a:schemeClr>
+              </a:gs>
+            </a:gsLst>
+            <a:lin ang="5400000" scaled="1"/>
+          </a:gradFill>
+        </p:spPr>
+        <p:txBody>
+          <a:bodyPr wrap="none">
+            <a:spAutoFit/>
+          </a:bodyPr>
+          <a:lstStyle/>
+          <a:p>
+            <a:r>
+              <a:rPr lang="pl-PL" b="1" dirty="0"/>
+              <a:t>Lewa strona V – wymagania i projekt</a:t>
+            </a:r>
+            <a:endParaRPr lang="en-US" b="1" dirty="0"/>
+          </a:p>
+        </p:txBody>
+      </p:sp>
+      <p:sp>
+        <p:nvSpPr>
+          <p:cNvPr id="7" name="Prostokąt 6"/>
+          <p:cNvSpPr/>
+          <p:nvPr/>
+        </p:nvSpPr>
+        <p:spPr>
+          <a:xfrm>
+            <a:off x="9403394" y="4197756"/>
+            <a:ext cx="2322174" cy="369332"/>
+          </a:xfrm>
+          <a:prstGeom prst="rect">
+            <a:avLst/>
+          </a:prstGeom>
+          <a:solidFill>
+            <a:schemeClr val="accent6"/>
+          </a:solidFill>
+        </p:spPr>
+        <p:txBody>
+          <a:bodyPr wrap="none">
+            <a:spAutoFit/>
+          </a:bodyPr>
+          <a:lstStyle/>
+          <a:p>
+            <a:r>
+              <a:rPr lang="en-US" b="1" dirty="0" err="1"/>
+              <a:t>Prawa</a:t>
+            </a:r>
+            <a:r>
+              <a:rPr lang="en-US" b="1" dirty="0"/>
+              <a:t> </a:t>
+            </a:r>
+            <a:r>
+              <a:rPr lang="en-US" b="1" dirty="0" err="1"/>
+              <a:t>strona</a:t>
+            </a:r>
+            <a:r>
+              <a:rPr lang="en-US" b="1" dirty="0"/>
+              <a:t> V – testy</a:t>
+            </a:r>
+          </a:p>
+        </p:txBody>
+      </p:sp>
+      <p:graphicFrame>
+        <p:nvGraphicFramePr>
+          <p:cNvPr id="8" name="Tabela 7"/>
+          <p:cNvGraphicFramePr>
+            <a:graphicFrameLocks noGrp="1"/>
+          </p:cNvGraphicFramePr>
+          <p:nvPr>
+            <p:extLst>
+              <p:ext uri="{D42A27DB-BD31-4B8C-83A1-F6EECF244321}">
+                <p14:modId xmlns:p14="http://schemas.microsoft.com/office/powerpoint/2010/main" val="2171211024"/>
+              </p:ext>
+            </p:extLst>
+          </p:nvPr>
+        </p:nvGraphicFramePr>
+        <p:xfrm>
+          <a:off x="422631" y="4644888"/>
+          <a:ext cx="11327128" cy="2011680"/>
+        </p:xfrm>
+        <a:graphic>
+          <a:graphicData uri="http://schemas.openxmlformats.org/drawingml/2006/table">
+            <a:tbl>
+              <a:tblPr firstRow="1" bandRow="1">
+                <a:tableStyleId>{93296810-A885-4BE3-A3E7-6D5BEEA58F35}</a:tableStyleId>
+              </a:tblPr>
+              <a:tblGrid>
+                <a:gridCol w="2831782">
+                  <a:extLst>
+                    <a:ext uri="{9D8B030D-6E8A-4147-A177-3AD203B41FA5}">
+                      <a16:colId xmlns:a16="http://schemas.microsoft.com/office/drawing/2014/main" val="3902080005"/>
+                    </a:ext>
+                  </a:extLst>
+                </a:gridCol>
+                <a:gridCol w="2831782">
+                  <a:extLst>
+                    <a:ext uri="{9D8B030D-6E8A-4147-A177-3AD203B41FA5}">
+                      <a16:colId xmlns:a16="http://schemas.microsoft.com/office/drawing/2014/main" val="305720427"/>
+                    </a:ext>
+                  </a:extLst>
+                </a:gridCol>
+                <a:gridCol w="2831782">
+                  <a:extLst>
+                    <a:ext uri="{9D8B030D-6E8A-4147-A177-3AD203B41FA5}">
+                      <a16:colId xmlns:a16="http://schemas.microsoft.com/office/drawing/2014/main" val="1009427091"/>
+                    </a:ext>
+                  </a:extLst>
+                </a:gridCol>
+                <a:gridCol w="2831782">
+                  <a:extLst>
+                    <a:ext uri="{9D8B030D-6E8A-4147-A177-3AD203B41FA5}">
+                      <a16:colId xmlns:a16="http://schemas.microsoft.com/office/drawing/2014/main" val="1440921494"/>
+                    </a:ext>
+                  </a:extLst>
+                </a:gridCol>
+              </a:tblGrid>
+              <a:tr h="1878568">
+                <a:tc>
+                  <a:txBody>
+                    <a:bodyPr/>
+                    <a:lstStyle/>
+                    <a:p>
+                      <a:r>
+                        <a:rPr lang="pl-PL" b="1" dirty="0" smtClean="0">
+                          <a:solidFill>
+                            <a:schemeClr val="tx1"/>
+                          </a:solidFill>
+                        </a:rPr>
+                        <a:t>1.</a:t>
+                      </a:r>
+                      <a:r>
+                        <a:rPr lang="pl-PL" b="1" dirty="0" smtClean="0">
+                          <a:solidFill>
+                            <a:schemeClr val="bg1"/>
+                          </a:solidFill>
+                        </a:rPr>
+                        <a:t> Testy jednostkowe</a:t>
+                      </a:r>
+                    </a:p>
+                    <a:p>
+                      <a:r>
+                        <a:rPr lang="pl-PL" dirty="0" smtClean="0">
+                          <a:solidFill>
+                            <a:schemeClr val="bg1"/>
+                          </a:solidFill>
+                        </a:rPr>
+                        <a:t>↔ </a:t>
+                      </a:r>
+                      <a:r>
+                        <a:rPr lang="pl-PL" b="1" dirty="0" smtClean="0">
+                          <a:solidFill>
+                            <a:schemeClr val="bg1"/>
+                          </a:solidFill>
+                        </a:rPr>
+                        <a:t>Implementacja</a:t>
+                      </a:r>
+                      <a:endParaRPr lang="pl-PL" dirty="0" smtClean="0">
+                        <a:solidFill>
+                          <a:schemeClr val="bg1"/>
+                        </a:solidFill>
+                      </a:endParaRPr>
+                    </a:p>
+                    <a:p>
+                      <a:r>
+                        <a:rPr lang="pl-PL" dirty="0" smtClean="0">
+                          <a:solidFill>
+                            <a:schemeClr val="bg1"/>
+                          </a:solidFill>
+                        </a:rPr>
+                        <a:t>funkcje</a:t>
+                      </a:r>
+                    </a:p>
+                    <a:p>
+                      <a:r>
+                        <a:rPr lang="pl-PL" dirty="0" smtClean="0">
+                          <a:solidFill>
+                            <a:schemeClr val="bg1"/>
+                          </a:solidFill>
+                        </a:rPr>
+                        <a:t>moduły</a:t>
+                      </a:r>
+                    </a:p>
+                    <a:p>
+                      <a:r>
+                        <a:rPr lang="pl-PL" dirty="0" smtClean="0">
+                          <a:solidFill>
+                            <a:schemeClr val="bg1"/>
+                          </a:solidFill>
+                        </a:rPr>
+                        <a:t>algorytmy</a:t>
+                      </a:r>
+                    </a:p>
+                    <a:p>
+                      <a:endParaRPr lang="en-US" dirty="0">
+                        <a:solidFill>
+                          <a:schemeClr val="bg1"/>
+                        </a:solidFill>
+                      </a:endParaRPr>
+                    </a:p>
+                  </a:txBody>
+                  <a:tcPr/>
+                </a:tc>
+                <a:tc>
+                  <a:txBody>
+                    <a:bodyPr/>
+                    <a:lstStyle/>
+                    <a:p>
+                      <a:r>
+                        <a:rPr lang="pl-PL" b="1" dirty="0" smtClean="0">
+                          <a:solidFill>
+                            <a:schemeClr val="tx1"/>
+                          </a:solidFill>
+                        </a:rPr>
+                        <a:t>2.</a:t>
+                      </a:r>
+                      <a:r>
+                        <a:rPr lang="pl-PL" b="1" dirty="0" smtClean="0">
+                          <a:solidFill>
+                            <a:schemeClr val="bg1"/>
+                          </a:solidFill>
+                        </a:rPr>
+                        <a:t> Testy integracyjne</a:t>
+                      </a:r>
+                    </a:p>
+                    <a:p>
+                      <a:r>
+                        <a:rPr lang="pl-PL" dirty="0" smtClean="0">
+                          <a:solidFill>
+                            <a:schemeClr val="bg1"/>
+                          </a:solidFill>
+                        </a:rPr>
+                        <a:t>↔ </a:t>
+                      </a:r>
+                      <a:r>
+                        <a:rPr lang="pl-PL" b="1" dirty="0" smtClean="0">
+                          <a:solidFill>
+                            <a:schemeClr val="bg1"/>
+                          </a:solidFill>
+                        </a:rPr>
+                        <a:t>Wymagania software</a:t>
+                      </a:r>
+                      <a:endParaRPr lang="pl-PL" dirty="0" smtClean="0">
+                        <a:solidFill>
+                          <a:schemeClr val="bg1"/>
+                        </a:solidFill>
+                      </a:endParaRPr>
+                    </a:p>
+                    <a:p>
+                      <a:r>
+                        <a:rPr lang="pl-PL" dirty="0" smtClean="0">
+                          <a:solidFill>
+                            <a:schemeClr val="bg1"/>
+                          </a:solidFill>
+                        </a:rPr>
+                        <a:t>współpraca modułów</a:t>
+                      </a:r>
+                    </a:p>
+                    <a:p>
+                      <a:r>
+                        <a:rPr lang="pl-PL" dirty="0" smtClean="0">
+                          <a:solidFill>
+                            <a:schemeClr val="bg1"/>
+                          </a:solidFill>
+                        </a:rPr>
+                        <a:t>komunikacja CAN/LIN</a:t>
+                      </a:r>
+                    </a:p>
+                    <a:p>
+                      <a:endParaRPr lang="en-US" dirty="0">
+                        <a:solidFill>
+                          <a:schemeClr val="bg1"/>
+                        </a:solidFill>
+                      </a:endParaRPr>
+                    </a:p>
+                  </a:txBody>
+                  <a:tcPr/>
+                </a:tc>
+                <a:tc>
+                  <a:txBody>
+                    <a:bodyPr/>
+                    <a:lstStyle/>
+                    <a:p>
+                      <a:r>
+                        <a:rPr lang="pl-PL" b="1" dirty="0" smtClean="0">
+                          <a:solidFill>
+                            <a:schemeClr val="tx1"/>
+                          </a:solidFill>
+                        </a:rPr>
+                        <a:t>3. </a:t>
+                      </a:r>
+                      <a:r>
+                        <a:rPr lang="pl-PL" b="1" dirty="0" smtClean="0"/>
+                        <a:t>Testy systemowe</a:t>
+                      </a:r>
+                    </a:p>
+                    <a:p>
+                      <a:r>
+                        <a:rPr lang="pl-PL" b="1" dirty="0" smtClean="0"/>
+                        <a:t>↔ Wymagania systemowe</a:t>
+                      </a:r>
+                    </a:p>
+                    <a:p>
+                      <a:r>
+                        <a:rPr lang="pl-PL" b="1" dirty="0" smtClean="0"/>
+                        <a:t>zachowanie całego ECU / auta</a:t>
+                      </a:r>
+                    </a:p>
+                    <a:p>
+                      <a:r>
+                        <a:rPr lang="pl-PL" b="1" dirty="0" smtClean="0"/>
+                        <a:t>scenariusze użytkownika</a:t>
+                      </a:r>
+                    </a:p>
+                    <a:p>
+                      <a:endParaRPr lang="en-US" dirty="0"/>
+                    </a:p>
+                  </a:txBody>
+                  <a:tcPr/>
+                </a:tc>
+                <a:tc>
+                  <a:txBody>
+                    <a:bodyPr/>
+                    <a:lstStyle/>
+                    <a:p>
+                      <a:r>
+                        <a:rPr lang="pl-PL" b="1" dirty="0" smtClean="0">
+                          <a:solidFill>
+                            <a:schemeClr val="tx1"/>
+                          </a:solidFill>
+                        </a:rPr>
+                        <a:t>4. </a:t>
+                      </a:r>
+                      <a:r>
+                        <a:rPr lang="pl-PL" b="1" dirty="0" smtClean="0"/>
+                        <a:t>Testy akceptacyjne</a:t>
+                      </a:r>
+                    </a:p>
+                    <a:p>
+                      <a:r>
+                        <a:rPr lang="pl-PL" dirty="0" smtClean="0"/>
+                        <a:t>↔ </a:t>
+                      </a:r>
+                      <a:r>
+                        <a:rPr lang="pl-PL" b="1" dirty="0" smtClean="0"/>
+                        <a:t>wymagania klienta / OEM</a:t>
+                      </a:r>
+                    </a:p>
+                    <a:p>
+                      <a:endParaRPr lang="pl-PL" dirty="0" smtClean="0"/>
+                    </a:p>
+                    <a:p>
+                      <a:r>
+                        <a:rPr lang="pl-PL" dirty="0" smtClean="0"/>
+                        <a:t>„czy to jest to, co zamówił</a:t>
+                      </a:r>
+                      <a:r>
+                        <a:rPr lang="pl-PL" baseline="0" dirty="0" smtClean="0"/>
+                        <a:t> klient</a:t>
+                      </a:r>
+                      <a:r>
+                        <a:rPr lang="pl-PL" dirty="0" smtClean="0"/>
+                        <a:t>?”</a:t>
+                      </a:r>
+                    </a:p>
+                    <a:p>
+                      <a:endParaRPr lang="en-US" dirty="0"/>
+                    </a:p>
+                  </a:txBody>
+                  <a:tcPr/>
+                </a:tc>
+                <a:extLst>
+                  <a:ext uri="{0D108BD9-81ED-4DB2-BD59-A6C34878D82A}">
+                    <a16:rowId xmlns:a16="http://schemas.microsoft.com/office/drawing/2014/main" val="2869360164"/>
+                  </a:ext>
+                </a:extLst>
+              </a:tr>
+            </a:tbl>
+          </a:graphicData>
+        </a:graphic>
+      </p:graphicFrame>
+    </p:spTree>
+    <p:extLst>
+      <p:ext uri="{BB962C8B-B14F-4D97-AF65-F5344CB8AC3E}">
+        <p14:creationId xmlns:p14="http://schemas.microsoft.com/office/powerpoint/2010/main" val="1034871160"/>
+      </p:ext>
+    </p:extLst>
+  </p:cSld>
+  <p:clrMapOvr>
+    <a:masterClrMapping/>
+  </p:clrMapOvr>
+  <p:timing>
+    <p:tnLst>
+      <p:par>
+        <p:cTn id="1" dur="indefinite" restart="never" nodeType="tmRoot"/>
+      </p:par>
+    </p:tnLst>
+  </p:timing>
+</p:sld>
+</file>
+
+<file path=ppt/slides/slide4.xml><?xml version="1.0" encoding="utf-8"?>
+<p:sld xmlns:a="http://schemas.openxmlformats.org/drawingml/2006/main" xmlns:r="http://schemas.openxmlformats.org/officeDocument/2006/relationships" xmlns:p="http://schemas.openxmlformats.org/presentationml/2006/main">
+  <p:cSld>
     <p:bg>
       <p:bgPr>
         <a:gradFill flip="none" rotWithShape="1">
@@ -16162,7 +17858,7 @@
 </p:sld>
 </file>
 
-<file path=ppt/slides/slide4.xml><?xml version="1.0" encoding="utf-8"?>
+<file path=ppt/slides/slide5.xml><?xml version="1.0" encoding="utf-8"?>
 <p:sld xmlns:a="http://schemas.openxmlformats.org/drawingml/2006/main" xmlns:r="http://schemas.openxmlformats.org/officeDocument/2006/relationships" xmlns:p="http://schemas.openxmlformats.org/presentationml/2006/main">
   <p:cSld>
     <p:spTree>
@@ -17096,7 +18792,7 @@
 </p:sld>
 </file>
 
-<file path=ppt/slides/slide5.xml><?xml version="1.0" encoding="utf-8"?>
+<file path=ppt/slides/slide6.xml><?xml version="1.0" encoding="utf-8"?>
 <p:sld xmlns:a="http://schemas.openxmlformats.org/drawingml/2006/main" xmlns:r="http://schemas.openxmlformats.org/officeDocument/2006/relationships" xmlns:p="http://schemas.openxmlformats.org/presentationml/2006/main">
   <p:cSld>
     <p:spTree>
@@ -18255,7 +19951,7 @@
 </p:sld>
 </file>
 
-<file path=ppt/slides/slide6.xml><?xml version="1.0" encoding="utf-8"?>
+<file path=ppt/slides/slide7.xml><?xml version="1.0" encoding="utf-8"?>
 <p:sld xmlns:a="http://schemas.openxmlformats.org/drawingml/2006/main" xmlns:r="http://schemas.openxmlformats.org/officeDocument/2006/relationships" xmlns:p="http://schemas.openxmlformats.org/presentationml/2006/main">
   <p:cSld>
     <p:bg>
@@ -18678,7 +20374,7 @@
 </p:sld>
 </file>
 
-<file path=ppt/slides/slide7.xml><?xml version="1.0" encoding="utf-8"?>
+<file path=ppt/slides/slide8.xml><?xml version="1.0" encoding="utf-8"?>
 <p:sld xmlns:a="http://schemas.openxmlformats.org/drawingml/2006/main" xmlns:r="http://schemas.openxmlformats.org/officeDocument/2006/relationships" xmlns:p="http://schemas.openxmlformats.org/presentationml/2006/main">
   <p:cSld>
     <p:bg>
@@ -19687,7 +21383,7 @@
 </p:sld>
 </file>
 
-<file path=ppt/slides/slide8.xml><?xml version="1.0" encoding="utf-8"?>
+<file path=ppt/slides/slide9.xml><?xml version="1.0" encoding="utf-8"?>
 <p:sld xmlns:a="http://schemas.openxmlformats.org/drawingml/2006/main" xmlns:r="http://schemas.openxmlformats.org/officeDocument/2006/relationships" xmlns:p="http://schemas.openxmlformats.org/presentationml/2006/main">
   <p:cSld>
     <p:bg>
@@ -20108,1370 +21804,6 @@
     <p:extLst>
       <p:ext uri="{BB962C8B-B14F-4D97-AF65-F5344CB8AC3E}">
         <p14:creationId xmlns:p14="http://schemas.microsoft.com/office/powerpoint/2010/main" val="1091462117"/>
-      </p:ext>
-    </p:extLst>
-  </p:cSld>
-  <p:clrMapOvr>
-    <a:masterClrMapping/>
-  </p:clrMapOvr>
-  <p:timing>
-    <p:tnLst>
-      <p:par>
-        <p:cTn id="1" dur="indefinite" restart="never" nodeType="tmRoot"/>
-      </p:par>
-    </p:tnLst>
-  </p:timing>
-</p:sld>
-</file>
-
-<file path=ppt/slides/slide9.xml><?xml version="1.0" encoding="utf-8"?>
-<p:sld xmlns:a="http://schemas.openxmlformats.org/drawingml/2006/main" xmlns:r="http://schemas.openxmlformats.org/officeDocument/2006/relationships" xmlns:p="http://schemas.openxmlformats.org/presentationml/2006/main">
-  <p:cSld>
-    <p:bg>
-      <p:bgPr>
-        <a:gradFill>
-          <a:gsLst>
-            <a:gs pos="100000">
-              <a:srgbClr val="D6E6F5"/>
-            </a:gs>
-            <a:gs pos="0">
-              <a:schemeClr val="accent1">
-                <a:lumMod val="5000"/>
-                <a:lumOff val="95000"/>
-              </a:schemeClr>
-            </a:gs>
-            <a:gs pos="27000">
-              <a:schemeClr val="accent1">
-                <a:lumMod val="45000"/>
-                <a:lumOff val="55000"/>
-              </a:schemeClr>
-            </a:gs>
-            <a:gs pos="83000">
-              <a:schemeClr val="accent1">
-                <a:lumMod val="45000"/>
-                <a:lumOff val="55000"/>
-              </a:schemeClr>
-            </a:gs>
-            <a:gs pos="100000">
-              <a:schemeClr val="accent1">
-                <a:lumMod val="30000"/>
-                <a:lumOff val="70000"/>
-              </a:schemeClr>
-            </a:gs>
-          </a:gsLst>
-          <a:lin ang="5400000" scaled="1"/>
-        </a:gradFill>
-        <a:effectLst/>
-      </p:bgPr>
-    </p:bg>
-    <p:spTree>
-      <p:nvGrpSpPr>
-        <p:cNvPr id="1" name=""/>
-        <p:cNvGrpSpPr/>
-        <p:nvPr/>
-      </p:nvGrpSpPr>
-      <p:grpSpPr>
-        <a:xfrm>
-          <a:off x="0" y="0"/>
-          <a:ext cx="0" cy="0"/>
-          <a:chOff x="0" y="0"/>
-          <a:chExt cx="0" cy="0"/>
-        </a:xfrm>
-      </p:grpSpPr>
-      <p:sp>
-        <p:nvSpPr>
-          <p:cNvPr id="7" name="Prostokąt 6"/>
-          <p:cNvSpPr/>
-          <p:nvPr/>
-        </p:nvSpPr>
-        <p:spPr>
-          <a:xfrm>
-            <a:off x="401443" y="384673"/>
-            <a:ext cx="11273883" cy="6186309"/>
-          </a:xfrm>
-          <a:prstGeom prst="rect">
-            <a:avLst/>
-          </a:prstGeom>
-        </p:spPr>
-        <p:txBody>
-          <a:bodyPr wrap="square">
-            <a:spAutoFit/>
-          </a:bodyPr>
-          <a:lstStyle/>
-          <a:p>
-            <a:r>
-              <a:rPr lang="en-US" b="1" dirty="0"/>
-              <a:t>W </a:t>
-            </a:r>
-            <a:r>
-              <a:rPr lang="en-US" b="1" dirty="0" err="1"/>
-              <a:t>kontekście</a:t>
-            </a:r>
-            <a:r>
-              <a:rPr lang="en-US" b="1" dirty="0"/>
-              <a:t> Automotive, Safety Lifecycle (</a:t>
-            </a:r>
-            <a:r>
-              <a:rPr lang="en-US" b="1" dirty="0" err="1"/>
-              <a:t>Cykl</a:t>
-            </a:r>
-            <a:r>
-              <a:rPr lang="en-US" b="1" dirty="0"/>
-              <a:t> </a:t>
-            </a:r>
-            <a:r>
-              <a:rPr lang="en-US" b="1" dirty="0" err="1"/>
-              <a:t>życia</a:t>
-            </a:r>
-            <a:r>
-              <a:rPr lang="en-US" b="1" dirty="0"/>
-              <a:t> </a:t>
-            </a:r>
-            <a:r>
-              <a:rPr lang="en-US" b="1" dirty="0" err="1"/>
-              <a:t>bezpieczeństwa</a:t>
-            </a:r>
-            <a:r>
-              <a:rPr lang="en-US" b="1" dirty="0"/>
-              <a:t>) to </a:t>
-            </a:r>
-            <a:r>
-              <a:rPr lang="en-US" b="1" dirty="0" err="1"/>
-              <a:t>ustrukturyzowany</a:t>
-            </a:r>
-            <a:r>
-              <a:rPr lang="en-US" b="1" dirty="0"/>
-              <a:t> </a:t>
-            </a:r>
-            <a:r>
-              <a:rPr lang="en-US" b="1" dirty="0" err="1"/>
-              <a:t>proces</a:t>
-            </a:r>
-            <a:r>
-              <a:rPr lang="en-US" b="1" dirty="0"/>
-              <a:t> </a:t>
-            </a:r>
-            <a:r>
-              <a:rPr lang="en-US" b="1" dirty="0" err="1"/>
-              <a:t>zdefiniowany</a:t>
-            </a:r>
-            <a:r>
-              <a:rPr lang="en-US" b="1" dirty="0"/>
-              <a:t> w </a:t>
-            </a:r>
-            <a:r>
-              <a:rPr lang="en-US" b="1" dirty="0" err="1"/>
-              <a:t>normie</a:t>
-            </a:r>
-            <a:r>
-              <a:rPr lang="en-US" b="1" dirty="0"/>
-              <a:t> ISO 26262, </a:t>
-            </a:r>
-            <a:r>
-              <a:rPr lang="en-US" b="1" dirty="0" err="1"/>
-              <a:t>który</a:t>
-            </a:r>
-            <a:r>
-              <a:rPr lang="en-US" b="1" dirty="0"/>
-              <a:t> ma </a:t>
-            </a:r>
-            <a:r>
-              <a:rPr lang="en-US" b="1" dirty="0" err="1"/>
-              <a:t>na</a:t>
-            </a:r>
-            <a:r>
-              <a:rPr lang="en-US" b="1" dirty="0"/>
-              <a:t> </a:t>
-            </a:r>
-            <a:r>
-              <a:rPr lang="en-US" b="1" dirty="0" err="1"/>
-              <a:t>celu</a:t>
-            </a:r>
-            <a:r>
-              <a:rPr lang="en-US" b="1" dirty="0"/>
-              <a:t> </a:t>
-            </a:r>
-            <a:r>
-              <a:rPr lang="en-US" b="1" dirty="0" err="1"/>
-              <a:t>wyeliminowanie</a:t>
-            </a:r>
-            <a:r>
-              <a:rPr lang="en-US" b="1" dirty="0"/>
-              <a:t> </a:t>
-            </a:r>
-            <a:r>
-              <a:rPr lang="en-US" b="1" dirty="0" err="1"/>
-              <a:t>lub</a:t>
-            </a:r>
-            <a:r>
-              <a:rPr lang="en-US" b="1" dirty="0"/>
-              <a:t> </a:t>
-            </a:r>
-            <a:r>
-              <a:rPr lang="en-US" b="1" dirty="0" err="1"/>
-              <a:t>zminimalizowanie</a:t>
-            </a:r>
-            <a:r>
-              <a:rPr lang="en-US" b="1" dirty="0"/>
-              <a:t> </a:t>
-            </a:r>
-            <a:r>
-              <a:rPr lang="en-US" b="1" dirty="0" err="1"/>
-              <a:t>ryzyka</a:t>
-            </a:r>
-            <a:r>
-              <a:rPr lang="en-US" b="1" dirty="0"/>
-              <a:t> </a:t>
-            </a:r>
-            <a:r>
-              <a:rPr lang="en-US" b="1" dirty="0" err="1"/>
-              <a:t>związanego</a:t>
-            </a:r>
-            <a:r>
-              <a:rPr lang="en-US" b="1" dirty="0"/>
-              <a:t> z </a:t>
-            </a:r>
-            <a:r>
-              <a:rPr lang="en-US" b="1" dirty="0" err="1"/>
-              <a:t>awariami</a:t>
-            </a:r>
-            <a:r>
-              <a:rPr lang="en-US" b="1" dirty="0"/>
-              <a:t> </a:t>
-            </a:r>
-            <a:r>
-              <a:rPr lang="en-US" b="1" dirty="0" err="1"/>
-              <a:t>systemów</a:t>
-            </a:r>
-            <a:r>
-              <a:rPr lang="en-US" b="1" dirty="0"/>
-              <a:t> </a:t>
-            </a:r>
-            <a:r>
-              <a:rPr lang="en-US" b="1" dirty="0" err="1"/>
-              <a:t>elektrycznych</a:t>
-            </a:r>
-            <a:r>
-              <a:rPr lang="en-US" b="1" dirty="0"/>
-              <a:t> </a:t>
-            </a:r>
-            <a:r>
-              <a:rPr lang="en-US" b="1" dirty="0" err="1"/>
-              <a:t>i</a:t>
-            </a:r>
-            <a:r>
-              <a:rPr lang="en-US" b="1" dirty="0"/>
-              <a:t> </a:t>
-            </a:r>
-            <a:r>
-              <a:rPr lang="en-US" b="1" dirty="0" err="1"/>
-              <a:t>elektronicznych</a:t>
-            </a:r>
-            <a:r>
-              <a:rPr lang="en-US" b="1" dirty="0"/>
-              <a:t> (E/E) w </a:t>
-            </a:r>
-            <a:r>
-              <a:rPr lang="en-US" b="1" dirty="0" err="1"/>
-              <a:t>pojazdach</a:t>
-            </a:r>
-            <a:r>
-              <a:rPr lang="en-US" b="1" dirty="0"/>
-              <a:t>. </a:t>
-            </a:r>
-            <a:endParaRPr lang="pl-PL" b="1" dirty="0" smtClean="0"/>
-          </a:p>
-          <a:p>
-            <a:pPr algn="ctr"/>
-            <a:r>
-              <a:rPr lang="en-US" b="1" dirty="0" err="1" smtClean="0"/>
-              <a:t>Proces</a:t>
-            </a:r>
-            <a:r>
-              <a:rPr lang="en-US" b="1" dirty="0" smtClean="0"/>
-              <a:t> </a:t>
-            </a:r>
-            <a:r>
-              <a:rPr lang="en-US" b="1" dirty="0"/>
-              <a:t>ten </a:t>
-            </a:r>
-            <a:r>
-              <a:rPr lang="en-US" b="1" dirty="0" err="1"/>
-              <a:t>obejmuje</a:t>
-            </a:r>
-            <a:r>
-              <a:rPr lang="en-US" b="1" dirty="0"/>
-              <a:t> </a:t>
-            </a:r>
-            <a:r>
-              <a:rPr lang="en-US" b="1" dirty="0" err="1"/>
-              <a:t>cały</a:t>
-            </a:r>
-            <a:r>
-              <a:rPr lang="en-US" b="1" dirty="0"/>
-              <a:t> „</a:t>
-            </a:r>
-            <a:r>
-              <a:rPr lang="en-US" b="1" dirty="0" err="1"/>
-              <a:t>żywot</a:t>
-            </a:r>
-            <a:r>
-              <a:rPr lang="en-US" b="1" dirty="0"/>
-              <a:t>” </a:t>
-            </a:r>
-            <a:r>
-              <a:rPr lang="en-US" b="1" dirty="0" err="1"/>
-              <a:t>produktu</a:t>
-            </a:r>
-            <a:r>
-              <a:rPr lang="en-US" b="1" dirty="0"/>
-              <a:t> – od </a:t>
-            </a:r>
-            <a:r>
-              <a:rPr lang="en-US" b="1" dirty="0" err="1"/>
-              <a:t>pierwszej</a:t>
-            </a:r>
-            <a:r>
-              <a:rPr lang="en-US" b="1" dirty="0"/>
-              <a:t> </a:t>
-            </a:r>
-            <a:r>
-              <a:rPr lang="en-US" b="1" dirty="0" err="1"/>
-              <a:t>idei</a:t>
-            </a:r>
-            <a:r>
-              <a:rPr lang="en-US" b="1" dirty="0"/>
-              <a:t> </a:t>
-            </a:r>
-            <a:r>
-              <a:rPr lang="en-US" b="1" dirty="0" err="1"/>
-              <a:t>aż</a:t>
-            </a:r>
-            <a:r>
-              <a:rPr lang="en-US" b="1" dirty="0"/>
-              <a:t> </a:t>
-            </a:r>
-            <a:r>
-              <a:rPr lang="en-US" b="1" dirty="0" err="1"/>
-              <a:t>po</a:t>
-            </a:r>
-            <a:r>
-              <a:rPr lang="en-US" b="1" dirty="0"/>
-              <a:t> </a:t>
-            </a:r>
-            <a:r>
-              <a:rPr lang="en-US" b="1" dirty="0" err="1"/>
-              <a:t>jego</a:t>
-            </a:r>
-            <a:r>
-              <a:rPr lang="en-US" b="1" dirty="0"/>
-              <a:t> </a:t>
-            </a:r>
-            <a:r>
-              <a:rPr lang="en-US" b="1" dirty="0" err="1"/>
-              <a:t>wycofanie</a:t>
-            </a:r>
-            <a:r>
-              <a:rPr lang="en-US" b="1" dirty="0"/>
-              <a:t> z </a:t>
-            </a:r>
-            <a:r>
-              <a:rPr lang="en-US" b="1" dirty="0" err="1"/>
-              <a:t>użytku</a:t>
-            </a:r>
-            <a:r>
-              <a:rPr lang="en-US" b="1" dirty="0" smtClean="0"/>
-              <a:t>.</a:t>
-            </a:r>
-            <a:endParaRPr lang="pl-PL" b="1" dirty="0" smtClean="0"/>
-          </a:p>
-          <a:p>
-            <a:endParaRPr lang="pl-PL" dirty="0"/>
-          </a:p>
-          <a:p>
-            <a:r>
-              <a:rPr lang="pl-PL" dirty="0" smtClean="0"/>
-              <a:t>1. </a:t>
-            </a:r>
-            <a:r>
-              <a:rPr lang="en-US" dirty="0" err="1" smtClean="0"/>
-              <a:t>Faza</a:t>
-            </a:r>
-            <a:r>
-              <a:rPr lang="en-US" dirty="0" smtClean="0"/>
-              <a:t> </a:t>
-            </a:r>
-            <a:r>
-              <a:rPr lang="en-US" dirty="0" err="1"/>
-              <a:t>koncepcyjna</a:t>
-            </a:r>
-            <a:r>
-              <a:rPr lang="en-US" dirty="0"/>
-              <a:t> (Concept Phase)To </a:t>
-            </a:r>
-            <a:r>
-              <a:rPr lang="en-US" dirty="0" err="1"/>
-              <a:t>tutaj</a:t>
-            </a:r>
-            <a:r>
-              <a:rPr lang="en-US" dirty="0"/>
-              <a:t> </a:t>
-            </a:r>
-            <a:r>
-              <a:rPr lang="en-US" dirty="0" err="1"/>
-              <a:t>zapadają</a:t>
-            </a:r>
-            <a:r>
-              <a:rPr lang="en-US" dirty="0"/>
-              <a:t> </a:t>
-            </a:r>
-            <a:r>
-              <a:rPr lang="en-US" dirty="0" err="1"/>
-              <a:t>kluczowe</a:t>
-            </a:r>
-            <a:r>
-              <a:rPr lang="en-US" dirty="0"/>
-              <a:t> </a:t>
-            </a:r>
-            <a:r>
-              <a:rPr lang="en-US" dirty="0" err="1"/>
-              <a:t>decyzje</a:t>
-            </a:r>
-            <a:r>
-              <a:rPr lang="en-US" dirty="0"/>
-              <a:t> </a:t>
-            </a:r>
-            <a:r>
-              <a:rPr lang="en-US" dirty="0" err="1"/>
-              <a:t>dotyczące</a:t>
-            </a:r>
-            <a:r>
-              <a:rPr lang="en-US" dirty="0"/>
-              <a:t> </a:t>
-            </a:r>
-            <a:r>
-              <a:rPr lang="en-US" dirty="0" err="1"/>
-              <a:t>bezpieczeństwa:Definicja</a:t>
-            </a:r>
-            <a:r>
-              <a:rPr lang="en-US" dirty="0"/>
-              <a:t> </a:t>
-            </a:r>
-            <a:r>
-              <a:rPr lang="en-US" dirty="0" err="1"/>
-              <a:t>elementu</a:t>
-            </a:r>
-            <a:r>
-              <a:rPr lang="en-US" dirty="0"/>
-              <a:t> (Item Definition): </a:t>
-            </a:r>
-            <a:r>
-              <a:rPr lang="en-US" dirty="0" err="1"/>
-              <a:t>Opisanie</a:t>
-            </a:r>
-            <a:r>
-              <a:rPr lang="en-US" dirty="0"/>
-              <a:t>, co system ma </a:t>
-            </a:r>
-            <a:r>
-              <a:rPr lang="en-US" dirty="0" err="1"/>
-              <a:t>robić</a:t>
-            </a:r>
-            <a:r>
-              <a:rPr lang="en-US" dirty="0"/>
-              <a:t> </a:t>
-            </a:r>
-            <a:r>
-              <a:rPr lang="en-US" dirty="0" err="1"/>
-              <a:t>i</a:t>
-            </a:r>
-            <a:r>
-              <a:rPr lang="en-US" dirty="0"/>
-              <a:t> </a:t>
-            </a:r>
-            <a:r>
-              <a:rPr lang="en-US" dirty="0" err="1"/>
-              <a:t>jak</a:t>
-            </a:r>
-            <a:r>
-              <a:rPr lang="en-US" dirty="0"/>
-              <a:t> </a:t>
-            </a:r>
-            <a:r>
-              <a:rPr lang="en-US" dirty="0" err="1"/>
-              <a:t>wchodzi</a:t>
-            </a:r>
-            <a:r>
-              <a:rPr lang="en-US" dirty="0"/>
-              <a:t> w </a:t>
-            </a:r>
-            <a:r>
-              <a:rPr lang="en-US" dirty="0" err="1"/>
-              <a:t>interakcję</a:t>
-            </a:r>
-            <a:r>
-              <a:rPr lang="en-US" dirty="0"/>
-              <a:t> z </a:t>
-            </a:r>
-            <a:r>
-              <a:rPr lang="en-US" dirty="0" err="1"/>
-              <a:t>innymi.HARA</a:t>
-            </a:r>
-            <a:r>
-              <a:rPr lang="en-US" dirty="0"/>
-              <a:t> (Hazard Analysis and Risk Assessment): </a:t>
-            </a:r>
-            <a:r>
-              <a:rPr lang="en-US" dirty="0" err="1"/>
-              <a:t>Identyfikacja</a:t>
-            </a:r>
-            <a:r>
-              <a:rPr lang="en-US" dirty="0"/>
-              <a:t> </a:t>
-            </a:r>
-            <a:r>
-              <a:rPr lang="en-US" dirty="0" err="1"/>
-              <a:t>potencjalnych</a:t>
-            </a:r>
-            <a:r>
-              <a:rPr lang="en-US" dirty="0"/>
-              <a:t> </a:t>
-            </a:r>
-            <a:r>
-              <a:rPr lang="en-US" dirty="0" err="1"/>
-              <a:t>zagrożeń</a:t>
-            </a:r>
-            <a:r>
-              <a:rPr lang="en-US" dirty="0"/>
-              <a:t> (np. </a:t>
-            </a:r>
-            <a:r>
-              <a:rPr lang="en-US" dirty="0" err="1"/>
-              <a:t>nagłe</a:t>
-            </a:r>
-            <a:r>
-              <a:rPr lang="en-US" dirty="0"/>
-              <a:t> </a:t>
-            </a:r>
-            <a:r>
-              <a:rPr lang="en-US" dirty="0" err="1"/>
-              <a:t>zablokowanie</a:t>
-            </a:r>
-            <a:r>
-              <a:rPr lang="en-US" dirty="0"/>
-              <a:t> </a:t>
-            </a:r>
-            <a:r>
-              <a:rPr lang="en-US" dirty="0" err="1"/>
-              <a:t>kół</a:t>
-            </a:r>
-            <a:r>
-              <a:rPr lang="en-US" dirty="0"/>
-              <a:t>) </a:t>
-            </a:r>
-            <a:r>
-              <a:rPr lang="en-US" dirty="0" err="1"/>
-              <a:t>i</a:t>
-            </a:r>
-            <a:r>
-              <a:rPr lang="en-US" dirty="0"/>
-              <a:t> </a:t>
-            </a:r>
-            <a:r>
-              <a:rPr lang="en-US" dirty="0" err="1"/>
-              <a:t>przypisanie</a:t>
-            </a:r>
-            <a:r>
-              <a:rPr lang="en-US" dirty="0"/>
-              <a:t> </a:t>
-            </a:r>
-            <a:r>
-              <a:rPr lang="en-US" dirty="0" err="1"/>
-              <a:t>im</a:t>
-            </a:r>
-            <a:r>
-              <a:rPr lang="en-US" dirty="0"/>
-              <a:t> </a:t>
-            </a:r>
-            <a:r>
-              <a:rPr lang="en-US" dirty="0" err="1"/>
-              <a:t>poziomów</a:t>
-            </a:r>
-            <a:r>
-              <a:rPr lang="en-US" dirty="0"/>
-              <a:t> ASIL (A-D).</a:t>
-            </a:r>
-            <a:r>
-              <a:rPr lang="en-US" dirty="0" err="1"/>
-              <a:t>Cele</a:t>
-            </a:r>
-            <a:r>
-              <a:rPr lang="en-US" dirty="0"/>
-              <a:t> </a:t>
-            </a:r>
-            <a:r>
-              <a:rPr lang="en-US" dirty="0" err="1"/>
-              <a:t>bezpieczeństwa</a:t>
-            </a:r>
-            <a:r>
-              <a:rPr lang="en-US" dirty="0"/>
-              <a:t> (Safety Goals): </a:t>
-            </a:r>
-            <a:r>
-              <a:rPr lang="en-US" dirty="0" err="1"/>
-              <a:t>Sformułowanie</a:t>
-            </a:r>
-            <a:r>
-              <a:rPr lang="en-US" dirty="0"/>
-              <a:t> </a:t>
-            </a:r>
-            <a:r>
-              <a:rPr lang="en-US" dirty="0" err="1"/>
-              <a:t>ogólnych</a:t>
-            </a:r>
-            <a:r>
-              <a:rPr lang="en-US" dirty="0"/>
-              <a:t> </a:t>
-            </a:r>
-            <a:r>
-              <a:rPr lang="en-US" dirty="0" err="1"/>
-              <a:t>wymagań</a:t>
-            </a:r>
-            <a:r>
-              <a:rPr lang="en-US" dirty="0"/>
-              <a:t>, </a:t>
-            </a:r>
-            <a:r>
-              <a:rPr lang="en-US" dirty="0" err="1"/>
-              <a:t>które</a:t>
-            </a:r>
-            <a:r>
-              <a:rPr lang="en-US" dirty="0"/>
-              <a:t> </a:t>
-            </a:r>
-            <a:r>
-              <a:rPr lang="en-US" dirty="0" err="1"/>
-              <a:t>zapobiegną</a:t>
-            </a:r>
-            <a:r>
-              <a:rPr lang="en-US" dirty="0"/>
-              <a:t> </a:t>
-            </a:r>
-            <a:r>
-              <a:rPr lang="en-US" dirty="0" err="1"/>
-              <a:t>zidentyfikowanym</a:t>
-            </a:r>
-            <a:r>
-              <a:rPr lang="en-US" dirty="0"/>
-              <a:t> </a:t>
-            </a:r>
-            <a:r>
-              <a:rPr lang="en-US" dirty="0" err="1"/>
-              <a:t>zagrożeniom</a:t>
-            </a:r>
-            <a:r>
-              <a:rPr lang="en-US" dirty="0" smtClean="0"/>
-              <a:t>.</a:t>
-            </a:r>
-            <a:endParaRPr lang="pl-PL" dirty="0" smtClean="0"/>
-          </a:p>
-          <a:p>
-            <a:endParaRPr lang="pl-PL" dirty="0" smtClean="0"/>
-          </a:p>
-          <a:p>
-            <a:r>
-              <a:rPr lang="pl-PL" dirty="0" smtClean="0"/>
-              <a:t>2. </a:t>
-            </a:r>
-            <a:r>
-              <a:rPr lang="en-US" dirty="0" err="1" smtClean="0"/>
-              <a:t>Rozwój</a:t>
-            </a:r>
-            <a:r>
-              <a:rPr lang="en-US" dirty="0" smtClean="0"/>
-              <a:t> </a:t>
-            </a:r>
-            <a:r>
-              <a:rPr lang="en-US" dirty="0" err="1"/>
-              <a:t>produktu</a:t>
-            </a:r>
-            <a:r>
-              <a:rPr lang="en-US" dirty="0"/>
-              <a:t> (Product Development)</a:t>
-            </a:r>
-            <a:r>
-              <a:rPr lang="en-US" dirty="0" err="1"/>
-              <a:t>Najbardziej</a:t>
-            </a:r>
-            <a:r>
-              <a:rPr lang="en-US" dirty="0"/>
-              <a:t> </a:t>
-            </a:r>
-            <a:r>
-              <a:rPr lang="en-US" dirty="0" err="1"/>
-              <a:t>rozbudowana</a:t>
-            </a:r>
-            <a:r>
-              <a:rPr lang="en-US" dirty="0"/>
-              <a:t> </a:t>
-            </a:r>
-            <a:r>
-              <a:rPr lang="en-US" dirty="0" err="1"/>
-              <a:t>faza</a:t>
-            </a:r>
-            <a:r>
-              <a:rPr lang="en-US" dirty="0"/>
-              <a:t>, </a:t>
-            </a:r>
-            <a:r>
-              <a:rPr lang="en-US" dirty="0" err="1"/>
-              <a:t>realizowana</a:t>
-            </a:r>
-            <a:r>
-              <a:rPr lang="en-US" dirty="0"/>
-              <a:t> </a:t>
-            </a:r>
-            <a:r>
-              <a:rPr lang="en-US" dirty="0" err="1"/>
-              <a:t>zgodnie</a:t>
-            </a:r>
-            <a:r>
-              <a:rPr lang="en-US" dirty="0"/>
-              <a:t> z </a:t>
-            </a:r>
-            <a:r>
-              <a:rPr lang="en-US" dirty="0" err="1"/>
-              <a:t>modelem</a:t>
-            </a:r>
-            <a:r>
-              <a:rPr lang="en-US" dirty="0"/>
-              <a:t> V: </a:t>
-            </a:r>
-            <a:r>
-              <a:rPr lang="en-US" dirty="0" err="1"/>
-              <a:t>Poziom</a:t>
-            </a:r>
-            <a:r>
-              <a:rPr lang="en-US" dirty="0"/>
-              <a:t> </a:t>
-            </a:r>
-            <a:r>
-              <a:rPr lang="en-US" dirty="0" err="1"/>
-              <a:t>systemowy</a:t>
-            </a:r>
-            <a:r>
-              <a:rPr lang="en-US" dirty="0"/>
-              <a:t>: </a:t>
-            </a:r>
-            <a:r>
-              <a:rPr lang="en-US" dirty="0" err="1"/>
-              <a:t>Tworzenie</a:t>
-            </a:r>
-            <a:r>
-              <a:rPr lang="en-US" dirty="0"/>
-              <a:t> </a:t>
-            </a:r>
-            <a:r>
-              <a:rPr lang="en-US" dirty="0" err="1"/>
-              <a:t>architektury</a:t>
-            </a:r>
-            <a:r>
-              <a:rPr lang="en-US" dirty="0"/>
-              <a:t> </a:t>
-            </a:r>
-            <a:r>
-              <a:rPr lang="en-US" dirty="0" err="1"/>
-              <a:t>systemu</a:t>
-            </a:r>
-            <a:r>
-              <a:rPr lang="en-US" dirty="0"/>
-              <a:t> </a:t>
-            </a:r>
-            <a:r>
-              <a:rPr lang="en-US" dirty="0" err="1"/>
-              <a:t>i</a:t>
-            </a:r>
-            <a:r>
-              <a:rPr lang="en-US" dirty="0"/>
-              <a:t> </a:t>
-            </a:r>
-            <a:r>
-              <a:rPr lang="en-US" dirty="0" err="1"/>
-              <a:t>określanie</a:t>
-            </a:r>
-            <a:r>
-              <a:rPr lang="en-US" dirty="0"/>
-              <a:t> </a:t>
-            </a:r>
-            <a:r>
-              <a:rPr lang="en-US" dirty="0" err="1"/>
-              <a:t>technicznych</a:t>
-            </a:r>
-            <a:r>
-              <a:rPr lang="en-US" dirty="0"/>
-              <a:t> </a:t>
-            </a:r>
-            <a:r>
-              <a:rPr lang="en-US" dirty="0" err="1"/>
-              <a:t>wymagań</a:t>
-            </a:r>
-            <a:r>
-              <a:rPr lang="en-US" dirty="0"/>
-              <a:t> </a:t>
-            </a:r>
-            <a:r>
-              <a:rPr lang="en-US" dirty="0" err="1"/>
-              <a:t>bezpieczeństwa.Poziom</a:t>
-            </a:r>
-            <a:r>
-              <a:rPr lang="en-US" dirty="0"/>
-              <a:t> </a:t>
-            </a:r>
-            <a:r>
-              <a:rPr lang="en-US" dirty="0" err="1"/>
-              <a:t>sprzętowy</a:t>
-            </a:r>
-            <a:r>
-              <a:rPr lang="en-US" dirty="0"/>
-              <a:t> (Hardware): </a:t>
-            </a:r>
-            <a:r>
-              <a:rPr lang="en-US" dirty="0" err="1"/>
-              <a:t>Projektowanie</a:t>
-            </a:r>
-            <a:r>
-              <a:rPr lang="en-US" dirty="0"/>
-              <a:t> </a:t>
-            </a:r>
-            <a:r>
-              <a:rPr lang="en-US" dirty="0" err="1"/>
-              <a:t>i</a:t>
-            </a:r>
-            <a:r>
-              <a:rPr lang="en-US" dirty="0"/>
-              <a:t> </a:t>
-            </a:r>
-            <a:r>
-              <a:rPr lang="en-US" dirty="0" err="1"/>
-              <a:t>testowanie</a:t>
-            </a:r>
-            <a:r>
-              <a:rPr lang="en-US" dirty="0"/>
-              <a:t> </a:t>
-            </a:r>
-            <a:r>
-              <a:rPr lang="en-US" dirty="0" err="1"/>
-              <a:t>podzespołów</a:t>
-            </a:r>
-            <a:r>
-              <a:rPr lang="en-US" dirty="0"/>
-              <a:t> (np. </a:t>
-            </a:r>
-            <a:r>
-              <a:rPr lang="en-US" dirty="0" err="1"/>
-              <a:t>procesorów</a:t>
-            </a:r>
-            <a:r>
-              <a:rPr lang="en-US" dirty="0"/>
-              <a:t>, </a:t>
-            </a:r>
-            <a:r>
-              <a:rPr lang="en-US" dirty="0" err="1"/>
-              <a:t>czujników</a:t>
-            </a:r>
-            <a:r>
-              <a:rPr lang="en-US" dirty="0"/>
-              <a:t>) pod </a:t>
-            </a:r>
-            <a:r>
-              <a:rPr lang="en-US" dirty="0" err="1"/>
-              <a:t>kątem</a:t>
-            </a:r>
-            <a:r>
-              <a:rPr lang="en-US" dirty="0"/>
-              <a:t> </a:t>
-            </a:r>
-            <a:r>
-              <a:rPr lang="en-US" dirty="0" err="1"/>
-              <a:t>awarii</a:t>
-            </a:r>
-            <a:r>
-              <a:rPr lang="en-US" dirty="0"/>
-              <a:t> </a:t>
-            </a:r>
-            <a:r>
-              <a:rPr lang="en-US" dirty="0" err="1"/>
-              <a:t>losowych.Poziom</a:t>
-            </a:r>
-            <a:r>
-              <a:rPr lang="en-US" dirty="0"/>
-              <a:t> </a:t>
-            </a:r>
-            <a:r>
-              <a:rPr lang="en-US" dirty="0" err="1"/>
-              <a:t>programowy</a:t>
-            </a:r>
-            <a:r>
-              <a:rPr lang="en-US" dirty="0"/>
-              <a:t> (Software): </a:t>
-            </a:r>
-            <a:r>
-              <a:rPr lang="en-US" dirty="0" err="1"/>
-              <a:t>Pisanie</a:t>
-            </a:r>
-            <a:r>
-              <a:rPr lang="en-US" dirty="0"/>
-              <a:t> </a:t>
-            </a:r>
-            <a:r>
-              <a:rPr lang="en-US" dirty="0" err="1"/>
-              <a:t>kodu</a:t>
-            </a:r>
-            <a:r>
-              <a:rPr lang="en-US" dirty="0"/>
-              <a:t> </a:t>
-            </a:r>
-            <a:r>
-              <a:rPr lang="en-US" dirty="0" err="1"/>
-              <a:t>zgodnie</a:t>
-            </a:r>
-            <a:r>
-              <a:rPr lang="en-US" dirty="0"/>
-              <a:t> z </a:t>
-            </a:r>
-            <a:r>
-              <a:rPr lang="en-US" dirty="0" err="1"/>
-              <a:t>rygorystycznymi</a:t>
-            </a:r>
-            <a:r>
-              <a:rPr lang="en-US" dirty="0"/>
-              <a:t> </a:t>
-            </a:r>
-            <a:r>
-              <a:rPr lang="en-US" dirty="0" err="1"/>
-              <a:t>standardami</a:t>
-            </a:r>
-            <a:r>
-              <a:rPr lang="en-US" dirty="0"/>
-              <a:t>, aby </a:t>
-            </a:r>
-            <a:r>
-              <a:rPr lang="en-US" dirty="0" err="1"/>
-              <a:t>uniknąć</a:t>
-            </a:r>
-            <a:r>
-              <a:rPr lang="en-US" dirty="0"/>
-              <a:t> </a:t>
-            </a:r>
-            <a:r>
-              <a:rPr lang="en-US" dirty="0" err="1"/>
-              <a:t>błędów</a:t>
-            </a:r>
-            <a:r>
-              <a:rPr lang="en-US" dirty="0"/>
-              <a:t> </a:t>
-            </a:r>
-            <a:r>
-              <a:rPr lang="en-US" dirty="0" err="1"/>
-              <a:t>projektowych.Integracja</a:t>
-            </a:r>
-            <a:r>
-              <a:rPr lang="en-US" dirty="0"/>
-              <a:t> </a:t>
-            </a:r>
-            <a:r>
-              <a:rPr lang="en-US" dirty="0" err="1"/>
-              <a:t>i</a:t>
-            </a:r>
-            <a:r>
-              <a:rPr lang="en-US" dirty="0"/>
-              <a:t> </a:t>
-            </a:r>
-            <a:r>
-              <a:rPr lang="en-US" dirty="0" err="1"/>
-              <a:t>walidacja</a:t>
-            </a:r>
-            <a:r>
-              <a:rPr lang="en-US" dirty="0"/>
-              <a:t>: </a:t>
-            </a:r>
-            <a:r>
-              <a:rPr lang="en-US" dirty="0" err="1"/>
-              <a:t>Sprawdzenie</a:t>
-            </a:r>
-            <a:r>
-              <a:rPr lang="en-US" dirty="0"/>
-              <a:t>, </a:t>
-            </a:r>
-            <a:r>
-              <a:rPr lang="en-US" dirty="0" err="1"/>
-              <a:t>czy</a:t>
-            </a:r>
-            <a:r>
-              <a:rPr lang="en-US" dirty="0"/>
-              <a:t> </a:t>
-            </a:r>
-            <a:r>
-              <a:rPr lang="en-US" dirty="0" err="1"/>
-              <a:t>gotowy</a:t>
-            </a:r>
-            <a:r>
-              <a:rPr lang="en-US" dirty="0"/>
-              <a:t> </a:t>
-            </a:r>
-            <a:r>
-              <a:rPr lang="en-US" dirty="0" err="1"/>
-              <a:t>produkt</a:t>
-            </a:r>
-            <a:r>
-              <a:rPr lang="en-US" dirty="0"/>
-              <a:t> </a:t>
-            </a:r>
-            <a:r>
-              <a:rPr lang="en-US" dirty="0" err="1"/>
-              <a:t>rzeczywiście</a:t>
-            </a:r>
-            <a:r>
-              <a:rPr lang="en-US" dirty="0"/>
-              <a:t> </a:t>
-            </a:r>
-            <a:r>
-              <a:rPr lang="en-US" dirty="0" err="1"/>
-              <a:t>spełnia</a:t>
-            </a:r>
-            <a:r>
-              <a:rPr lang="en-US" dirty="0"/>
-              <a:t> </a:t>
-            </a:r>
-            <a:r>
-              <a:rPr lang="en-US" dirty="0" err="1"/>
-              <a:t>założone</a:t>
-            </a:r>
-            <a:r>
-              <a:rPr lang="en-US" dirty="0"/>
-              <a:t> </a:t>
-            </a:r>
-            <a:r>
-              <a:rPr lang="en-US" dirty="0" err="1"/>
-              <a:t>cele</a:t>
-            </a:r>
-            <a:r>
-              <a:rPr lang="en-US" dirty="0"/>
-              <a:t> </a:t>
-            </a:r>
-            <a:r>
-              <a:rPr lang="en-US" dirty="0" err="1"/>
-              <a:t>bezpieczeństwa</a:t>
-            </a:r>
-            <a:r>
-              <a:rPr lang="en-US" dirty="0"/>
-              <a:t> w </a:t>
-            </a:r>
-            <a:r>
-              <a:rPr lang="en-US" dirty="0" err="1"/>
-              <a:t>rzeczywistych</a:t>
-            </a:r>
-            <a:r>
-              <a:rPr lang="en-US" dirty="0"/>
-              <a:t> </a:t>
-            </a:r>
-            <a:r>
-              <a:rPr lang="en-US" dirty="0" err="1"/>
-              <a:t>warunkach</a:t>
-            </a:r>
-            <a:r>
-              <a:rPr lang="en-US" dirty="0" smtClean="0"/>
-              <a:t>.</a:t>
-            </a:r>
-            <a:endParaRPr lang="pl-PL" dirty="0" smtClean="0"/>
-          </a:p>
-          <a:p>
-            <a:endParaRPr lang="pl-PL" dirty="0" smtClean="0"/>
-          </a:p>
-          <a:p>
-            <a:r>
-              <a:rPr lang="pl-PL" dirty="0" smtClean="0"/>
-              <a:t>3. </a:t>
-            </a:r>
-            <a:r>
-              <a:rPr lang="en-US" dirty="0" err="1" smtClean="0"/>
-              <a:t>Produkcja</a:t>
-            </a:r>
-            <a:r>
-              <a:rPr lang="en-US" dirty="0" smtClean="0"/>
-              <a:t> </a:t>
-            </a:r>
-            <a:r>
-              <a:rPr lang="en-US" dirty="0" err="1"/>
-              <a:t>i</a:t>
-            </a:r>
-            <a:r>
-              <a:rPr lang="en-US" dirty="0"/>
-              <a:t> </a:t>
-            </a:r>
-            <a:r>
-              <a:rPr lang="en-US" dirty="0" err="1"/>
-              <a:t>eksploatacja</a:t>
-            </a:r>
-            <a:r>
-              <a:rPr lang="en-US" dirty="0"/>
-              <a:t> (Production &amp; Operation)</a:t>
-            </a:r>
-            <a:r>
-              <a:rPr lang="en-US" dirty="0" err="1"/>
-              <a:t>Bezpieczeństwo</a:t>
-            </a:r>
-            <a:r>
-              <a:rPr lang="en-US" dirty="0"/>
-              <a:t> </a:t>
-            </a:r>
-            <a:r>
-              <a:rPr lang="en-US" dirty="0" err="1"/>
-              <a:t>musi</a:t>
-            </a:r>
-            <a:r>
-              <a:rPr lang="en-US" dirty="0"/>
-              <a:t> </a:t>
-            </a:r>
-            <a:r>
-              <a:rPr lang="en-US" dirty="0" err="1"/>
-              <a:t>być</a:t>
-            </a:r>
-            <a:r>
-              <a:rPr lang="en-US" dirty="0"/>
-              <a:t> </a:t>
-            </a:r>
-            <a:r>
-              <a:rPr lang="en-US" dirty="0" err="1"/>
-              <a:t>zachowane</a:t>
-            </a:r>
-            <a:r>
-              <a:rPr lang="en-US" dirty="0"/>
-              <a:t> </a:t>
-            </a:r>
-            <a:r>
-              <a:rPr lang="en-US" dirty="0" err="1"/>
-              <a:t>również</a:t>
-            </a:r>
-            <a:r>
-              <a:rPr lang="en-US" dirty="0"/>
-              <a:t> </a:t>
-            </a:r>
-            <a:r>
-              <a:rPr lang="en-US" dirty="0" err="1"/>
-              <a:t>po</a:t>
-            </a:r>
-            <a:r>
-              <a:rPr lang="en-US" dirty="0"/>
-              <a:t> </a:t>
-            </a:r>
-            <a:r>
-              <a:rPr lang="en-US" dirty="0" err="1"/>
-              <a:t>opuszczeniu</a:t>
-            </a:r>
-            <a:r>
-              <a:rPr lang="en-US" dirty="0"/>
-              <a:t> </a:t>
-            </a:r>
-            <a:r>
-              <a:rPr lang="en-US" dirty="0" err="1"/>
-              <a:t>fabryki:Produkcja</a:t>
-            </a:r>
-            <a:r>
-              <a:rPr lang="en-US" dirty="0"/>
-              <a:t>: </a:t>
-            </a:r>
-            <a:r>
-              <a:rPr lang="en-US" dirty="0" err="1"/>
-              <a:t>Zapewnienie</a:t>
-            </a:r>
-            <a:r>
-              <a:rPr lang="en-US" dirty="0"/>
-              <a:t>, </a:t>
-            </a:r>
-            <a:r>
-              <a:rPr lang="en-US" dirty="0" err="1"/>
-              <a:t>że</a:t>
-            </a:r>
-            <a:r>
-              <a:rPr lang="en-US" dirty="0"/>
-              <a:t> </a:t>
-            </a:r>
-            <a:r>
-              <a:rPr lang="en-US" dirty="0" err="1"/>
-              <a:t>każdy</a:t>
-            </a:r>
-            <a:r>
-              <a:rPr lang="en-US" dirty="0"/>
-              <a:t> </a:t>
-            </a:r>
-            <a:r>
-              <a:rPr lang="en-US" dirty="0" err="1"/>
-              <a:t>egzemplarz</a:t>
-            </a:r>
-            <a:r>
-              <a:rPr lang="en-US" dirty="0"/>
-              <a:t> jest </a:t>
-            </a:r>
-            <a:r>
-              <a:rPr lang="en-US" dirty="0" err="1"/>
-              <a:t>wykonany</a:t>
-            </a:r>
-            <a:r>
-              <a:rPr lang="en-US" dirty="0"/>
-              <a:t> </a:t>
-            </a:r>
-            <a:r>
-              <a:rPr lang="en-US" dirty="0" err="1"/>
-              <a:t>poprawnie</a:t>
-            </a:r>
-            <a:r>
-              <a:rPr lang="en-US" dirty="0"/>
-              <a:t> </a:t>
-            </a:r>
-            <a:r>
-              <a:rPr lang="en-US" dirty="0" err="1"/>
-              <a:t>i</a:t>
-            </a:r>
-            <a:r>
-              <a:rPr lang="en-US" dirty="0"/>
-              <a:t> bez wad </a:t>
-            </a:r>
-            <a:r>
-              <a:rPr lang="en-US" dirty="0" err="1"/>
-              <a:t>zagrażających</a:t>
-            </a:r>
-            <a:r>
-              <a:rPr lang="en-US" dirty="0"/>
-              <a:t> </a:t>
-            </a:r>
-            <a:r>
-              <a:rPr lang="en-US" dirty="0" err="1"/>
-              <a:t>bezpieczeństwu.Obsługa</a:t>
-            </a:r>
-            <a:r>
-              <a:rPr lang="en-US" dirty="0"/>
-              <a:t> </a:t>
-            </a:r>
-            <a:r>
-              <a:rPr lang="en-US" dirty="0" err="1"/>
-              <a:t>i</a:t>
-            </a:r>
-            <a:r>
-              <a:rPr lang="en-US" dirty="0"/>
-              <a:t> </a:t>
-            </a:r>
-            <a:r>
-              <a:rPr lang="en-US" dirty="0" err="1"/>
-              <a:t>serwis</a:t>
-            </a:r>
-            <a:r>
-              <a:rPr lang="en-US" dirty="0"/>
-              <a:t>: </a:t>
-            </a:r>
-            <a:r>
-              <a:rPr lang="en-US" dirty="0" err="1"/>
-              <a:t>Procedury</a:t>
-            </a:r>
-            <a:r>
-              <a:rPr lang="en-US" dirty="0"/>
-              <a:t> </a:t>
-            </a:r>
-            <a:r>
-              <a:rPr lang="en-US" dirty="0" err="1"/>
-              <a:t>napraw</a:t>
-            </a:r>
-            <a:r>
-              <a:rPr lang="en-US" dirty="0"/>
-              <a:t>, aby </a:t>
-            </a:r>
-            <a:r>
-              <a:rPr lang="en-US" dirty="0" err="1"/>
-              <a:t>nie</a:t>
-            </a:r>
-            <a:r>
-              <a:rPr lang="en-US" dirty="0"/>
-              <a:t> </a:t>
-            </a:r>
-            <a:r>
-              <a:rPr lang="en-US" dirty="0" err="1"/>
-              <a:t>naruszyć</a:t>
-            </a:r>
-            <a:r>
-              <a:rPr lang="en-US" dirty="0"/>
-              <a:t> </a:t>
-            </a:r>
-            <a:r>
-              <a:rPr lang="en-US" dirty="0" err="1"/>
-              <a:t>integralności</a:t>
-            </a:r>
-            <a:r>
-              <a:rPr lang="en-US" dirty="0"/>
-              <a:t> </a:t>
-            </a:r>
-            <a:r>
-              <a:rPr lang="en-US" dirty="0" err="1"/>
-              <a:t>systemów</a:t>
-            </a:r>
-            <a:r>
-              <a:rPr lang="en-US" dirty="0"/>
-              <a:t> </a:t>
-            </a:r>
-            <a:r>
-              <a:rPr lang="en-US" dirty="0" err="1"/>
-              <a:t>bezpieczeństwa.Wycofanie</a:t>
-            </a:r>
-            <a:r>
-              <a:rPr lang="en-US" dirty="0"/>
-              <a:t> z </a:t>
-            </a:r>
-            <a:r>
-              <a:rPr lang="en-US" dirty="0" err="1"/>
-              <a:t>eksploatacji</a:t>
-            </a:r>
-            <a:r>
-              <a:rPr lang="en-US" dirty="0"/>
-              <a:t> (Decommissioning): </a:t>
-            </a:r>
-            <a:r>
-              <a:rPr lang="en-US" dirty="0" err="1"/>
-              <a:t>Bezpieczne</a:t>
-            </a:r>
-            <a:r>
-              <a:rPr lang="en-US" dirty="0"/>
-              <a:t> </a:t>
-            </a:r>
-            <a:r>
-              <a:rPr lang="en-US" dirty="0" err="1"/>
-              <a:t>usunięcie</a:t>
-            </a:r>
-            <a:r>
-              <a:rPr lang="en-US" dirty="0"/>
-              <a:t> </a:t>
-            </a:r>
-            <a:r>
-              <a:rPr lang="en-US" dirty="0" err="1"/>
-              <a:t>produktu</a:t>
-            </a:r>
-            <a:r>
-              <a:rPr lang="en-US" dirty="0"/>
-              <a:t> z </a:t>
-            </a:r>
-            <a:r>
-              <a:rPr lang="en-US" dirty="0" err="1"/>
-              <a:t>rynku</a:t>
-            </a:r>
-            <a:r>
-              <a:rPr lang="en-US" dirty="0"/>
-              <a:t>. </a:t>
-            </a:r>
-          </a:p>
-        </p:txBody>
-      </p:sp>
-    </p:spTree>
-    <p:extLst>
-      <p:ext uri="{BB962C8B-B14F-4D97-AF65-F5344CB8AC3E}">
-        <p14:creationId xmlns:p14="http://schemas.microsoft.com/office/powerpoint/2010/main" val="1792836569"/>
       </p:ext>
     </p:extLst>
   </p:cSld>

--- a/R&D_Automotive/AUTOMOTIVE.pptx
+++ b/R&D_Automotive/AUTOMOTIVE.pptx
@@ -224,7 +224,7 @@
           <a:p>
             <a:fld id="{FFF193A8-9921-413C-B497-C8E23C4C8674}" type="datetimeFigureOut">
               <a:rPr lang="en-US" smtClean="0"/>
-              <a:t>2/13/2026</a:t>
+              <a:t>3/31/2026</a:t>
             </a:fld>
             <a:endParaRPr lang="en-US"/>
           </a:p>
@@ -623,7 +623,7 @@
           <a:p>
             <a:fld id="{B5ACFBCD-0C52-4AB4-A095-855112466BA7}" type="datetimeFigureOut">
               <a:rPr lang="en-US" smtClean="0"/>
-              <a:t>2/13/2026</a:t>
+              <a:t>3/31/2026</a:t>
             </a:fld>
             <a:endParaRPr lang="en-US"/>
           </a:p>
@@ -793,7 +793,7 @@
           <a:p>
             <a:fld id="{B5ACFBCD-0C52-4AB4-A095-855112466BA7}" type="datetimeFigureOut">
               <a:rPr lang="en-US" smtClean="0"/>
-              <a:t>2/13/2026</a:t>
+              <a:t>3/31/2026</a:t>
             </a:fld>
             <a:endParaRPr lang="en-US"/>
           </a:p>
@@ -973,7 +973,7 @@
           <a:p>
             <a:fld id="{B5ACFBCD-0C52-4AB4-A095-855112466BA7}" type="datetimeFigureOut">
               <a:rPr lang="en-US" smtClean="0"/>
-              <a:t>2/13/2026</a:t>
+              <a:t>3/31/2026</a:t>
             </a:fld>
             <a:endParaRPr lang="en-US"/>
           </a:p>
@@ -1143,7 +1143,7 @@
           <a:p>
             <a:fld id="{B5ACFBCD-0C52-4AB4-A095-855112466BA7}" type="datetimeFigureOut">
               <a:rPr lang="en-US" smtClean="0"/>
-              <a:t>2/13/2026</a:t>
+              <a:t>3/31/2026</a:t>
             </a:fld>
             <a:endParaRPr lang="en-US"/>
           </a:p>
@@ -1389,7 +1389,7 @@
           <a:p>
             <a:fld id="{B5ACFBCD-0C52-4AB4-A095-855112466BA7}" type="datetimeFigureOut">
               <a:rPr lang="en-US" smtClean="0"/>
-              <a:t>2/13/2026</a:t>
+              <a:t>3/31/2026</a:t>
             </a:fld>
             <a:endParaRPr lang="en-US"/>
           </a:p>
@@ -1621,7 +1621,7 @@
           <a:p>
             <a:fld id="{B5ACFBCD-0C52-4AB4-A095-855112466BA7}" type="datetimeFigureOut">
               <a:rPr lang="en-US" smtClean="0"/>
-              <a:t>2/13/2026</a:t>
+              <a:t>3/31/2026</a:t>
             </a:fld>
             <a:endParaRPr lang="en-US"/>
           </a:p>
@@ -1988,7 +1988,7 @@
           <a:p>
             <a:fld id="{B5ACFBCD-0C52-4AB4-A095-855112466BA7}" type="datetimeFigureOut">
               <a:rPr lang="en-US" smtClean="0"/>
-              <a:t>2/13/2026</a:t>
+              <a:t>3/31/2026</a:t>
             </a:fld>
             <a:endParaRPr lang="en-US"/>
           </a:p>
@@ -2106,7 +2106,7 @@
           <a:p>
             <a:fld id="{B5ACFBCD-0C52-4AB4-A095-855112466BA7}" type="datetimeFigureOut">
               <a:rPr lang="en-US" smtClean="0"/>
-              <a:t>2/13/2026</a:t>
+              <a:t>3/31/2026</a:t>
             </a:fld>
             <a:endParaRPr lang="en-US"/>
           </a:p>
@@ -2201,7 +2201,7 @@
           <a:p>
             <a:fld id="{B5ACFBCD-0C52-4AB4-A095-855112466BA7}" type="datetimeFigureOut">
               <a:rPr lang="en-US" smtClean="0"/>
-              <a:t>2/13/2026</a:t>
+              <a:t>3/31/2026</a:t>
             </a:fld>
             <a:endParaRPr lang="en-US"/>
           </a:p>
@@ -2478,7 +2478,7 @@
           <a:p>
             <a:fld id="{B5ACFBCD-0C52-4AB4-A095-855112466BA7}" type="datetimeFigureOut">
               <a:rPr lang="en-US" smtClean="0"/>
-              <a:t>2/13/2026</a:t>
+              <a:t>3/31/2026</a:t>
             </a:fld>
             <a:endParaRPr lang="en-US"/>
           </a:p>
@@ -2731,7 +2731,7 @@
           <a:p>
             <a:fld id="{B5ACFBCD-0C52-4AB4-A095-855112466BA7}" type="datetimeFigureOut">
               <a:rPr lang="en-US" smtClean="0"/>
-              <a:t>2/13/2026</a:t>
+              <a:t>3/31/2026</a:t>
             </a:fld>
             <a:endParaRPr lang="en-US"/>
           </a:p>
@@ -2944,7 +2944,7 @@
           <a:p>
             <a:fld id="{B5ACFBCD-0C52-4AB4-A095-855112466BA7}" type="datetimeFigureOut">
               <a:rPr lang="en-US" smtClean="0"/>
-              <a:t>2/13/2026</a:t>
+              <a:t>3/31/2026</a:t>
             </a:fld>
             <a:endParaRPr lang="en-US"/>
           </a:p>
@@ -6947,7 +6947,7 @@
           <a:graphicData uri="http://schemas.openxmlformats.org/presentationml/2006/ole">
             <mc:AlternateContent xmlns:mc="http://schemas.openxmlformats.org/markup-compatibility/2006">
               <mc:Choice xmlns:v="urn:schemas-microsoft-com:vml" Requires="v">
-                <p:oleObj spid="_x0000_s2079" name="Arkusz" r:id="rId3" imgW="10372571" imgH="1485900" progId="Excel.Sheet.12">
+                <p:oleObj spid="_x0000_s2080" name="Arkusz" r:id="rId3" imgW="10372571" imgH="1485900" progId="Excel.Sheet.12">
                   <p:embed/>
                 </p:oleObj>
               </mc:Choice>
@@ -13535,35 +13535,35 @@
           <p:nvPr>
             <p:extLst>
               <p:ext uri="{D42A27DB-BD31-4B8C-83A1-F6EECF244321}">
-                <p14:modId xmlns:p14="http://schemas.microsoft.com/office/powerpoint/2010/main" val="3658711474"/>
+                <p14:modId xmlns:p14="http://schemas.microsoft.com/office/powerpoint/2010/main" val="729049279"/>
               </p:ext>
             </p:extLst>
           </p:nvPr>
         </p:nvGraphicFramePr>
         <p:xfrm>
           <a:off x="413357" y="662619"/>
-          <a:ext cx="11386160" cy="5090160"/>
+          <a:ext cx="11386160" cy="5425440"/>
         </p:xfrm>
         <a:graphic>
           <a:graphicData uri="http://schemas.openxmlformats.org/drawingml/2006/table">
             <a:tbl>
               <a:tblPr/>
               <a:tblGrid>
-                <a:gridCol w="1423270">
+                <a:gridCol w="1657181">
                   <a:extLst>
                     <a:ext uri="{9D8B030D-6E8A-4147-A177-3AD203B41FA5}">
                       <a16:colId xmlns:a16="http://schemas.microsoft.com/office/drawing/2014/main" val="2306949278"/>
                     </a:ext>
                   </a:extLst>
                 </a:gridCol>
-                <a:gridCol w="1423270">
+                <a:gridCol w="1387365">
                   <a:extLst>
                     <a:ext uri="{9D8B030D-6E8A-4147-A177-3AD203B41FA5}">
                       <a16:colId xmlns:a16="http://schemas.microsoft.com/office/drawing/2014/main" val="3954521146"/>
                     </a:ext>
                   </a:extLst>
                 </a:gridCol>
-                <a:gridCol w="1600202">
+                <a:gridCol w="1402196">
                   <a:extLst>
                     <a:ext uri="{9D8B030D-6E8A-4147-A177-3AD203B41FA5}">
                       <a16:colId xmlns:a16="http://schemas.microsoft.com/office/drawing/2014/main" val="4102643486"/>

--- a/R&D_Automotive/AUTOMOTIVE.pptx
+++ b/R&D_Automotive/AUTOMOTIVE.pptx
@@ -3525,16 +3525,14 @@
       </p:pic>
       <p:pic>
         <p:nvPicPr>
-          <p:cNvPr id="3082" name="Picture 10" descr="GitHub Logo: valor, história, PNG">
-            <a:hlinkClick r:id="rId7"/>
-          </p:cNvPr>
+          <p:cNvPr id="3082" name="Picture 10" descr="GitHub Logo: valor, história, PNG"/>
           <p:cNvPicPr>
             <a:picLocks noChangeAspect="1" noChangeArrowheads="1"/>
           </p:cNvPicPr>
           <p:nvPr/>
         </p:nvPicPr>
         <p:blipFill>
-          <a:blip r:embed="rId8" cstate="print">
+          <a:blip r:embed="rId7" cstate="print">
             <a:extLst>
               <a:ext uri="{28A0092B-C50C-407E-A947-70E740481C1C}">
                 <a14:useLocalDpi xmlns:a14="http://schemas.microsoft.com/office/drawing/2010/main" val="0"/>
@@ -3569,7 +3567,7 @@
       <p:pic>
         <p:nvPicPr>
           <p:cNvPr id="3086" name="Picture 14" descr="Python data analysis library Icons, Logos, Symbols – Free Download PNG, SVG">
-            <a:hlinkClick r:id="rId9"/>
+            <a:hlinkClick r:id="rId8"/>
           </p:cNvPr>
           <p:cNvPicPr>
             <a:picLocks noChangeAspect="1" noChangeArrowheads="1"/>
@@ -3577,7 +3575,7 @@
           <p:nvPr/>
         </p:nvPicPr>
         <p:blipFill>
-          <a:blip r:embed="rId10" cstate="print">
+          <a:blip r:embed="rId9" cstate="print">
             <a:extLst>
               <a:ext uri="{28A0092B-C50C-407E-A947-70E740481C1C}">
                 <a14:useLocalDpi xmlns:a14="http://schemas.microsoft.com/office/drawing/2010/main" val="0"/>
@@ -3618,7 +3616,7 @@
           <p:nvPr/>
         </p:nvPicPr>
         <p:blipFill>
-          <a:blip r:embed="rId11" cstate="print">
+          <a:blip r:embed="rId10" cstate="print">
             <a:extLst>
               <a:ext uri="{28A0092B-C50C-407E-A947-70E740481C1C}">
                 <a14:useLocalDpi xmlns:a14="http://schemas.microsoft.com/office/drawing/2010/main" val="0"/>
@@ -6947,7 +6945,7 @@
           <a:graphicData uri="http://schemas.openxmlformats.org/presentationml/2006/ole">
             <mc:AlternateContent xmlns:mc="http://schemas.openxmlformats.org/markup-compatibility/2006">
               <mc:Choice xmlns:v="urn:schemas-microsoft-com:vml" Requires="v">
-                <p:oleObj spid="_x0000_s2080" name="Arkusz" r:id="rId3" imgW="10372571" imgH="1485900" progId="Excel.Sheet.12">
+                <p:oleObj spid="_x0000_s2081" name="Arkusz" r:id="rId3" imgW="10372571" imgH="1485900" progId="Excel.Sheet.12">
                   <p:embed/>
                 </p:oleObj>
               </mc:Choice>

--- a/R&D_Automotive/AUTOMOTIVE.pptx
+++ b/R&D_Automotive/AUTOMOTIVE.pptx
@@ -224,7 +224,7 @@
           <a:p>
             <a:fld id="{FFF193A8-9921-413C-B497-C8E23C4C8674}" type="datetimeFigureOut">
               <a:rPr lang="en-US" smtClean="0"/>
-              <a:t>3/31/2026</a:t>
+              <a:t>4/8/2026</a:t>
             </a:fld>
             <a:endParaRPr lang="en-US"/>
           </a:p>
@@ -623,7 +623,7 @@
           <a:p>
             <a:fld id="{B5ACFBCD-0C52-4AB4-A095-855112466BA7}" type="datetimeFigureOut">
               <a:rPr lang="en-US" smtClean="0"/>
-              <a:t>3/31/2026</a:t>
+              <a:t>4/8/2026</a:t>
             </a:fld>
             <a:endParaRPr lang="en-US"/>
           </a:p>
@@ -793,7 +793,7 @@
           <a:p>
             <a:fld id="{B5ACFBCD-0C52-4AB4-A095-855112466BA7}" type="datetimeFigureOut">
               <a:rPr lang="en-US" smtClean="0"/>
-              <a:t>3/31/2026</a:t>
+              <a:t>4/8/2026</a:t>
             </a:fld>
             <a:endParaRPr lang="en-US"/>
           </a:p>
@@ -973,7 +973,7 @@
           <a:p>
             <a:fld id="{B5ACFBCD-0C52-4AB4-A095-855112466BA7}" type="datetimeFigureOut">
               <a:rPr lang="en-US" smtClean="0"/>
-              <a:t>3/31/2026</a:t>
+              <a:t>4/8/2026</a:t>
             </a:fld>
             <a:endParaRPr lang="en-US"/>
           </a:p>
@@ -1143,7 +1143,7 @@
           <a:p>
             <a:fld id="{B5ACFBCD-0C52-4AB4-A095-855112466BA7}" type="datetimeFigureOut">
               <a:rPr lang="en-US" smtClean="0"/>
-              <a:t>3/31/2026</a:t>
+              <a:t>4/8/2026</a:t>
             </a:fld>
             <a:endParaRPr lang="en-US"/>
           </a:p>
@@ -1389,7 +1389,7 @@
           <a:p>
             <a:fld id="{B5ACFBCD-0C52-4AB4-A095-855112466BA7}" type="datetimeFigureOut">
               <a:rPr lang="en-US" smtClean="0"/>
-              <a:t>3/31/2026</a:t>
+              <a:t>4/8/2026</a:t>
             </a:fld>
             <a:endParaRPr lang="en-US"/>
           </a:p>
@@ -1621,7 +1621,7 @@
           <a:p>
             <a:fld id="{B5ACFBCD-0C52-4AB4-A095-855112466BA7}" type="datetimeFigureOut">
               <a:rPr lang="en-US" smtClean="0"/>
-              <a:t>3/31/2026</a:t>
+              <a:t>4/8/2026</a:t>
             </a:fld>
             <a:endParaRPr lang="en-US"/>
           </a:p>
@@ -1988,7 +1988,7 @@
           <a:p>
             <a:fld id="{B5ACFBCD-0C52-4AB4-A095-855112466BA7}" type="datetimeFigureOut">
               <a:rPr lang="en-US" smtClean="0"/>
-              <a:t>3/31/2026</a:t>
+              <a:t>4/8/2026</a:t>
             </a:fld>
             <a:endParaRPr lang="en-US"/>
           </a:p>
@@ -2106,7 +2106,7 @@
           <a:p>
             <a:fld id="{B5ACFBCD-0C52-4AB4-A095-855112466BA7}" type="datetimeFigureOut">
               <a:rPr lang="en-US" smtClean="0"/>
-              <a:t>3/31/2026</a:t>
+              <a:t>4/8/2026</a:t>
             </a:fld>
             <a:endParaRPr lang="en-US"/>
           </a:p>
@@ -2201,7 +2201,7 @@
           <a:p>
             <a:fld id="{B5ACFBCD-0C52-4AB4-A095-855112466BA7}" type="datetimeFigureOut">
               <a:rPr lang="en-US" smtClean="0"/>
-              <a:t>3/31/2026</a:t>
+              <a:t>4/8/2026</a:t>
             </a:fld>
             <a:endParaRPr lang="en-US"/>
           </a:p>
@@ -2478,7 +2478,7 @@
           <a:p>
             <a:fld id="{B5ACFBCD-0C52-4AB4-A095-855112466BA7}" type="datetimeFigureOut">
               <a:rPr lang="en-US" smtClean="0"/>
-              <a:t>3/31/2026</a:t>
+              <a:t>4/8/2026</a:t>
             </a:fld>
             <a:endParaRPr lang="en-US"/>
           </a:p>
@@ -2731,7 +2731,7 @@
           <a:p>
             <a:fld id="{B5ACFBCD-0C52-4AB4-A095-855112466BA7}" type="datetimeFigureOut">
               <a:rPr lang="en-US" smtClean="0"/>
-              <a:t>3/31/2026</a:t>
+              <a:t>4/8/2026</a:t>
             </a:fld>
             <a:endParaRPr lang="en-US"/>
           </a:p>
@@ -2944,7 +2944,7 @@
           <a:p>
             <a:fld id="{B5ACFBCD-0C52-4AB4-A095-855112466BA7}" type="datetimeFigureOut">
               <a:rPr lang="en-US" smtClean="0"/>
-              <a:t>3/31/2026</a:t>
+              <a:t>4/8/2026</a:t>
             </a:fld>
             <a:endParaRPr lang="en-US"/>
           </a:p>
@@ -6945,7 +6945,7 @@
           <a:graphicData uri="http://schemas.openxmlformats.org/presentationml/2006/ole">
             <mc:AlternateContent xmlns:mc="http://schemas.openxmlformats.org/markup-compatibility/2006">
               <mc:Choice xmlns:v="urn:schemas-microsoft-com:vml" Requires="v">
-                <p:oleObj spid="_x0000_s2081" name="Arkusz" r:id="rId3" imgW="10372571" imgH="1485900" progId="Excel.Sheet.12">
+                <p:oleObj spid="_x0000_s2082" name="Arkusz" r:id="rId3" imgW="10372571" imgH="1485900" progId="Excel.Sheet.12">
                   <p:embed/>
                 </p:oleObj>
               </mc:Choice>
@@ -13533,70 +13533,70 @@
           <p:nvPr>
             <p:extLst>
               <p:ext uri="{D42A27DB-BD31-4B8C-83A1-F6EECF244321}">
-                <p14:modId xmlns:p14="http://schemas.microsoft.com/office/powerpoint/2010/main" val="729049279"/>
+                <p14:modId xmlns:p14="http://schemas.microsoft.com/office/powerpoint/2010/main" val="423131597"/>
               </p:ext>
             </p:extLst>
           </p:nvPr>
         </p:nvGraphicFramePr>
         <p:xfrm>
           <a:off x="413357" y="662619"/>
-          <a:ext cx="11386160" cy="5425440"/>
+          <a:ext cx="11386160" cy="5090160"/>
         </p:xfrm>
         <a:graphic>
           <a:graphicData uri="http://schemas.openxmlformats.org/drawingml/2006/table">
             <a:tbl>
               <a:tblPr/>
               <a:tblGrid>
-                <a:gridCol w="1657181">
+                <a:gridCol w="1615140">
                   <a:extLst>
                     <a:ext uri="{9D8B030D-6E8A-4147-A177-3AD203B41FA5}">
                       <a16:colId xmlns:a16="http://schemas.microsoft.com/office/drawing/2014/main" val="2306949278"/>
                     </a:ext>
                   </a:extLst>
                 </a:gridCol>
-                <a:gridCol w="1387365">
+                <a:gridCol w="1355834">
                   <a:extLst>
                     <a:ext uri="{9D8B030D-6E8A-4147-A177-3AD203B41FA5}">
                       <a16:colId xmlns:a16="http://schemas.microsoft.com/office/drawing/2014/main" val="3954521146"/>
                     </a:ext>
                   </a:extLst>
                 </a:gridCol>
-                <a:gridCol w="1402196">
+                <a:gridCol w="1618593">
                   <a:extLst>
                     <a:ext uri="{9D8B030D-6E8A-4147-A177-3AD203B41FA5}">
                       <a16:colId xmlns:a16="http://schemas.microsoft.com/office/drawing/2014/main" val="4102643486"/>
                     </a:ext>
                   </a:extLst>
                 </a:gridCol>
-                <a:gridCol w="1246338">
+                <a:gridCol w="1324304">
                   <a:extLst>
                     <a:ext uri="{9D8B030D-6E8A-4147-A177-3AD203B41FA5}">
                       <a16:colId xmlns:a16="http://schemas.microsoft.com/office/drawing/2014/main" val="4181336957"/>
                     </a:ext>
                   </a:extLst>
                 </a:gridCol>
-                <a:gridCol w="1423270">
+                <a:gridCol w="1261241">
                   <a:extLst>
                     <a:ext uri="{9D8B030D-6E8A-4147-A177-3AD203B41FA5}">
                       <a16:colId xmlns:a16="http://schemas.microsoft.com/office/drawing/2014/main" val="1079637335"/>
                     </a:ext>
                   </a:extLst>
                 </a:gridCol>
-                <a:gridCol w="1509190">
+                <a:gridCol w="1471448">
                   <a:extLst>
                     <a:ext uri="{9D8B030D-6E8A-4147-A177-3AD203B41FA5}">
                       <a16:colId xmlns:a16="http://schemas.microsoft.com/office/drawing/2014/main" val="802477723"/>
                     </a:ext>
                   </a:extLst>
                 </a:gridCol>
-                <a:gridCol w="1337350">
+                <a:gridCol w="1555531">
                   <a:extLst>
                     <a:ext uri="{9D8B030D-6E8A-4147-A177-3AD203B41FA5}">
                       <a16:colId xmlns:a16="http://schemas.microsoft.com/office/drawing/2014/main" val="4261543798"/>
                     </a:ext>
                   </a:extLst>
                 </a:gridCol>
-                <a:gridCol w="1423270">
+                <a:gridCol w="1184069">
                   <a:extLst>
                     <a:ext uri="{9D8B030D-6E8A-4147-A177-3AD203B41FA5}">
                       <a16:colId xmlns:a16="http://schemas.microsoft.com/office/drawing/2014/main" val="2493812471"/>
